--- a/Renault_RSE.pptx
+++ b/Renault_RSE.pptx
@@ -4,26 +4,31 @@
   <p:sldMasterIdLst>
     <p:sldMasterId id="2147483648" r:id="rId1"/>
   </p:sldMasterIdLst>
+  <p:notesMasterIdLst>
+    <p:notesMasterId r:id="rId21"/>
+  </p:notesMasterIdLst>
   <p:sldIdLst>
-    <p:sldId id="256" r:id="rId7"/>
-    <p:sldId id="257" r:id="rId9"/>
-    <p:sldId id="258" r:id="rId10"/>
-    <p:sldId id="259" r:id="rId11"/>
-    <p:sldId id="260" r:id="rId12"/>
-    <p:sldId id="261" r:id="rId13"/>
-    <p:sldId id="262" r:id="rId14"/>
-    <p:sldId id="263" r:id="rId15"/>
-    <p:sldId id="264" r:id="rId16"/>
-    <p:sldId id="265" r:id="rId17"/>
-    <p:sldId id="266" r:id="rId18"/>
-    <p:sldId id="267" r:id="rId19"/>
-    <p:sldId id="268" r:id="rId20"/>
-    <p:sldId id="269" r:id="rId21"/>
-    <p:sldId id="270" r:id="rId22"/>
-    <p:sldId id="271" r:id="rId23"/>
-    <p:sldId id="272" r:id="rId24"/>
+    <p:sldId id="256" r:id="rId2"/>
+    <p:sldId id="257" r:id="rId3"/>
+    <p:sldId id="258" r:id="rId4"/>
+    <p:sldId id="259" r:id="rId5"/>
+    <p:sldId id="260" r:id="rId6"/>
+    <p:sldId id="261" r:id="rId7"/>
+    <p:sldId id="262" r:id="rId8"/>
+    <p:sldId id="263" r:id="rId9"/>
+    <p:sldId id="264" r:id="rId10"/>
+    <p:sldId id="265" r:id="rId11"/>
+    <p:sldId id="266" r:id="rId12"/>
+    <p:sldId id="267" r:id="rId13"/>
+    <p:sldId id="268" r:id="rId14"/>
+    <p:sldId id="269" r:id="rId15"/>
+    <p:sldId id="270" r:id="rId16"/>
+    <p:sldId id="271" r:id="rId17"/>
+    <p:sldId id="273" r:id="rId18"/>
+    <p:sldId id="274" r:id="rId19"/>
+    <p:sldId id="272" r:id="rId20"/>
   </p:sldIdLst>
-  <p:sldSz cx="12191695" cy="6858000" type="screen4x3"/>
+  <p:sldSz cx="12192000" cy="6858000"/>
   <p:notesSz cx="6858000" cy="9144000"/>
   <p:defaultTextStyle>
     <a:defPPr>
@@ -120,12 +125,39 @@
       </a:defRPr>
     </a:lvl9pPr>
   </p:defaultTextStyle>
+  <p:extLst>
+    <p:ext uri="{EFAFB233-063F-42B5-8137-9DF3F51BA10A}">
+      <p15:sldGuideLst xmlns:p15="http://schemas.microsoft.com/office/powerpoint/2012/main">
+        <p15:guide id="1" orient="horz" pos="2160">
+          <p15:clr>
+            <a:srgbClr val="A4A3A4"/>
+          </p15:clr>
+        </p15:guide>
+        <p15:guide id="2" pos="2880">
+          <p15:clr>
+            <a:srgbClr val="A4A3A4"/>
+          </p15:clr>
+        </p15:guide>
+      </p15:sldGuideLst>
+    </p:ext>
+  </p:extLst>
 </p:presentation>
 </file>
 
+<file path=ppt/revisionInfo.xml><?xml version="1.0" encoding="utf-8"?>
+<p1510:revInfo xmlns:a="http://schemas.openxmlformats.org/drawingml/2006/main" xmlns:r="http://schemas.openxmlformats.org/officeDocument/2006/relationships" xmlns:p1510="http://schemas.microsoft.com/office/powerpoint/2015/10/main">
+  <p1510:revLst>
+    <p1510:client id="{68FE2B79-5054-745B-B485-474E1730431A}" v="129" dt="2026-09-28T10:14:21.988"/>
+  </p1510:revLst>
+</p1510:revInfo>
+</file>
+
 <file path=ppt/charts/chart1.xml><?xml version="1.0" encoding="utf-8"?>
-<c:chartSpace xmlns:c="http://schemas.openxmlformats.org/drawingml/2006/chart" xmlns:a="http://schemas.openxmlformats.org/drawingml/2006/main" xmlns:r="http://schemas.openxmlformats.org/officeDocument/2006/relationships">
+<c:chartSpace xmlns:c="http://schemas.openxmlformats.org/drawingml/2006/chart" xmlns:a="http://schemas.openxmlformats.org/drawingml/2006/main" xmlns:r="http://schemas.openxmlformats.org/officeDocument/2006/relationships" xmlns:c16r2="http://schemas.microsoft.com/office/drawing/2015/06/chart">
   <c:date1904 val="0"/>
+  <c:lang val="en-US"/>
+  <c:roundedCorners val="1"/>
+  <c:style val="2"/>
   <c:chart>
     <c:title>
       <c:tx>
@@ -134,20 +166,21 @@
           <a:lstStyle/>
           <a:p>
             <a:r>
-              <a:rPr sz="1400" b="1"/>
+              <a:rPr lang="en-US" sz="1400" b="1"/>
               <a:t>Réduction des émissions de GES vs 2019 (%)</a:t>
             </a:r>
           </a:p>
         </c:rich>
       </c:tx>
-      <c:layout/>
       <c:overlay val="0"/>
     </c:title>
     <c:autoTitleDeleted val="0"/>
     <c:plotArea>
+      <c:layout/>
       <c:barChart>
         <c:barDir val="col"/>
         <c:grouping val="clustered"/>
+        <c:varyColors val="1"/>
         <c:ser>
           <c:idx val="0"/>
           <c:order val="0"/>
@@ -167,6 +200,44 @@
               <a:srgbClr val="111111"/>
             </a:solidFill>
           </c:spPr>
+          <c:invertIfNegative val="1"/>
+          <c:dLbls>
+            <c:numFmt formatCode="&quot;−&quot;General&quot; %&quot;" sourceLinked="0"/>
+            <c:spPr>
+              <a:noFill/>
+              <a:ln>
+                <a:noFill/>
+              </a:ln>
+              <a:effectLst/>
+            </c:spPr>
+            <c:txPr>
+              <a:bodyPr/>
+              <a:lstStyle/>
+              <a:p>
+                <a:pPr>
+                  <a:defRPr sz="1200">
+                    <a:solidFill>
+                      <a:srgbClr val="1A1A1A"/>
+                    </a:solidFill>
+                  </a:defRPr>
+                </a:pPr>
+                <a:endParaRPr lang="en-US"/>
+              </a:p>
+            </c:txPr>
+            <c:dLblPos val="outEnd"/>
+            <c:showLegendKey val="0"/>
+            <c:showVal val="1"/>
+            <c:showCatName val="0"/>
+            <c:showSerName val="0"/>
+            <c:showPercent val="0"/>
+            <c:showBubbleSize val="0"/>
+            <c:showLeaderLines val="0"/>
+            <c:extLst>
+              <c:ext xmlns:c15="http://schemas.microsoft.com/office/drawing/2012/chart" uri="{CE6537A1-D6FC-4f65-9D91-7224C49458BB}">
+                <c15:showLeaderLines val="0"/>
+              </c:ext>
+            </c:extLst>
+          </c:dLbls>
           <c:cat>
             <c:strRef>
               <c:f>Sheet1!$A$2:$A$3</c:f>
@@ -196,6 +267,20 @@
               </c:numCache>
             </c:numRef>
           </c:val>
+          <c:extLst>
+            <c:ext xmlns:c14="http://schemas.microsoft.com/office/drawing/2007/8/2/chart" uri="{6F2FDCE9-48DA-4B69-8628-5D25D57E5C99}">
+              <c14:invertSolidFillFmt>
+                <c14:spPr xmlns:c14="http://schemas.microsoft.com/office/drawing/2007/8/2/chart">
+                  <a:solidFill>
+                    <a:srgbClr val="FFFFFF"/>
+                  </a:solidFill>
+                </c14:spPr>
+              </c14:invertSolidFillFmt>
+            </c:ext>
+            <c:ext xmlns:c16="http://schemas.microsoft.com/office/drawing/2014/chart" uri="{C3380CC4-5D6E-409C-BE32-E72D297353CC}">
+              <c16:uniqueId val="{00000000-BBF7-4EB8-AA40-D5080FECE65B}"/>
+            </c:ext>
+          </c:extLst>
         </c:ser>
         <c:ser>
           <c:idx val="1"/>
@@ -216,6 +301,44 @@
               <a:srgbClr val="B0852F"/>
             </a:solidFill>
           </c:spPr>
+          <c:invertIfNegative val="1"/>
+          <c:dLbls>
+            <c:numFmt formatCode="&quot;−&quot;General&quot; %&quot;" sourceLinked="0"/>
+            <c:spPr>
+              <a:noFill/>
+              <a:ln>
+                <a:noFill/>
+              </a:ln>
+              <a:effectLst/>
+            </c:spPr>
+            <c:txPr>
+              <a:bodyPr/>
+              <a:lstStyle/>
+              <a:p>
+                <a:pPr>
+                  <a:defRPr sz="1200">
+                    <a:solidFill>
+                      <a:srgbClr val="1A1A1A"/>
+                    </a:solidFill>
+                  </a:defRPr>
+                </a:pPr>
+                <a:endParaRPr lang="en-US"/>
+              </a:p>
+            </c:txPr>
+            <c:dLblPos val="outEnd"/>
+            <c:showLegendKey val="0"/>
+            <c:showVal val="1"/>
+            <c:showCatName val="0"/>
+            <c:showSerName val="0"/>
+            <c:showPercent val="0"/>
+            <c:showBubbleSize val="0"/>
+            <c:showLeaderLines val="0"/>
+            <c:extLst>
+              <c:ext xmlns:c15="http://schemas.microsoft.com/office/drawing/2012/chart" uri="{CE6537A1-D6FC-4f65-9D91-7224C49458BB}">
+                <c15:showLeaderLines val="0"/>
+              </c:ext>
+            </c:extLst>
+          </c:dLbls>
           <c:cat>
             <c:strRef>
               <c:f>Sheet1!$A$2:$A$3</c:f>
@@ -245,6 +368,20 @@
               </c:numCache>
             </c:numRef>
           </c:val>
+          <c:extLst>
+            <c:ext xmlns:c14="http://schemas.microsoft.com/office/drawing/2007/8/2/chart" uri="{6F2FDCE9-48DA-4B69-8628-5D25D57E5C99}">
+              <c14:invertSolidFillFmt>
+                <c14:spPr xmlns:c14="http://schemas.microsoft.com/office/drawing/2007/8/2/chart">
+                  <a:solidFill>
+                    <a:srgbClr val="FFFFFF"/>
+                  </a:solidFill>
+                </c14:spPr>
+              </c14:invertSolidFillFmt>
+            </c:ext>
+            <c:ext xmlns:c16="http://schemas.microsoft.com/office/drawing/2014/chart" uri="{C3380CC4-5D6E-409C-BE32-E72D297353CC}">
+              <c16:uniqueId val="{00000001-BBF7-4EB8-AA40-D5080FECE65B}"/>
+            </c:ext>
+          </c:extLst>
         </c:ser>
         <c:ser>
           <c:idx val="2"/>
@@ -265,6 +402,44 @@
               <a:srgbClr val="D6C4A0"/>
             </a:solidFill>
           </c:spPr>
+          <c:invertIfNegative val="1"/>
+          <c:dLbls>
+            <c:numFmt formatCode="&quot;−&quot;General&quot; %&quot;" sourceLinked="0"/>
+            <c:spPr>
+              <a:noFill/>
+              <a:ln>
+                <a:noFill/>
+              </a:ln>
+              <a:effectLst/>
+            </c:spPr>
+            <c:txPr>
+              <a:bodyPr/>
+              <a:lstStyle/>
+              <a:p>
+                <a:pPr>
+                  <a:defRPr sz="1200">
+                    <a:solidFill>
+                      <a:srgbClr val="1A1A1A"/>
+                    </a:solidFill>
+                  </a:defRPr>
+                </a:pPr>
+                <a:endParaRPr lang="en-US"/>
+              </a:p>
+            </c:txPr>
+            <c:dLblPos val="outEnd"/>
+            <c:showLegendKey val="0"/>
+            <c:showVal val="1"/>
+            <c:showCatName val="0"/>
+            <c:showSerName val="0"/>
+            <c:showPercent val="0"/>
+            <c:showBubbleSize val="0"/>
+            <c:showLeaderLines val="0"/>
+            <c:extLst>
+              <c:ext xmlns:c15="http://schemas.microsoft.com/office/drawing/2012/chart" uri="{CE6537A1-D6FC-4f65-9D91-7224C49458BB}">
+                <c15:showLeaderLines val="0"/>
+              </c:ext>
+            </c:extLst>
+          </c:dLbls>
           <c:cat>
             <c:strRef>
               <c:f>Sheet1!$A$2:$A$3</c:f>
@@ -294,22 +469,22 @@
               </c:numCache>
             </c:numRef>
           </c:val>
+          <c:extLst>
+            <c:ext xmlns:c14="http://schemas.microsoft.com/office/drawing/2007/8/2/chart" uri="{6F2FDCE9-48DA-4B69-8628-5D25D57E5C99}">
+              <c14:invertSolidFillFmt>
+                <c14:spPr xmlns:c14="http://schemas.microsoft.com/office/drawing/2007/8/2/chart">
+                  <a:solidFill>
+                    <a:srgbClr val="FFFFFF"/>
+                  </a:solidFill>
+                </c14:spPr>
+              </c14:invertSolidFillFmt>
+            </c:ext>
+            <c:ext xmlns:c16="http://schemas.microsoft.com/office/drawing/2014/chart" uri="{C3380CC4-5D6E-409C-BE32-E72D297353CC}">
+              <c16:uniqueId val="{00000002-BBF7-4EB8-AA40-D5080FECE65B}"/>
+            </c:ext>
+          </c:extLst>
         </c:ser>
         <c:dLbls>
-          <c:numFmt formatCode="&quot;−&quot;General&quot; %&quot;" sourceLinked="0"/>
-          <c:txPr>
-            <a:bodyPr/>
-            <a:lstStyle/>
-            <a:p>
-              <a:pPr>
-                <a:defRPr sz="1200">
-                  <a:solidFill>
-                    <a:srgbClr val="1A1A1A"/>
-                  </a:solidFill>
-                </a:defRPr>
-              </a:pPr>
-            </a:p>
-          </c:txPr>
           <c:dLblPos val="outEnd"/>
           <c:showLegendKey val="0"/>
           <c:showVal val="1"/>
@@ -317,7 +492,6 @@
           <c:showSerName val="0"/>
           <c:showPercent val="0"/>
           <c:showBubbleSize val="0"/>
-          <c:showLeaderLines val="1"/>
         </c:dLbls>
         <c:gapWidth val="60"/>
         <c:overlap val="-10"/>
@@ -331,6 +505,7 @@
         </c:scaling>
         <c:delete val="0"/>
         <c:axPos val="b"/>
+        <c:numFmt formatCode="General" sourceLinked="0"/>
         <c:majorTickMark val="out"/>
         <c:minorTickMark val="none"/>
         <c:tickLblPos val="nextTo"/>
@@ -348,6 +523,7 @@
             <a:pPr>
               <a:defRPr sz="1200"/>
             </a:pPr>
+            <a:endParaRPr lang="en-US"/>
           </a:p>
         </c:txPr>
         <c:crossAx val="-2113994440"/>
@@ -359,14 +535,18 @@
       </c:catAx>
       <c:valAx>
         <c:axId val="-2113994440"/>
-        <c:scaling/>
-        <c:delete/>
+        <c:scaling>
+          <c:orientation val="minMax"/>
+        </c:scaling>
+        <c:delete val="1"/>
         <c:axPos val="l"/>
+        <c:numFmt formatCode="General" sourceLinked="1"/>
         <c:majorTickMark val="out"/>
         <c:minorTickMark val="none"/>
         <c:tickLblPos val="nextTo"/>
         <c:crossAx val="-2068027336"/>
         <c:crosses val="autoZero"/>
+        <c:crossBetween val="between"/>
       </c:valAx>
     </c:plotArea>
     <c:legend>
@@ -379,10 +559,13 @@
           <a:pPr>
             <a:defRPr sz="1200"/>
           </a:pPr>
+          <a:endParaRPr lang="en-US"/>
         </a:p>
       </c:txPr>
     </c:legend>
+    <c:plotVisOnly val="1"/>
     <c:dispBlanksAs val="gap"/>
+    <c:showDLblsOverMax val="1"/>
   </c:chart>
   <c:txPr>
     <a:bodyPr/>
@@ -406,8 +589,11 @@
 </file>
 
 <file path=ppt/charts/chart2.xml><?xml version="1.0" encoding="utf-8"?>
-<c:chartSpace xmlns:c="http://schemas.openxmlformats.org/drawingml/2006/chart" xmlns:a="http://schemas.openxmlformats.org/drawingml/2006/main" xmlns:r="http://schemas.openxmlformats.org/officeDocument/2006/relationships">
+<c:chartSpace xmlns:c="http://schemas.openxmlformats.org/drawingml/2006/chart" xmlns:a="http://schemas.openxmlformats.org/drawingml/2006/main" xmlns:r="http://schemas.openxmlformats.org/officeDocument/2006/relationships" xmlns:c16r2="http://schemas.microsoft.com/office/drawing/2015/06/chart">
   <c:date1904 val="0"/>
+  <c:lang val="en-US"/>
+  <c:roundedCorners val="1"/>
+  <c:style val="2"/>
   <c:chart>
     <c:title>
       <c:tx>
@@ -416,20 +602,21 @@
           <a:lstStyle/>
           <a:p>
             <a:r>
-              <a:rPr sz="1400" b="1"/>
+              <a:rPr lang="en-US" sz="1400" b="1"/>
               <a:t>Ventes mondiales 2025 par motorisation</a:t>
             </a:r>
           </a:p>
         </c:rich>
       </c:tx>
-      <c:layout/>
       <c:overlay val="0"/>
     </c:title>
     <c:autoTitleDeleted val="0"/>
     <c:plotArea>
+      <c:layout/>
       <c:barChart>
         <c:barDir val="bar"/>
         <c:grouping val="clustered"/>
+        <c:varyColors val="1"/>
         <c:ser>
           <c:idx val="0"/>
           <c:order val="0"/>
@@ -449,62 +636,149 @@
               <a:srgbClr val="111111"/>
             </a:solidFill>
           </c:spPr>
+          <c:invertIfNegative val="1"/>
           <c:dPt>
             <c:idx val="0"/>
+            <c:invertIfNegative val="1"/>
+            <c:bubble3D val="0"/>
             <c:spPr>
               <a:solidFill>
                 <a:srgbClr val="B0852F"/>
               </a:solidFill>
             </c:spPr>
+            <c:extLst>
+              <c:ext xmlns:c16="http://schemas.microsoft.com/office/drawing/2014/chart" uri="{C3380CC4-5D6E-409C-BE32-E72D297353CC}">
+                <c16:uniqueId val="{00000001-0E92-43EE-A4D7-10FBCE6A361A}"/>
+              </c:ext>
+            </c:extLst>
           </c:dPt>
           <c:dPt>
             <c:idx val="1"/>
+            <c:invertIfNegative val="1"/>
+            <c:bubble3D val="0"/>
             <c:spPr>
               <a:solidFill>
                 <a:srgbClr val="111111"/>
               </a:solidFill>
             </c:spPr>
+            <c:extLst>
+              <c:ext xmlns:c16="http://schemas.microsoft.com/office/drawing/2014/chart" uri="{C3380CC4-5D6E-409C-BE32-E72D297353CC}">
+                <c16:uniqueId val="{00000003-0E92-43EE-A4D7-10FBCE6A361A}"/>
+              </c:ext>
+            </c:extLst>
           </c:dPt>
           <c:dPt>
             <c:idx val="2"/>
+            <c:invertIfNegative val="1"/>
+            <c:bubble3D val="0"/>
             <c:spPr>
               <a:solidFill>
                 <a:srgbClr val="B0852F"/>
               </a:solidFill>
             </c:spPr>
+            <c:extLst>
+              <c:ext xmlns:c16="http://schemas.microsoft.com/office/drawing/2014/chart" uri="{C3380CC4-5D6E-409C-BE32-E72D297353CC}">
+                <c16:uniqueId val="{00000005-0E92-43EE-A4D7-10FBCE6A361A}"/>
+              </c:ext>
+            </c:extLst>
           </c:dPt>
           <c:dPt>
             <c:idx val="3"/>
+            <c:invertIfNegative val="1"/>
+            <c:bubble3D val="0"/>
             <c:spPr>
               <a:solidFill>
                 <a:srgbClr val="111111"/>
               </a:solidFill>
             </c:spPr>
+            <c:extLst>
+              <c:ext xmlns:c16="http://schemas.microsoft.com/office/drawing/2014/chart" uri="{C3380CC4-5D6E-409C-BE32-E72D297353CC}">
+                <c16:uniqueId val="{00000007-0E92-43EE-A4D7-10FBCE6A361A}"/>
+              </c:ext>
+            </c:extLst>
           </c:dPt>
           <c:dPt>
             <c:idx val="4"/>
+            <c:invertIfNegative val="1"/>
+            <c:bubble3D val="0"/>
             <c:spPr>
               <a:solidFill>
                 <a:srgbClr val="111111"/>
               </a:solidFill>
             </c:spPr>
+            <c:extLst>
+              <c:ext xmlns:c16="http://schemas.microsoft.com/office/drawing/2014/chart" uri="{C3380CC4-5D6E-409C-BE32-E72D297353CC}">
+                <c16:uniqueId val="{00000009-0E92-43EE-A4D7-10FBCE6A361A}"/>
+              </c:ext>
+            </c:extLst>
           </c:dPt>
           <c:dPt>
             <c:idx val="5"/>
+            <c:invertIfNegative val="1"/>
+            <c:bubble3D val="0"/>
             <c:spPr>
               <a:solidFill>
                 <a:srgbClr val="B0852F"/>
               </a:solidFill>
             </c:spPr>
+            <c:extLst>
+              <c:ext xmlns:c16="http://schemas.microsoft.com/office/drawing/2014/chart" uri="{C3380CC4-5D6E-409C-BE32-E72D297353CC}">
+                <c16:uniqueId val="{0000000B-0E92-43EE-A4D7-10FBCE6A361A}"/>
+              </c:ext>
+            </c:extLst>
           </c:dPt>
           <c:dPt>
             <c:idx val="6"/>
+            <c:invertIfNegative val="1"/>
+            <c:bubble3D val="0"/>
             <c:spPr>
               <a:solidFill>
                 <a:srgbClr val="111111"/>
               </a:solidFill>
             </c:spPr>
+            <c:extLst>
+              <c:ext xmlns:c16="http://schemas.microsoft.com/office/drawing/2014/chart" uri="{C3380CC4-5D6E-409C-BE32-E72D297353CC}">
+                <c16:uniqueId val="{0000000D-0E92-43EE-A4D7-10FBCE6A361A}"/>
+              </c:ext>
+            </c:extLst>
           </c:dPt>
+          <c:dLbls>
+            <c:numFmt formatCode="0&quot; %&quot;" sourceLinked="0"/>
+            <c:spPr>
+              <a:noFill/>
+              <a:ln>
+                <a:noFill/>
+              </a:ln>
+              <a:effectLst/>
+            </c:spPr>
+            <c:txPr>
+              <a:bodyPr/>
+              <a:lstStyle/>
+              <a:p>
+                <a:pPr>
+                  <a:defRPr sz="1200">
+                    <a:solidFill>
+                      <a:srgbClr val="1A1A1A"/>
+                    </a:solidFill>
+                  </a:defRPr>
+                </a:pPr>
+                <a:endParaRPr lang="en-US"/>
+              </a:p>
+            </c:txPr>
+            <c:dLblPos val="outEnd"/>
+            <c:showLegendKey val="0"/>
+            <c:showVal val="1"/>
+            <c:showCatName val="0"/>
+            <c:showSerName val="0"/>
+            <c:showPercent val="0"/>
+            <c:showBubbleSize val="0"/>
+            <c:showLeaderLines val="0"/>
+            <c:extLst>
+              <c:ext xmlns:c15="http://schemas.microsoft.com/office/drawing/2012/chart" uri="{CE6537A1-D6FC-4f65-9D91-7224C49458BB}">
+                <c15:showLeaderLines val="0"/>
+              </c:ext>
+            </c:extLst>
+          </c:dLbls>
           <c:cat>
             <c:strRef>
               <c:f>Sheet1!$A$2:$A$8</c:f>
@@ -564,22 +838,22 @@
               </c:numCache>
             </c:numRef>
           </c:val>
+          <c:extLst>
+            <c:ext xmlns:c14="http://schemas.microsoft.com/office/drawing/2007/8/2/chart" uri="{6F2FDCE9-48DA-4B69-8628-5D25D57E5C99}">
+              <c14:invertSolidFillFmt>
+                <c14:spPr xmlns:c14="http://schemas.microsoft.com/office/drawing/2007/8/2/chart">
+                  <a:solidFill>
+                    <a:srgbClr val="FFFFFF"/>
+                  </a:solidFill>
+                </c14:spPr>
+              </c14:invertSolidFillFmt>
+            </c:ext>
+            <c:ext xmlns:c16="http://schemas.microsoft.com/office/drawing/2014/chart" uri="{C3380CC4-5D6E-409C-BE32-E72D297353CC}">
+              <c16:uniqueId val="{0000000E-0E92-43EE-A4D7-10FBCE6A361A}"/>
+            </c:ext>
+          </c:extLst>
         </c:ser>
         <c:dLbls>
-          <c:numFmt formatCode="0&quot; %&quot;" sourceLinked="0"/>
-          <c:txPr>
-            <a:bodyPr/>
-            <a:lstStyle/>
-            <a:p>
-              <a:pPr>
-                <a:defRPr sz="1200">
-                  <a:solidFill>
-                    <a:srgbClr val="1A1A1A"/>
-                  </a:solidFill>
-                </a:defRPr>
-              </a:pPr>
-            </a:p>
-          </c:txPr>
           <c:dLblPos val="outEnd"/>
           <c:showLegendKey val="0"/>
           <c:showVal val="1"/>
@@ -587,7 +861,6 @@
           <c:showSerName val="0"/>
           <c:showPercent val="0"/>
           <c:showBubbleSize val="0"/>
-          <c:showLeaderLines val="1"/>
         </c:dLbls>
         <c:gapWidth val="45"/>
         <c:overlap val="-10"/>
@@ -601,6 +874,7 @@
         </c:scaling>
         <c:delete val="0"/>
         <c:axPos val="l"/>
+        <c:numFmt formatCode="General" sourceLinked="0"/>
         <c:majorTickMark val="out"/>
         <c:minorTickMark val="none"/>
         <c:tickLblPos val="nextTo"/>
@@ -618,6 +892,7 @@
             <a:pPr>
               <a:defRPr sz="1200"/>
             </a:pPr>
+            <a:endParaRPr lang="en-US"/>
           </a:p>
         </c:txPr>
         <c:crossAx val="-2113994440"/>
@@ -629,17 +904,23 @@
       </c:catAx>
       <c:valAx>
         <c:axId val="-2113994440"/>
-        <c:scaling/>
-        <c:delete/>
+        <c:scaling>
+          <c:orientation val="minMax"/>
+        </c:scaling>
+        <c:delete val="1"/>
         <c:axPos val="b"/>
+        <c:numFmt formatCode="General" sourceLinked="1"/>
         <c:majorTickMark val="out"/>
         <c:minorTickMark val="none"/>
         <c:tickLblPos val="nextTo"/>
         <c:crossAx val="-2068027336"/>
         <c:crosses val="autoZero"/>
+        <c:crossBetween val="between"/>
       </c:valAx>
     </c:plotArea>
+    <c:plotVisOnly val="1"/>
     <c:dispBlanksAs val="gap"/>
+    <c:showDLblsOverMax val="1"/>
   </c:chart>
   <c:txPr>
     <a:bodyPr/>
@@ -663,7 +944,7 @@
 </file>
 
 <file path=ppt/notesMasters/notesMaster1.xml><?xml version="1.0" encoding="utf-8"?>
-<p:notesMaster xmlns:a="http://schemas.openxmlformats.org/drawingml/2006/main" xmlns:p="http://schemas.openxmlformats.org/presentationml/2006/main" xmlns:r="http://schemas.openxmlformats.org/officeDocument/2006/relationships">
+<p:notesMaster xmlns:a="http://schemas.openxmlformats.org/drawingml/2006/main" xmlns:r="http://schemas.openxmlformats.org/officeDocument/2006/relationships" xmlns:p="http://schemas.openxmlformats.org/presentationml/2006/main">
   <p:cSld>
     <p:bg>
       <p:bgRef idx="1001">
@@ -697,7 +978,7 @@
         <p:spPr>
           <a:xfrm>
             <a:off x="0" y="0"/>
-            <a:ext cx="2971800" cy="457200"/>
+            <a:ext cx="2971800" cy="458788"/>
           </a:xfrm>
           <a:prstGeom prst="rect">
             <a:avLst/>
@@ -728,7 +1009,7 @@
         <p:spPr>
           <a:xfrm>
             <a:off x="3884613" y="0"/>
-            <a:ext cx="2971800" cy="457200"/>
+            <a:ext cx="2971800" cy="458788"/>
           </a:xfrm>
           <a:prstGeom prst="rect">
             <a:avLst/>
@@ -742,9 +1023,8 @@
             </a:lvl1pPr>
           </a:lstStyle>
           <a:p>
-            <a:fld id="{0F89C1C7-3DCD-1040-A9CF-14679D8B5DDD}" type="datetimeFigureOut">
-              <a:rPr lang="en-US" smtClean="0"/>
-              <a:t>10/17/16</a:t>
+            <a:fld id="{D6504117-826C-41FB-814E-93340F0971C2}" type="datetimeFigureOut">
+              <a:t>9/28/2026</a:t>
             </a:fld>
             <a:endParaRPr lang="en-US"/>
           </a:p>
@@ -762,8 +1042,8 @@
         </p:nvSpPr>
         <p:spPr>
           <a:xfrm>
-            <a:off x="1143000" y="685800"/>
-            <a:ext cx="4572000" cy="3429000"/>
+            <a:off x="685800" y="1143000"/>
+            <a:ext cx="5486400" cy="3086100"/>
           </a:xfrm>
           <a:prstGeom prst="rect">
             <a:avLst/>
@@ -795,8 +1075,8 @@
         </p:nvSpPr>
         <p:spPr>
           <a:xfrm>
-            <a:off x="685800" y="4343400"/>
-            <a:ext cx="5486400" cy="4114800"/>
+            <a:off x="685800" y="4400550"/>
+            <a:ext cx="5486400" cy="3600450"/>
           </a:xfrm>
           <a:prstGeom prst="rect">
             <a:avLst/>
@@ -808,38 +1088,37 @@
           <a:p>
             <a:pPr lvl="0"/>
             <a:r>
-              <a:rPr lang="en-US" smtClean="0"/>
+              <a:rPr lang="en-US"/>
               <a:t>Click to edit Master text styles</a:t>
             </a:r>
           </a:p>
           <a:p>
             <a:pPr lvl="1"/>
             <a:r>
-              <a:rPr lang="en-US" smtClean="0"/>
+              <a:rPr lang="en-US"/>
               <a:t>Second level</a:t>
             </a:r>
           </a:p>
           <a:p>
             <a:pPr lvl="2"/>
             <a:r>
-              <a:rPr lang="en-US" smtClean="0"/>
+              <a:rPr lang="en-US"/>
               <a:t>Third level</a:t>
             </a:r>
           </a:p>
           <a:p>
             <a:pPr lvl="3"/>
             <a:r>
-              <a:rPr lang="en-US" smtClean="0"/>
+              <a:rPr lang="en-US"/>
               <a:t>Fourth level</a:t>
             </a:r>
           </a:p>
           <a:p>
             <a:pPr lvl="4"/>
             <a:r>
-              <a:rPr lang="en-US" smtClean="0"/>
+              <a:rPr lang="en-US"/>
               <a:t>Fifth level</a:t>
             </a:r>
-            <a:endParaRPr lang="en-US"/>
           </a:p>
         </p:txBody>
       </p:sp>
@@ -856,7 +1135,7 @@
         <p:spPr>
           <a:xfrm>
             <a:off x="0" y="8685213"/>
-            <a:ext cx="2971800" cy="457200"/>
+            <a:ext cx="2971800" cy="458787"/>
           </a:xfrm>
           <a:prstGeom prst="rect">
             <a:avLst/>
@@ -887,7 +1166,7 @@
         <p:spPr>
           <a:xfrm>
             <a:off x="3884613" y="8685213"/>
-            <a:ext cx="2971800" cy="457200"/>
+            <a:ext cx="2971800" cy="458787"/>
           </a:xfrm>
           <a:prstGeom prst="rect">
             <a:avLst/>
@@ -901,8 +1180,7 @@
             </a:lvl1pPr>
           </a:lstStyle>
           <a:p>
-            <a:fld id="{BB5E49A5-4136-284D-997B-48E1D791AD67}" type="slidenum">
-              <a:rPr lang="en-US" smtClean="0"/>
+            <a:fld id="{A6895083-FC6B-47FD-9F60-FC1F9BCA74D6}" type="slidenum">
               <a:t>‹#›</a:t>
             </a:fld>
             <a:endParaRPr lang="en-US"/>
@@ -912,13 +1190,13 @@
     </p:spTree>
     <p:extLst>
       <p:ext uri="{BB962C8B-B14F-4D97-AF65-F5344CB8AC3E}">
-        <p14:creationId xmlns:p14="http://schemas.microsoft.com/office/powerpoint/2010/main" val="2623252185"/>
+        <p14:creationId xmlns:p14="http://schemas.microsoft.com/office/powerpoint/2010/main" val="382969032"/>
       </p:ext>
     </p:extLst>
   </p:cSld>
   <p:clrMap bg1="lt1" tx1="dk1" bg2="lt2" tx2="dk2" accent1="accent1" accent2="accent2" accent3="accent3" accent4="accent4" accent5="accent5" accent6="accent6" hlink="hlink" folHlink="folHlink"/>
   <p:notesStyle>
-    <a:lvl1pPr marL="0" algn="l" defTabSz="457200" rtl="0" eaLnBrk="1" latinLnBrk="0" hangingPunct="1">
+    <a:lvl1pPr marL="0" algn="l" defTabSz="914400" rtl="0" eaLnBrk="1" latinLnBrk="0" hangingPunct="1">
       <a:defRPr sz="1200" kern="1200">
         <a:solidFill>
           <a:schemeClr val="tx1"/>
@@ -928,7 +1206,7 @@
         <a:cs typeface="+mn-cs"/>
       </a:defRPr>
     </a:lvl1pPr>
-    <a:lvl2pPr marL="457200" algn="l" defTabSz="457200" rtl="0" eaLnBrk="1" latinLnBrk="0" hangingPunct="1">
+    <a:lvl2pPr marL="457200" algn="l" defTabSz="914400" rtl="0" eaLnBrk="1" latinLnBrk="0" hangingPunct="1">
       <a:defRPr sz="1200" kern="1200">
         <a:solidFill>
           <a:schemeClr val="tx1"/>
@@ -938,7 +1216,7 @@
         <a:cs typeface="+mn-cs"/>
       </a:defRPr>
     </a:lvl2pPr>
-    <a:lvl3pPr marL="914400" algn="l" defTabSz="457200" rtl="0" eaLnBrk="1" latinLnBrk="0" hangingPunct="1">
+    <a:lvl3pPr marL="914400" algn="l" defTabSz="914400" rtl="0" eaLnBrk="1" latinLnBrk="0" hangingPunct="1">
       <a:defRPr sz="1200" kern="1200">
         <a:solidFill>
           <a:schemeClr val="tx1"/>
@@ -948,7 +1226,7 @@
         <a:cs typeface="+mn-cs"/>
       </a:defRPr>
     </a:lvl3pPr>
-    <a:lvl4pPr marL="1371600" algn="l" defTabSz="457200" rtl="0" eaLnBrk="1" latinLnBrk="0" hangingPunct="1">
+    <a:lvl4pPr marL="1371600" algn="l" defTabSz="914400" rtl="0" eaLnBrk="1" latinLnBrk="0" hangingPunct="1">
       <a:defRPr sz="1200" kern="1200">
         <a:solidFill>
           <a:schemeClr val="tx1"/>
@@ -958,7 +1236,7 @@
         <a:cs typeface="+mn-cs"/>
       </a:defRPr>
     </a:lvl4pPr>
-    <a:lvl5pPr marL="1828800" algn="l" defTabSz="457200" rtl="0" eaLnBrk="1" latinLnBrk="0" hangingPunct="1">
+    <a:lvl5pPr marL="1828800" algn="l" defTabSz="914400" rtl="0" eaLnBrk="1" latinLnBrk="0" hangingPunct="1">
       <a:defRPr sz="1200" kern="1200">
         <a:solidFill>
           <a:schemeClr val="tx1"/>
@@ -968,7 +1246,7 @@
         <a:cs typeface="+mn-cs"/>
       </a:defRPr>
     </a:lvl5pPr>
-    <a:lvl6pPr marL="2286000" algn="l" defTabSz="457200" rtl="0" eaLnBrk="1" latinLnBrk="0" hangingPunct="1">
+    <a:lvl6pPr marL="2286000" algn="l" defTabSz="914400" rtl="0" eaLnBrk="1" latinLnBrk="0" hangingPunct="1">
       <a:defRPr sz="1200" kern="1200">
         <a:solidFill>
           <a:schemeClr val="tx1"/>
@@ -978,7 +1256,7 @@
         <a:cs typeface="+mn-cs"/>
       </a:defRPr>
     </a:lvl6pPr>
-    <a:lvl7pPr marL="2743200" algn="l" defTabSz="457200" rtl="0" eaLnBrk="1" latinLnBrk="0" hangingPunct="1">
+    <a:lvl7pPr marL="2743200" algn="l" defTabSz="914400" rtl="0" eaLnBrk="1" latinLnBrk="0" hangingPunct="1">
       <a:defRPr sz="1200" kern="1200">
         <a:solidFill>
           <a:schemeClr val="tx1"/>
@@ -988,7 +1266,7 @@
         <a:cs typeface="+mn-cs"/>
       </a:defRPr>
     </a:lvl7pPr>
-    <a:lvl8pPr marL="3200400" algn="l" defTabSz="457200" rtl="0" eaLnBrk="1" latinLnBrk="0" hangingPunct="1">
+    <a:lvl8pPr marL="3200400" algn="l" defTabSz="914400" rtl="0" eaLnBrk="1" latinLnBrk="0" hangingPunct="1">
       <a:defRPr sz="1200" kern="1200">
         <a:solidFill>
           <a:schemeClr val="tx1"/>
@@ -998,7 +1276,7 @@
         <a:cs typeface="+mn-cs"/>
       </a:defRPr>
     </a:lvl8pPr>
-    <a:lvl9pPr marL="3657600" algn="l" defTabSz="457200" rtl="0" eaLnBrk="1" latinLnBrk="0" hangingPunct="1">
+    <a:lvl9pPr marL="3657600" algn="l" defTabSz="914400" rtl="0" eaLnBrk="1" latinLnBrk="0" hangingPunct="1">
       <a:defRPr sz="1200" kern="1200">
         <a:solidFill>
           <a:schemeClr val="tx1"/>
@@ -1013,7 +1291,7 @@
 </file>
 
 <file path=ppt/notesSlides/notesSlide1.xml><?xml version="1.0" encoding="utf-8"?>
-<p:notes xmlns:a="http://schemas.openxmlformats.org/drawingml/2006/main" xmlns:p="http://schemas.openxmlformats.org/presentationml/2006/main" xmlns:r="http://schemas.openxmlformats.org/officeDocument/2006/relationships">
+<p:notes xmlns:a="http://schemas.openxmlformats.org/drawingml/2006/main" xmlns:r="http://schemas.openxmlformats.org/officeDocument/2006/relationships" xmlns:p="http://schemas.openxmlformats.org/presentationml/2006/main">
   <p:cSld>
     <p:spTree>
       <p:nvGrpSpPr>
@@ -1033,7 +1311,7 @@
         <p:nvSpPr>
           <p:cNvPr id="2" name="Slide Image Placeholder 1"/>
           <p:cNvSpPr>
-            <a:spLocks noGrp="1"/>
+            <a:spLocks noGrp="1" noRot="1" noChangeAspect="1"/>
           </p:cNvSpPr>
           <p:nvPr>
             <p:ph type="sldImg" idx="2"/>
@@ -1048,7 +1326,7 @@
             <a:spLocks noGrp="1"/>
           </p:cNvSpPr>
           <p:nvPr>
-            <p:ph type="body" idx="3" sz="quarter"/>
+            <p:ph type="body" sz="quarter" idx="3"/>
           </p:nvPr>
         </p:nvSpPr>
         <p:spPr/>
@@ -1060,7 +1338,9 @@
               <a:t>[Nicolas BINAND – 0:40]</a:t>
             </a:r>
           </a:p>
-          <a:p/>
+          <a:p>
+            <a:endParaRPr/>
+          </a:p>
           <a:p>
             <a:r>
               <a:t>Bonjour à toutes et à tous. Nous sommes Nicolas, Danyil, Maxime et Matheo, et nous allons vous présenter notre étude de cas sur la politique RSE de Renault Group. Renault est souvent cité comme un bon élève de la RSE dans l'automobile. Notre objectif, c'est de vérifier si c'est vrai, en partant de ses propres documents et en les confrontant à ce qu'en disent la presse, la justice et les ONG. On a travaillé à partir du Document d'enregistrement universel 2025, des quatre chartes du groupe et d'une recherche documentaire complémentaire.</a:t>
@@ -1075,7 +1355,7 @@
             <a:spLocks noGrp="1"/>
           </p:cNvSpPr>
           <p:nvPr>
-            <p:ph type="sldNum" idx="5" sz="quarter"/>
+            <p:ph type="sldNum" sz="quarter" idx="5"/>
           </p:nvPr>
         </p:nvSpPr>
         <p:spPr/>
@@ -1089,7 +1369,7 @@
 </file>
 
 <file path=ppt/notesSlides/notesSlide10.xml><?xml version="1.0" encoding="utf-8"?>
-<p:notes xmlns:a="http://schemas.openxmlformats.org/drawingml/2006/main" xmlns:p="http://schemas.openxmlformats.org/presentationml/2006/main" xmlns:r="http://schemas.openxmlformats.org/officeDocument/2006/relationships">
+<p:notes xmlns:a="http://schemas.openxmlformats.org/drawingml/2006/main" xmlns:r="http://schemas.openxmlformats.org/officeDocument/2006/relationships" xmlns:p="http://schemas.openxmlformats.org/presentationml/2006/main">
   <p:cSld>
     <p:spTree>
       <p:nvGrpSpPr>
@@ -1109,7 +1389,7 @@
         <p:nvSpPr>
           <p:cNvPr id="2" name="Slide Image Placeholder 1"/>
           <p:cNvSpPr>
-            <a:spLocks noGrp="1"/>
+            <a:spLocks noGrp="1" noRot="1" noChangeAspect="1"/>
           </p:cNvSpPr>
           <p:nvPr>
             <p:ph type="sldImg" idx="2"/>
@@ -1124,7 +1404,7 @@
             <a:spLocks noGrp="1"/>
           </p:cNvSpPr>
           <p:nvPr>
-            <p:ph type="body" idx="3" sz="quarter"/>
+            <p:ph type="body" sz="quarter" idx="3"/>
           </p:nvPr>
         </p:nvSpPr>
         <p:spPr/>
@@ -1136,7 +1416,9 @@
               <a:t>[Maxime JAEN – 1:00]</a:t>
             </a:r>
           </a:p>
-          <a:p/>
+          <a:p>
+            <a:endParaRPr/>
+          </a:p>
           <a:p>
             <a:r>
               <a:t>Sur le volet social et éthique, on a analysé les quatre chartes fournies. La charte Diversité et Inclusion de 2022 fixe un objectif clair : supprimer l'écart salarial entre femmes et hommes d'ici 2025. La part de femmes dans le management est passée de 24,7 à 27,4 %. Côté éthique, c'est solide : le code anticorruption est très concret, avec par exemple un plafond de 60 euros pour les cadeaux, et le groupe est certifié ISO 37001 depuis 2024. En 2025, la plateforme d'alerte a reçu 883 signalements. La charte éthique, elle, chapeaute l'ensemble, mais reste surtout qualitative. Dernier point, les plaintes pour discrimination ou harcèlement sont en hausse, 287 contre 230 l'année précédente, ce qui peut aussi traduire une meilleure libération de la parole.</a:t>
@@ -1151,7 +1433,7 @@
             <a:spLocks noGrp="1"/>
           </p:cNvSpPr>
           <p:nvPr>
-            <p:ph type="sldNum" idx="5" sz="quarter"/>
+            <p:ph type="sldNum" sz="quarter" idx="5"/>
           </p:nvPr>
         </p:nvSpPr>
         <p:spPr/>
@@ -1165,7 +1447,7 @@
 </file>
 
 <file path=ppt/notesSlides/notesSlide11.xml><?xml version="1.0" encoding="utf-8"?>
-<p:notes xmlns:a="http://schemas.openxmlformats.org/drawingml/2006/main" xmlns:p="http://schemas.openxmlformats.org/presentationml/2006/main" xmlns:r="http://schemas.openxmlformats.org/officeDocument/2006/relationships">
+<p:notes xmlns:a="http://schemas.openxmlformats.org/drawingml/2006/main" xmlns:r="http://schemas.openxmlformats.org/officeDocument/2006/relationships" xmlns:p="http://schemas.openxmlformats.org/presentationml/2006/main">
   <p:cSld>
     <p:spTree>
       <p:nvGrpSpPr>
@@ -1185,7 +1467,7 @@
         <p:nvSpPr>
           <p:cNvPr id="2" name="Slide Image Placeholder 1"/>
           <p:cNvSpPr>
-            <a:spLocks noGrp="1"/>
+            <a:spLocks noGrp="1" noRot="1" noChangeAspect="1"/>
           </p:cNvSpPr>
           <p:nvPr>
             <p:ph type="sldImg" idx="2"/>
@@ -1200,7 +1482,7 @@
             <a:spLocks noGrp="1"/>
           </p:cNvSpPr>
           <p:nvPr>
-            <p:ph type="body" idx="3" sz="quarter"/>
+            <p:ph type="body" sz="quarter" idx="3"/>
           </p:nvPr>
         </p:nvSpPr>
         <p:spPr/>
@@ -1212,7 +1494,9 @@
               <a:t>[Maxime JAEN – 0:50]</a:t>
             </a:r>
           </a:p>
-          <a:p/>
+          <a:p>
+            <a:endParaRPr/>
+          </a:p>
           <a:p>
             <a:r>
               <a:t>Côté certifications, 100 % des usines sont certifiées ISO 14001 pour l'environnement. En revanche, seuls deux sites sont certifiés ISO 45001 pour la santé et la sécurité. Renault a été le premier constructeur à faire valider ses objectifs climat par l'initiative SBTi en 2019, et il est dans l'indice CAC 40 ESG. Pour les agences de notation, on doit être transparents : on n'a pas pu accéder aux notes actuelles de MSCI, Sustainalytics ou du CDP, donc on les a marquées « à vérifier ». Par contre, deux évaluations d'ONG sont sévères. InfluenceMap note son lobbying climat D+. Amnesty lui donne 27 sur 90 sur les droits humains dans les batteries.</a:t>
@@ -1227,7 +1511,7 @@
             <a:spLocks noGrp="1"/>
           </p:cNvSpPr>
           <p:nvPr>
-            <p:ph type="sldNum" idx="5" sz="quarter"/>
+            <p:ph type="sldNum" sz="quarter" idx="5"/>
           </p:nvPr>
         </p:nvSpPr>
         <p:spPr/>
@@ -1241,7 +1525,7 @@
 </file>
 
 <file path=ppt/notesSlides/notesSlide12.xml><?xml version="1.0" encoding="utf-8"?>
-<p:notes xmlns:a="http://schemas.openxmlformats.org/drawingml/2006/main" xmlns:p="http://schemas.openxmlformats.org/presentationml/2006/main" xmlns:r="http://schemas.openxmlformats.org/officeDocument/2006/relationships">
+<p:notes xmlns:a="http://schemas.openxmlformats.org/drawingml/2006/main" xmlns:r="http://schemas.openxmlformats.org/officeDocument/2006/relationships" xmlns:p="http://schemas.openxmlformats.org/presentationml/2006/main">
   <p:cSld>
     <p:spTree>
       <p:nvGrpSpPr>
@@ -1261,7 +1545,7 @@
         <p:nvSpPr>
           <p:cNvPr id="2" name="Slide Image Placeholder 1"/>
           <p:cNvSpPr>
-            <a:spLocks noGrp="1"/>
+            <a:spLocks noGrp="1" noRot="1" noChangeAspect="1"/>
           </p:cNvSpPr>
           <p:nvPr>
             <p:ph type="sldImg" idx="2"/>
@@ -1276,7 +1560,7 @@
             <a:spLocks noGrp="1"/>
           </p:cNvSpPr>
           <p:nvPr>
-            <p:ph type="body" idx="3" sz="quarter"/>
+            <p:ph type="body" sz="quarter" idx="3"/>
           </p:nvPr>
         </p:nvSpPr>
         <p:spPr/>
@@ -1288,13 +1572,17 @@
               <a:t>[Maxime JAEN – 0:50]</a:t>
             </a:r>
           </a:p>
-          <a:p/>
+          <a:p>
+            <a:endParaRPr/>
+          </a:p>
           <a:p>
             <a:r>
               <a:t>On passe à la partie critique. Selon nous, plusieurs choses auraient pu être faites. D'abord, relever l'ambition climat, puisque les cibles 2030 sont déjà atteintes : viser 1,5 degré sur toute la chaîne de valeur. Ensuite, devenir société à mission, pour rendre la raison d'être vraiment engageante. Le label B Corp est peu adapté à un groupe coté de cette taille. Troisième piste : tracer les minerais jusqu'à la mine, parce que la politique de diligence raisonnable sur les batteries est encore « en construction ». Enfin, généraliser l'ISO 45001 et publier l'écart salarial pays par pays.</a:t>
             </a:r>
           </a:p>
-          <a:p/>
+          <a:p>
+            <a:endParaRPr/>
+          </a:p>
           <a:p>
             <a:r>
               <a:t>Transition : Matheo va vous montrer comment les regards extérieurs confirment ces limites.</a:t>
@@ -1309,7 +1597,7 @@
             <a:spLocks noGrp="1"/>
           </p:cNvSpPr>
           <p:nvPr>
-            <p:ph type="sldNum" idx="5" sz="quarter"/>
+            <p:ph type="sldNum" sz="quarter" idx="5"/>
           </p:nvPr>
         </p:nvSpPr>
         <p:spPr/>
@@ -1323,7 +1611,7 @@
 </file>
 
 <file path=ppt/notesSlides/notesSlide13.xml><?xml version="1.0" encoding="utf-8"?>
-<p:notes xmlns:a="http://schemas.openxmlformats.org/drawingml/2006/main" xmlns:p="http://schemas.openxmlformats.org/presentationml/2006/main" xmlns:r="http://schemas.openxmlformats.org/officeDocument/2006/relationships">
+<p:notes xmlns:a="http://schemas.openxmlformats.org/drawingml/2006/main" xmlns:r="http://schemas.openxmlformats.org/officeDocument/2006/relationships" xmlns:p="http://schemas.openxmlformats.org/presentationml/2006/main">
   <p:cSld>
     <p:spTree>
       <p:nvGrpSpPr>
@@ -1343,7 +1631,7 @@
         <p:nvSpPr>
           <p:cNvPr id="2" name="Slide Image Placeholder 1"/>
           <p:cNvSpPr>
-            <a:spLocks noGrp="1"/>
+            <a:spLocks noGrp="1" noRot="1" noChangeAspect="1"/>
           </p:cNvSpPr>
           <p:nvPr>
             <p:ph type="sldImg" idx="2"/>
@@ -1358,7 +1646,7 @@
             <a:spLocks noGrp="1"/>
           </p:cNvSpPr>
           <p:nvPr>
-            <p:ph type="body" idx="3" sz="quarter"/>
+            <p:ph type="body" sz="quarter" idx="3"/>
           </p:nvPr>
         </p:nvSpPr>
         <p:spPr/>
@@ -1370,7 +1658,9 @@
               <a:t>[Matheo PICARD – 1:10]</a:t>
             </a:r>
           </a:p>
-          <a:p/>
+          <a:p>
+            <a:endParaRPr/>
+          </a:p>
           <a:p>
             <a:r>
               <a:t>Merci Maxime. Plusieurs faits externes nuancent le discours. Le plus lourd, c'est le dieselgate. Renault est mis en examen depuis 2021 pour tromperie aggravée sur des moteurs diesel vendus entre 2009 et 2017. En juillet 2026, il a été renvoyé devant le tribunal correctionnel. Le procès n'a pas encore eu lieu, donc Renault est présumé innocent. Deuxième fait : en avril 2025, la Commission européenne a condamné Renault et Nissan à 81 millions d'euros d'amende pour une entente sur le recyclage. Les constructeurs s'étaient mis d'accord pour ne pas mettre en avant le contenu recyclé de leurs voitures. C'est définitif. Il y a aussi l'affaire Ghosn, jugée en septembre à Paris, et la sortie de Russie, avec une option de retour jusqu'en 2028. Enfin, côté ONG, InfluenceMap rappelle que Luca de Meo, alors président de l'association des constructeurs européens, a plaidé pour reporter les objectifs CO2 de 2025.</a:t>
@@ -1385,7 +1675,7 @@
             <a:spLocks noGrp="1"/>
           </p:cNvSpPr>
           <p:nvPr>
-            <p:ph type="sldNum" idx="5" sz="quarter"/>
+            <p:ph type="sldNum" sz="quarter" idx="5"/>
           </p:nvPr>
         </p:nvSpPr>
         <p:spPr/>
@@ -1399,7 +1689,7 @@
 </file>
 
 <file path=ppt/notesSlides/notesSlide14.xml><?xml version="1.0" encoding="utf-8"?>
-<p:notes xmlns:a="http://schemas.openxmlformats.org/drawingml/2006/main" xmlns:p="http://schemas.openxmlformats.org/presentationml/2006/main" xmlns:r="http://schemas.openxmlformats.org/officeDocument/2006/relationships">
+<p:notes xmlns:a="http://schemas.openxmlformats.org/drawingml/2006/main" xmlns:r="http://schemas.openxmlformats.org/officeDocument/2006/relationships" xmlns:p="http://schemas.openxmlformats.org/presentationml/2006/main">
   <p:cSld>
     <p:spTree>
       <p:nvGrpSpPr>
@@ -1419,7 +1709,7 @@
         <p:nvSpPr>
           <p:cNvPr id="2" name="Slide Image Placeholder 1"/>
           <p:cNvSpPr>
-            <a:spLocks noGrp="1"/>
+            <a:spLocks noGrp="1" noRot="1" noChangeAspect="1"/>
           </p:cNvSpPr>
           <p:nvPr>
             <p:ph type="sldImg" idx="2"/>
@@ -1434,7 +1724,7 @@
             <a:spLocks noGrp="1"/>
           </p:cNvSpPr>
           <p:nvPr>
-            <p:ph type="body" idx="3" sz="quarter"/>
+            <p:ph type="body" sz="quarter" idx="3"/>
           </p:nvPr>
         </p:nvSpPr>
         <p:spPr/>
@@ -1446,7 +1736,9 @@
               <a:t>[Matheo PICARD – 1:00]</a:t>
             </a:r>
           </a:p>
-          <a:p/>
+          <a:p>
+            <a:endParaRPr/>
+          </a:p>
           <a:p>
             <a:r>
               <a:t>Ce tableau confronte les engagements écrits aux faits. Prenons l'exemple demandé : l'égalité salariale. La charte promettait de supprimer l'écart d'ici 2025 « dans tous les pays ». Renault dit l'avoir atteint dès 2023, avec même 0,8 % en faveur des femmes. Mais le DEU précise que ce calcul porte sur les cols blancs et les postes comparables, avec sa propre méthode. Donc l'objectif est tenu sur le périmètre choisi par Renault, mais ce n'est pas démontré pour tous les pays ni pour les ouvriers. Même logique ailleurs : l'objectif Net Zero des usines a été repoussé après 2035, et la cible de matières recyclées a été abaissée de 33 à 30 %.</a:t>
@@ -1461,7 +1753,7 @@
             <a:spLocks noGrp="1"/>
           </p:cNvSpPr>
           <p:nvPr>
-            <p:ph type="sldNum" idx="5" sz="quarter"/>
+            <p:ph type="sldNum" sz="quarter" idx="5"/>
           </p:nvPr>
         </p:nvSpPr>
         <p:spPr/>
@@ -1475,7 +1767,7 @@
 </file>
 
 <file path=ppt/notesSlides/notesSlide15.xml><?xml version="1.0" encoding="utf-8"?>
-<p:notes xmlns:a="http://schemas.openxmlformats.org/drawingml/2006/main" xmlns:p="http://schemas.openxmlformats.org/presentationml/2006/main" xmlns:r="http://schemas.openxmlformats.org/officeDocument/2006/relationships">
+<p:notes xmlns:a="http://schemas.openxmlformats.org/drawingml/2006/main" xmlns:r="http://schemas.openxmlformats.org/officeDocument/2006/relationships" xmlns:p="http://schemas.openxmlformats.org/presentationml/2006/main">
   <p:cSld>
     <p:spTree>
       <p:nvGrpSpPr>
@@ -1495,7 +1787,7 @@
         <p:nvSpPr>
           <p:cNvPr id="2" name="Slide Image Placeholder 1"/>
           <p:cNvSpPr>
-            <a:spLocks noGrp="1"/>
+            <a:spLocks noGrp="1" noRot="1" noChangeAspect="1"/>
           </p:cNvSpPr>
           <p:nvPr>
             <p:ph type="sldImg" idx="2"/>
@@ -1510,7 +1802,7 @@
             <a:spLocks noGrp="1"/>
           </p:cNvSpPr>
           <p:nvPr>
-            <p:ph type="body" idx="3" sz="quarter"/>
+            <p:ph type="body" sz="quarter" idx="3"/>
           </p:nvPr>
         </p:nvSpPr>
         <p:spPr/>
@@ -1522,7 +1814,9 @@
               <a:t>[Matheo PICARD – 1:00]</a:t>
             </a:r>
           </a:p>
-          <a:p/>
+          <a:p>
+            <a:endParaRPr/>
+          </a:p>
           <a:p>
             <a:r>
               <a:t>Pour comparer, on a d'abord cherché un standard GRI propre à l'automobile. Il n'en existe pas : la GRI a publié des standards sectoriels pour le pétrole, le charbon, l'agriculture et les mines, mais pas pour l'automobile. On a donc utilisé les standards thématiques, comme le 305 pour les émissions ou le 405 pour la diversité. Renault les couvre bien, sauf pour la chaîne d'approvisionnement. Face à Stellantis, le bilan est partagé. Renault fait mieux sur la part de voitures électriques en Europe : 11 % contre 8 %. Stellantis fait mieux sur les droits humains dans les batteries, avec 42 sur 90 contre 27, et sur la part de femmes dans le leadership. Les deux groupes partagent enfin les mêmes zones grises : le dieselgate et l'amende sur le recyclage.</a:t>
@@ -1537,7 +1831,7 @@
             <a:spLocks noGrp="1"/>
           </p:cNvSpPr>
           <p:nvPr>
-            <p:ph type="sldNum" idx="5" sz="quarter"/>
+            <p:ph type="sldNum" sz="quarter" idx="5"/>
           </p:nvPr>
         </p:nvSpPr>
         <p:spPr/>
@@ -1551,7 +1845,7 @@
 </file>
 
 <file path=ppt/notesSlides/notesSlide16.xml><?xml version="1.0" encoding="utf-8"?>
-<p:notes xmlns:a="http://schemas.openxmlformats.org/drawingml/2006/main" xmlns:p="http://schemas.openxmlformats.org/presentationml/2006/main" xmlns:r="http://schemas.openxmlformats.org/officeDocument/2006/relationships">
+<p:notes xmlns:a="http://schemas.openxmlformats.org/drawingml/2006/main" xmlns:r="http://schemas.openxmlformats.org/officeDocument/2006/relationships" xmlns:p="http://schemas.openxmlformats.org/presentationml/2006/main">
   <p:cSld>
     <p:spTree>
       <p:nvGrpSpPr>
@@ -1571,7 +1865,7 @@
         <p:nvSpPr>
           <p:cNvPr id="2" name="Slide Image Placeholder 1"/>
           <p:cNvSpPr>
-            <a:spLocks noGrp="1"/>
+            <a:spLocks noGrp="1" noRot="1" noChangeAspect="1"/>
           </p:cNvSpPr>
           <p:nvPr>
             <p:ph type="sldImg" idx="2"/>
@@ -1586,7 +1880,7 @@
             <a:spLocks noGrp="1"/>
           </p:cNvSpPr>
           <p:nvPr>
-            <p:ph type="body" idx="3" sz="quarter"/>
+            <p:ph type="body" sz="quarter" idx="3"/>
           </p:nvPr>
         </p:nvSpPr>
         <p:spPr/>
@@ -1598,13 +1892,17 @@
               <a:t>[Matheo PICARD – 0:50]</a:t>
             </a:r>
           </a:p>
-          <a:p/>
+          <a:p>
+            <a:endParaRPr/>
+          </a:p>
           <a:p>
             <a:r>
               <a:t>Pour conclure, notre bilan est nuancé. Renault a un vrai dispositif RSE : un reporting transparent, une gouvernance impliquée, des émissions en baisse de 38 % et une électrification réelle en Europe. Mais l'écart entre le discours et les faits reste net : des cibles déjà dépassées, des objectifs repoussés, un lobbying contre les règles CO2 et une chaîne des batteries mal maîtrisée. Notre réponse : la RSE de Renault produit des résultats surtout là où la loi et l'intérêt économique vont dans le même sens. Et si la loi recule, avec le 2035 assoupli et la CSRD allégée, la RSE de Renault continuera-t-elle d'avancer ?</a:t>
             </a:r>
           </a:p>
-          <a:p/>
+          <a:p>
+            <a:endParaRPr/>
+          </a:p>
           <a:p>
             <a:r>
               <a:t>Transition : Nicolas va conclure notre présentation.</a:t>
@@ -1619,7 +1917,7 @@
             <a:spLocks noGrp="1"/>
           </p:cNvSpPr>
           <p:nvPr>
-            <p:ph type="sldNum" idx="5" sz="quarter"/>
+            <p:ph type="sldNum" sz="quarter" idx="5"/>
           </p:nvPr>
         </p:nvSpPr>
         <p:spPr/>
@@ -1633,7 +1931,237 @@
 </file>
 
 <file path=ppt/notesSlides/notesSlide17.xml><?xml version="1.0" encoding="utf-8"?>
-<p:notes xmlns:a="http://schemas.openxmlformats.org/drawingml/2006/main" xmlns:p="http://schemas.openxmlformats.org/presentationml/2006/main" xmlns:r="http://schemas.openxmlformats.org/officeDocument/2006/relationships">
+<p:notes xmlns:a="http://schemas.openxmlformats.org/drawingml/2006/main" xmlns:r="http://schemas.openxmlformats.org/officeDocument/2006/relationships" xmlns:p="http://schemas.openxmlformats.org/presentationml/2006/main">
+  <p:cSld>
+    <p:spTree>
+      <p:nvGrpSpPr>
+        <p:cNvPr id="1" name="">
+          <a:extLst>
+            <a:ext uri="{FF2B5EF4-FFF2-40B4-BE49-F238E27FC236}">
+              <a16:creationId xmlns:a16="http://schemas.microsoft.com/office/drawing/2014/main" id="{47B402CD-F50C-0DFD-7F70-C89D12EC84E9}"/>
+            </a:ext>
+          </a:extLst>
+        </p:cNvPr>
+        <p:cNvGrpSpPr/>
+        <p:nvPr/>
+      </p:nvGrpSpPr>
+      <p:grpSpPr>
+        <a:xfrm>
+          <a:off x="0" y="0"/>
+          <a:ext cx="0" cy="0"/>
+          <a:chOff x="0" y="0"/>
+          <a:chExt cx="0" cy="0"/>
+        </a:xfrm>
+      </p:grpSpPr>
+      <p:sp>
+        <p:nvSpPr>
+          <p:cNvPr id="2" name="Slide Image Placeholder 1">
+            <a:extLst>
+              <a:ext uri="{FF2B5EF4-FFF2-40B4-BE49-F238E27FC236}">
+                <a16:creationId xmlns:a16="http://schemas.microsoft.com/office/drawing/2014/main" id="{17D766B1-DEBD-B3B8-A4B8-170A34F99EE8}"/>
+              </a:ext>
+            </a:extLst>
+          </p:cNvPr>
+          <p:cNvSpPr>
+            <a:spLocks noGrp="1" noRot="1" noChangeAspect="1"/>
+          </p:cNvSpPr>
+          <p:nvPr>
+            <p:ph type="sldImg" idx="2"/>
+          </p:nvPr>
+        </p:nvSpPr>
+        <p:spPr/>
+      </p:sp>
+      <p:sp>
+        <p:nvSpPr>
+          <p:cNvPr id="3" name="Notes Placeholder 2">
+            <a:extLst>
+              <a:ext uri="{FF2B5EF4-FFF2-40B4-BE49-F238E27FC236}">
+                <a16:creationId xmlns:a16="http://schemas.microsoft.com/office/drawing/2014/main" id="{0782C325-C7FC-D559-FB2D-29DC4E430934}"/>
+              </a:ext>
+            </a:extLst>
+          </p:cNvPr>
+          <p:cNvSpPr>
+            <a:spLocks noGrp="1"/>
+          </p:cNvSpPr>
+          <p:nvPr>
+            <p:ph type="body" sz="quarter" idx="3"/>
+          </p:nvPr>
+        </p:nvSpPr>
+        <p:spPr/>
+        <p:txBody>
+          <a:bodyPr/>
+          <a:lstStyle/>
+          <a:p>
+            <a:r>
+              <a:t>[Matheo PICARD – 0:50]</a:t>
+            </a:r>
+          </a:p>
+          <a:p>
+            <a:endParaRPr/>
+          </a:p>
+          <a:p>
+            <a:r>
+              <a:t>Pour conclure, notre bilan est nuancé. Renault a un vrai dispositif RSE : un reporting transparent, une gouvernance impliquée, des émissions en baisse de 38 % et une électrification réelle en Europe. Mais l'écart entre le discours et les faits reste net : des cibles déjà dépassées, des objectifs repoussés, un lobbying contre les règles CO2 et une chaîne des batteries mal maîtrisée. Notre réponse : la RSE de Renault produit des résultats surtout là où la loi et l'intérêt économique vont dans le même sens. Et si la loi recule, avec le 2035 assoupli et la CSRD allégée, la RSE de Renault continuera-t-elle d'avancer ?</a:t>
+            </a:r>
+          </a:p>
+          <a:p>
+            <a:endParaRPr/>
+          </a:p>
+          <a:p>
+            <a:r>
+              <a:t>Transition : Nicolas va conclure notre présentation.</a:t>
+            </a:r>
+          </a:p>
+        </p:txBody>
+      </p:sp>
+      <p:sp>
+        <p:nvSpPr>
+          <p:cNvPr id="4" name="Slide Number Placeholder 3">
+            <a:extLst>
+              <a:ext uri="{FF2B5EF4-FFF2-40B4-BE49-F238E27FC236}">
+                <a16:creationId xmlns:a16="http://schemas.microsoft.com/office/drawing/2014/main" id="{681CB36D-326A-2498-E566-CA628C0233BE}"/>
+              </a:ext>
+            </a:extLst>
+          </p:cNvPr>
+          <p:cNvSpPr>
+            <a:spLocks noGrp="1"/>
+          </p:cNvSpPr>
+          <p:nvPr>
+            <p:ph type="sldNum" sz="quarter" idx="5"/>
+          </p:nvPr>
+        </p:nvSpPr>
+        <p:spPr/>
+      </p:sp>
+    </p:spTree>
+    <p:extLst>
+      <p:ext uri="{BB962C8B-B14F-4D97-AF65-F5344CB8AC3E}">
+        <p14:creationId xmlns:p14="http://schemas.microsoft.com/office/powerpoint/2010/main" val="4043777063"/>
+      </p:ext>
+    </p:extLst>
+  </p:cSld>
+  <p:clrMapOvr>
+    <a:masterClrMapping/>
+  </p:clrMapOvr>
+</p:notes>
+</file>
+
+<file path=ppt/notesSlides/notesSlide18.xml><?xml version="1.0" encoding="utf-8"?>
+<p:notes xmlns:a="http://schemas.openxmlformats.org/drawingml/2006/main" xmlns:r="http://schemas.openxmlformats.org/officeDocument/2006/relationships" xmlns:p="http://schemas.openxmlformats.org/presentationml/2006/main">
+  <p:cSld>
+    <p:spTree>
+      <p:nvGrpSpPr>
+        <p:cNvPr id="1" name="">
+          <a:extLst>
+            <a:ext uri="{FF2B5EF4-FFF2-40B4-BE49-F238E27FC236}">
+              <a16:creationId xmlns:a16="http://schemas.microsoft.com/office/drawing/2014/main" id="{FCEC25B9-581F-9FF7-6D9C-0EE88136DD09}"/>
+            </a:ext>
+          </a:extLst>
+        </p:cNvPr>
+        <p:cNvGrpSpPr/>
+        <p:nvPr/>
+      </p:nvGrpSpPr>
+      <p:grpSpPr>
+        <a:xfrm>
+          <a:off x="0" y="0"/>
+          <a:ext cx="0" cy="0"/>
+          <a:chOff x="0" y="0"/>
+          <a:chExt cx="0" cy="0"/>
+        </a:xfrm>
+      </p:grpSpPr>
+      <p:sp>
+        <p:nvSpPr>
+          <p:cNvPr id="2" name="Slide Image Placeholder 1">
+            <a:extLst>
+              <a:ext uri="{FF2B5EF4-FFF2-40B4-BE49-F238E27FC236}">
+                <a16:creationId xmlns:a16="http://schemas.microsoft.com/office/drawing/2014/main" id="{4F63E885-7339-E679-0A2E-D6E80D4BDFB4}"/>
+              </a:ext>
+            </a:extLst>
+          </p:cNvPr>
+          <p:cNvSpPr>
+            <a:spLocks noGrp="1" noRot="1" noChangeAspect="1"/>
+          </p:cNvSpPr>
+          <p:nvPr>
+            <p:ph type="sldImg" idx="2"/>
+          </p:nvPr>
+        </p:nvSpPr>
+        <p:spPr/>
+      </p:sp>
+      <p:sp>
+        <p:nvSpPr>
+          <p:cNvPr id="3" name="Notes Placeholder 2">
+            <a:extLst>
+              <a:ext uri="{FF2B5EF4-FFF2-40B4-BE49-F238E27FC236}">
+                <a16:creationId xmlns:a16="http://schemas.microsoft.com/office/drawing/2014/main" id="{BF4FA408-6D77-27BD-CAF7-A9E7E7C01C9F}"/>
+              </a:ext>
+            </a:extLst>
+          </p:cNvPr>
+          <p:cNvSpPr>
+            <a:spLocks noGrp="1"/>
+          </p:cNvSpPr>
+          <p:nvPr>
+            <p:ph type="body" sz="quarter" idx="3"/>
+          </p:nvPr>
+        </p:nvSpPr>
+        <p:spPr/>
+        <p:txBody>
+          <a:bodyPr/>
+          <a:lstStyle/>
+          <a:p>
+            <a:r>
+              <a:t>[Matheo PICARD – 0:50]</a:t>
+            </a:r>
+          </a:p>
+          <a:p>
+            <a:endParaRPr/>
+          </a:p>
+          <a:p>
+            <a:r>
+              <a:t>Pour conclure, notre bilan est nuancé. Renault a un vrai dispositif RSE : un reporting transparent, une gouvernance impliquée, des émissions en baisse de 38 % et une électrification réelle en Europe. Mais l'écart entre le discours et les faits reste net : des cibles déjà dépassées, des objectifs repoussés, un lobbying contre les règles CO2 et une chaîne des batteries mal maîtrisée. Notre réponse : la RSE de Renault produit des résultats surtout là où la loi et l'intérêt économique vont dans le même sens. Et si la loi recule, avec le 2035 assoupli et la CSRD allégée, la RSE de Renault continuera-t-elle d'avancer ?</a:t>
+            </a:r>
+          </a:p>
+          <a:p>
+            <a:endParaRPr/>
+          </a:p>
+          <a:p>
+            <a:r>
+              <a:t>Transition : Nicolas va conclure notre présentation.</a:t>
+            </a:r>
+          </a:p>
+        </p:txBody>
+      </p:sp>
+      <p:sp>
+        <p:nvSpPr>
+          <p:cNvPr id="4" name="Slide Number Placeholder 3">
+            <a:extLst>
+              <a:ext uri="{FF2B5EF4-FFF2-40B4-BE49-F238E27FC236}">
+                <a16:creationId xmlns:a16="http://schemas.microsoft.com/office/drawing/2014/main" id="{C77D6C94-74D0-E58C-191A-5DBA222F5D93}"/>
+              </a:ext>
+            </a:extLst>
+          </p:cNvPr>
+          <p:cNvSpPr>
+            <a:spLocks noGrp="1"/>
+          </p:cNvSpPr>
+          <p:nvPr>
+            <p:ph type="sldNum" sz="quarter" idx="5"/>
+          </p:nvPr>
+        </p:nvSpPr>
+        <p:spPr/>
+      </p:sp>
+    </p:spTree>
+    <p:extLst>
+      <p:ext uri="{BB962C8B-B14F-4D97-AF65-F5344CB8AC3E}">
+        <p14:creationId xmlns:p14="http://schemas.microsoft.com/office/powerpoint/2010/main" val="1863424938"/>
+      </p:ext>
+    </p:extLst>
+  </p:cSld>
+  <p:clrMapOvr>
+    <a:masterClrMapping/>
+  </p:clrMapOvr>
+</p:notes>
+</file>
+
+<file path=ppt/notesSlides/notesSlide19.xml><?xml version="1.0" encoding="utf-8"?>
+<p:notes xmlns:a="http://schemas.openxmlformats.org/drawingml/2006/main" xmlns:r="http://schemas.openxmlformats.org/officeDocument/2006/relationships" xmlns:p="http://schemas.openxmlformats.org/presentationml/2006/main">
   <p:cSld>
     <p:spTree>
       <p:nvGrpSpPr>
@@ -1653,7 +2181,7 @@
         <p:nvSpPr>
           <p:cNvPr id="2" name="Slide Image Placeholder 1"/>
           <p:cNvSpPr>
-            <a:spLocks noGrp="1"/>
+            <a:spLocks noGrp="1" noRot="1" noChangeAspect="1"/>
           </p:cNvSpPr>
           <p:nvPr>
             <p:ph type="sldImg" idx="2"/>
@@ -1668,7 +2196,7 @@
             <a:spLocks noGrp="1"/>
           </p:cNvSpPr>
           <p:nvPr>
-            <p:ph type="body" idx="3" sz="quarter"/>
+            <p:ph type="body" sz="quarter" idx="3"/>
           </p:nvPr>
         </p:nvSpPr>
         <p:spPr/>
@@ -1680,7 +2208,9 @@
               <a:t>[Nicolas BINAND – 0:15]</a:t>
             </a:r>
           </a:p>
-          <a:p/>
+          <a:p>
+            <a:endParaRPr/>
+          </a:p>
           <a:p>
             <a:r>
               <a:t>Toutes nos sources sont détaillées dans le rapport écrit : le DEU 2025 et les quatre chartes, complétés par la presse, les ONG et les décisions de justice. Merci de votre attention, nous sommes prêts pour vos questions. Et si vous souhaitez approfondir un point, le rapport contient tous les tableaux détaillés en annexe.</a:t>
@@ -1695,7 +2225,7 @@
             <a:spLocks noGrp="1"/>
           </p:cNvSpPr>
           <p:nvPr>
-            <p:ph type="sldNum" idx="5" sz="quarter"/>
+            <p:ph type="sldNum" sz="quarter" idx="5"/>
           </p:nvPr>
         </p:nvSpPr>
         <p:spPr/>
@@ -1709,7 +2239,7 @@
 </file>
 
 <file path=ppt/notesSlides/notesSlide2.xml><?xml version="1.0" encoding="utf-8"?>
-<p:notes xmlns:a="http://schemas.openxmlformats.org/drawingml/2006/main" xmlns:p="http://schemas.openxmlformats.org/presentationml/2006/main" xmlns:r="http://schemas.openxmlformats.org/officeDocument/2006/relationships">
+<p:notes xmlns:a="http://schemas.openxmlformats.org/drawingml/2006/main" xmlns:r="http://schemas.openxmlformats.org/officeDocument/2006/relationships" xmlns:p="http://schemas.openxmlformats.org/presentationml/2006/main">
   <p:cSld>
     <p:spTree>
       <p:nvGrpSpPr>
@@ -1729,7 +2259,7 @@
         <p:nvSpPr>
           <p:cNvPr id="2" name="Slide Image Placeholder 1"/>
           <p:cNvSpPr>
-            <a:spLocks noGrp="1"/>
+            <a:spLocks noGrp="1" noRot="1" noChangeAspect="1"/>
           </p:cNvSpPr>
           <p:nvPr>
             <p:ph type="sldImg" idx="2"/>
@@ -1744,7 +2274,7 @@
             <a:spLocks noGrp="1"/>
           </p:cNvSpPr>
           <p:nvPr>
-            <p:ph type="body" idx="3" sz="quarter"/>
+            <p:ph type="body" sz="quarter" idx="3"/>
           </p:nvPr>
         </p:nvSpPr>
         <p:spPr/>
@@ -1756,7 +2286,9 @@
               <a:t>[Nicolas BINAND – 1:00]</a:t>
             </a:r>
           </a:p>
-          <a:p/>
+          <a:p>
+            <a:endParaRPr/>
+          </a:p>
           <a:p>
             <a:r>
               <a:t>D'abord, qui est Renault Group en 2025 ? C'est 2,3 millions de véhicules vendus, 57,9 milliards d'euros de chiffre d'affaires et un peu plus de 100 000 salariés. Il y a quatre marques : Renault, Dacia, Alpine et Mobilize. Petite précision importante : le résultat net 2025 est de moins 10,9 milliards d'euros, mais c'est à cause de la dépréciation de la participation dans Nissan. Hors Nissan, le groupe reste bénéficiaire. Côté identité, Renault s'est donné en 2021 une raison d'être, au sens de la loi PACTE : « Nous faisons battre le cœur de l'innovation pour que la mobilité nous rapproche les uns des autres ». Et sa stratégie de développement durable repose sur trois piliers : l'environnement, la sécurité et l'inclusion.</a:t>
@@ -1771,7 +2303,7 @@
             <a:spLocks noGrp="1"/>
           </p:cNvSpPr>
           <p:nvPr>
-            <p:ph type="sldNum" idx="5" sz="quarter"/>
+            <p:ph type="sldNum" sz="quarter" idx="5"/>
           </p:nvPr>
         </p:nvSpPr>
         <p:spPr/>
@@ -1785,7 +2317,7 @@
 </file>
 
 <file path=ppt/notesSlides/notesSlide3.xml><?xml version="1.0" encoding="utf-8"?>
-<p:notes xmlns:a="http://schemas.openxmlformats.org/drawingml/2006/main" xmlns:p="http://schemas.openxmlformats.org/presentationml/2006/main" xmlns:r="http://schemas.openxmlformats.org/officeDocument/2006/relationships">
+<p:notes xmlns:a="http://schemas.openxmlformats.org/drawingml/2006/main" xmlns:r="http://schemas.openxmlformats.org/officeDocument/2006/relationships" xmlns:p="http://schemas.openxmlformats.org/presentationml/2006/main">
   <p:cSld>
     <p:spTree>
       <p:nvGrpSpPr>
@@ -1805,7 +2337,7 @@
         <p:nvSpPr>
           <p:cNvPr id="2" name="Slide Image Placeholder 1"/>
           <p:cNvSpPr>
-            <a:spLocks noGrp="1"/>
+            <a:spLocks noGrp="1" noRot="1" noChangeAspect="1"/>
           </p:cNvSpPr>
           <p:nvPr>
             <p:ph type="sldImg" idx="2"/>
@@ -1820,7 +2352,7 @@
             <a:spLocks noGrp="1"/>
           </p:cNvSpPr>
           <p:nvPr>
-            <p:ph type="body" idx="3" sz="quarter"/>
+            <p:ph type="body" sz="quarter" idx="3"/>
           </p:nvPr>
         </p:nvSpPr>
         <p:spPr/>
@@ -1832,7 +2364,9 @@
               <a:t>[Nicolas BINAND – 1:00]</a:t>
             </a:r>
           </a:p>
-          <a:p/>
+          <a:p>
+            <a:endParaRPr/>
+          </a:p>
           <a:p>
             <a:r>
               <a:t>Cette RSE ne se joue pas dans le vide : il y a un cadre légal très dense. On a la loi Sapin II contre la corruption en 2016, le devoir de vigilance en 2017, la loi PACTE en 2019. Ensuite, la taxonomie verte, puis la CSRD, qui oblige Renault à publier un état de durabilité audité. Mais ce cadre bouge : en 2025, l'Europe a assoupli les normes CO2. En décembre 2025, la Commission a proposé de remplacer l'interdiction des voitures thermiques en 2035 par un objectif de moins 90 %. Et le paquet Omnibus a allégé la CSRD. Garder ça en tête est important pour juger ce qui relève du volontaire et ce qui relève de l'obligation. Autrement dit, une partie des progrès de Renault est imposée par la loi, et c'est précisément ce qu'on va essayer de distinguer tout au long de l'exposé.</a:t>
@@ -1847,7 +2381,7 @@
             <a:spLocks noGrp="1"/>
           </p:cNvSpPr>
           <p:nvPr>
-            <p:ph type="sldNum" idx="5" sz="quarter"/>
+            <p:ph type="sldNum" sz="quarter" idx="5"/>
           </p:nvPr>
         </p:nvSpPr>
         <p:spPr/>
@@ -1861,7 +2395,7 @@
 </file>
 
 <file path=ppt/notesSlides/notesSlide4.xml><?xml version="1.0" encoding="utf-8"?>
-<p:notes xmlns:a="http://schemas.openxmlformats.org/drawingml/2006/main" xmlns:p="http://schemas.openxmlformats.org/presentationml/2006/main" xmlns:r="http://schemas.openxmlformats.org/officeDocument/2006/relationships">
+<p:notes xmlns:a="http://schemas.openxmlformats.org/drawingml/2006/main" xmlns:r="http://schemas.openxmlformats.org/officeDocument/2006/relationships" xmlns:p="http://schemas.openxmlformats.org/presentationml/2006/main">
   <p:cSld>
     <p:spTree>
       <p:nvGrpSpPr>
@@ -1881,7 +2415,7 @@
         <p:nvSpPr>
           <p:cNvPr id="2" name="Slide Image Placeholder 1"/>
           <p:cNvSpPr>
-            <a:spLocks noGrp="1"/>
+            <a:spLocks noGrp="1" noRot="1" noChangeAspect="1"/>
           </p:cNvSpPr>
           <p:nvPr>
             <p:ph type="sldImg" idx="2"/>
@@ -1896,7 +2430,7 @@
             <a:spLocks noGrp="1"/>
           </p:cNvSpPr>
           <p:nvPr>
-            <p:ph type="body" idx="3" sz="quarter"/>
+            <p:ph type="body" sz="quarter" idx="3"/>
           </p:nvPr>
         </p:nvSpPr>
         <p:spPr/>
@@ -1908,13 +2442,17 @@
               <a:t>[Nicolas BINAND – 0:40]</a:t>
             </a:r>
           </a:p>
-          <a:p/>
+          <a:p>
+            <a:endParaRPr/>
+          </a:p>
           <a:p>
             <a:r>
               <a:t>D'où notre problématique : dans quelle mesure la politique RSE de Renault Group, très structurée sur le papier, se traduit-elle par des résultats à la hauteur de ses engagements ? On va répondre en deux temps. Dans une première partie, on étudie le rapport RSE et les actions concrètes du groupe. Dans une seconde partie, on les passe au crible : critiques externes, standards GRI et comparaison avec Stellantis. À chaque fois, on essaiera de confronter ce que Renault écrit à ce qui est réellement observé.</a:t>
             </a:r>
           </a:p>
-          <a:p/>
+          <a:p>
+            <a:endParaRPr/>
+          </a:p>
           <a:p>
             <a:r>
               <a:t>Transition : Je laisse la parole à Danyil, qui va vous expliquer comment Renault rend compte de sa RSE.</a:t>
@@ -1929,7 +2467,7 @@
             <a:spLocks noGrp="1"/>
           </p:cNvSpPr>
           <p:nvPr>
-            <p:ph type="sldNum" idx="5" sz="quarter"/>
+            <p:ph type="sldNum" sz="quarter" idx="5"/>
           </p:nvPr>
         </p:nvSpPr>
         <p:spPr/>
@@ -1943,7 +2481,7 @@
 </file>
 
 <file path=ppt/notesSlides/notesSlide5.xml><?xml version="1.0" encoding="utf-8"?>
-<p:notes xmlns:a="http://schemas.openxmlformats.org/drawingml/2006/main" xmlns:p="http://schemas.openxmlformats.org/presentationml/2006/main" xmlns:r="http://schemas.openxmlformats.org/officeDocument/2006/relationships">
+<p:notes xmlns:a="http://schemas.openxmlformats.org/drawingml/2006/main" xmlns:r="http://schemas.openxmlformats.org/officeDocument/2006/relationships" xmlns:p="http://schemas.openxmlformats.org/presentationml/2006/main">
   <p:cSld>
     <p:spTree>
       <p:nvGrpSpPr>
@@ -1963,7 +2501,7 @@
         <p:nvSpPr>
           <p:cNvPr id="2" name="Slide Image Placeholder 1"/>
           <p:cNvSpPr>
-            <a:spLocks noGrp="1"/>
+            <a:spLocks noGrp="1" noRot="1" noChangeAspect="1"/>
           </p:cNvSpPr>
           <p:nvPr>
             <p:ph type="sldImg" idx="2"/>
@@ -1978,7 +2516,7 @@
             <a:spLocks noGrp="1"/>
           </p:cNvSpPr>
           <p:nvPr>
-            <p:ph type="body" idx="3" sz="quarter"/>
+            <p:ph type="body" sz="quarter" idx="3"/>
           </p:nvPr>
         </p:nvSpPr>
         <p:spPr/>
@@ -1990,7 +2528,9 @@
               <a:t>[Danyil BAZAIN – 1:00]</a:t>
             </a:r>
           </a:p>
-          <a:p/>
+          <a:p>
+            <a:endParaRPr/>
+          </a:p>
           <a:p>
             <a:r>
               <a:t>Merci Nicolas. Notre source principale, c'est le Document d'enregistrement universel 2025 : 628 pages, déposé à l'AMF. Depuis la CSRD, il contient un état de durabilité selon les normes européennes ESRS, vérifié par les auditeurs. Le cœur de ce rapport, c'est la double matérialité : on croise l'impact de Renault sur le monde et l'impact du monde sur Renault. Au départ, le groupe a recensé 227 impacts, risques et opportunités. Il en ressort 39 matériels, regroupés en 20 enjeux. Parmi eux, 7 sont doublement matériels : par exemple la transition bas carbone, les ressources et le recyclage, ou les chaînes d'approvisionnement. Ce qu'on a apprécié, c'est la franchise du document. Renault écrit lui-même que « l'efficacité des politiques n'est pas toujours mesurée ». C'est rare dans un rapport de ce type, et c'est à mettre au crédit du groupe.</a:t>
@@ -2005,7 +2545,7 @@
             <a:spLocks noGrp="1"/>
           </p:cNvSpPr>
           <p:nvPr>
-            <p:ph type="sldNum" idx="5" sz="quarter"/>
+            <p:ph type="sldNum" sz="quarter" idx="5"/>
           </p:nvPr>
         </p:nvSpPr>
         <p:spPr/>
@@ -2019,7 +2559,7 @@
 </file>
 
 <file path=ppt/notesSlides/notesSlide6.xml><?xml version="1.0" encoding="utf-8"?>
-<p:notes xmlns:a="http://schemas.openxmlformats.org/drawingml/2006/main" xmlns:p="http://schemas.openxmlformats.org/presentationml/2006/main" xmlns:r="http://schemas.openxmlformats.org/officeDocument/2006/relationships">
+<p:notes xmlns:a="http://schemas.openxmlformats.org/drawingml/2006/main" xmlns:r="http://schemas.openxmlformats.org/officeDocument/2006/relationships" xmlns:p="http://schemas.openxmlformats.org/presentationml/2006/main">
   <p:cSld>
     <p:spTree>
       <p:nvGrpSpPr>
@@ -2039,7 +2579,7 @@
         <p:nvSpPr>
           <p:cNvPr id="2" name="Slide Image Placeholder 1"/>
           <p:cNvSpPr>
-            <a:spLocks noGrp="1"/>
+            <a:spLocks noGrp="1" noRot="1" noChangeAspect="1"/>
           </p:cNvSpPr>
           <p:nvPr>
             <p:ph type="sldImg" idx="2"/>
@@ -2054,7 +2594,7 @@
             <a:spLocks noGrp="1"/>
           </p:cNvSpPr>
           <p:nvPr>
-            <p:ph type="body" idx="3" sz="quarter"/>
+            <p:ph type="body" sz="quarter" idx="3"/>
           </p:nvPr>
         </p:nvSpPr>
         <p:spPr/>
@@ -2066,7 +2606,9 @@
               <a:t>[Danyil BAZAIN – 0:50]</a:t>
             </a:r>
           </a:p>
-          <a:p/>
+          <a:p>
+            <a:endParaRPr/>
+          </a:p>
           <a:p>
             <a:r>
               <a:t>Deuxième point : la gouvernance. Au sommet, le Conseil d'administration, avec 37,5 % de femmes. Il s'appuie sur un Comité Stratégie et Développement Durable, qui se réunit chaque trimestre et suit un tableau de bord ESG. En dessous, la Direction du Développement Durable pilote le tout chaque mois. Surtout, la RSE est reliée à l'argent : jusqu'à 57,5 % du salaire fixe du directeur général dépend de critères de durabilité, et un quart de ses actions de performance dépend d'une cible climat. C'est un vrai point fort, même si ces critères restent en partie des indicateurs de moyens.</a:t>
@@ -2081,7 +2623,7 @@
             <a:spLocks noGrp="1"/>
           </p:cNvSpPr>
           <p:nvPr>
-            <p:ph type="sldNum" idx="5" sz="quarter"/>
+            <p:ph type="sldNum" sz="quarter" idx="5"/>
           </p:nvPr>
         </p:nvSpPr>
         <p:spPr/>
@@ -2095,7 +2637,7 @@
 </file>
 
 <file path=ppt/notesSlides/notesSlide7.xml><?xml version="1.0" encoding="utf-8"?>
-<p:notes xmlns:a="http://schemas.openxmlformats.org/drawingml/2006/main" xmlns:p="http://schemas.openxmlformats.org/presentationml/2006/main" xmlns:r="http://schemas.openxmlformats.org/officeDocument/2006/relationships">
+<p:notes xmlns:a="http://schemas.openxmlformats.org/drawingml/2006/main" xmlns:r="http://schemas.openxmlformats.org/officeDocument/2006/relationships" xmlns:p="http://schemas.openxmlformats.org/presentationml/2006/main">
   <p:cSld>
     <p:spTree>
       <p:nvGrpSpPr>
@@ -2115,7 +2657,7 @@
         <p:nvSpPr>
           <p:cNvPr id="2" name="Slide Image Placeholder 1"/>
           <p:cNvSpPr>
-            <a:spLocks noGrp="1"/>
+            <a:spLocks noGrp="1" noRot="1" noChangeAspect="1"/>
           </p:cNvSpPr>
           <p:nvPr>
             <p:ph type="sldImg" idx="2"/>
@@ -2130,7 +2672,7 @@
             <a:spLocks noGrp="1"/>
           </p:cNvSpPr>
           <p:nvPr>
-            <p:ph type="body" idx="3" sz="quarter"/>
+            <p:ph type="body" sz="quarter" idx="3"/>
           </p:nvPr>
         </p:nvSpPr>
         <p:spPr/>
@@ -2142,7 +2684,9 @@
               <a:t>[Danyil BAZAIN – 1:00]</a:t>
             </a:r>
           </a:p>
-          <a:p/>
+          <a:p>
+            <a:endParaRPr/>
+          </a:p>
           <a:p>
             <a:r>
               <a:t>Venons-en aux objectifs. Renault vise la neutralité carbone en 2040 en Europe et en 2050 dans le monde. Entre 2019 et 2025, ses émissions totales ont baissé de 38 %. Regardez le graphique : sur les usines, c'est moins 64 %, pour une cible 2030 de moins 62,5 %. Sur la chaîne de valeur et l'usage des voitures, c'est moins 38 %, pour une cible de moins 27,5 %. Les deux cibles 2030 sont donc déjà dépassées, cinq ans en avance. On peut le lire de deux façons : soit la transformation marche très bien, soit les cibles étaient trop prudentes. D'ailleurs, pour le scope 3, Renault vise « nettement moins de 2 degrés », pas 1,5 degré. Autre signal : l'objectif de réduire de 30 % la consommation d'énergie des usines en 2025 n'a pas été tenu, on est à moins 28 %.</a:t>
@@ -2157,7 +2701,7 @@
             <a:spLocks noGrp="1"/>
           </p:cNvSpPr>
           <p:nvPr>
-            <p:ph type="sldNum" idx="5" sz="quarter"/>
+            <p:ph type="sldNum" sz="quarter" idx="5"/>
           </p:nvPr>
         </p:nvSpPr>
         <p:spPr/>
@@ -2171,7 +2715,7 @@
 </file>
 
 <file path=ppt/notesSlides/notesSlide8.xml><?xml version="1.0" encoding="utf-8"?>
-<p:notes xmlns:a="http://schemas.openxmlformats.org/drawingml/2006/main" xmlns:p="http://schemas.openxmlformats.org/presentationml/2006/main" xmlns:r="http://schemas.openxmlformats.org/officeDocument/2006/relationships">
+<p:notes xmlns:a="http://schemas.openxmlformats.org/drawingml/2006/main" xmlns:r="http://schemas.openxmlformats.org/officeDocument/2006/relationships" xmlns:p="http://schemas.openxmlformats.org/presentationml/2006/main">
   <p:cSld>
     <p:spTree>
       <p:nvGrpSpPr>
@@ -2191,7 +2735,7 @@
         <p:nvSpPr>
           <p:cNvPr id="2" name="Slide Image Placeholder 1"/>
           <p:cNvSpPr>
-            <a:spLocks noGrp="1"/>
+            <a:spLocks noGrp="1" noRot="1" noChangeAspect="1"/>
           </p:cNvSpPr>
           <p:nvPr>
             <p:ph type="sldImg" idx="2"/>
@@ -2206,7 +2750,7 @@
             <a:spLocks noGrp="1"/>
           </p:cNvSpPr>
           <p:nvPr>
-            <p:ph type="body" idx="3" sz="quarter"/>
+            <p:ph type="body" sz="quarter" idx="3"/>
           </p:nvPr>
         </p:nvSpPr>
         <p:spPr/>
@@ -2218,13 +2762,17 @@
               <a:t>[Danyil BAZAIN – 1:00]</a:t>
             </a:r>
           </a:p>
-          <a:p/>
+          <a:p>
+            <a:endParaRPr/>
+          </a:p>
           <a:p>
             <a:r>
               <a:t>Première action concrète, et la plus importante : l'électrification, parce que l'usage des voitures, c'est environ les trois quarts des émissions. Selon les analyses de Renault, une voiture électrique émet en moyenne deux fois moins sur son cycle de vie. En Europe, les progrès sont nets : 44,9 % des ventes sont électrifiées, et les émissions moyennes des voitures neuves sont passées sous les 100 grammes de CO2 par kilomètre. Mais regardez le graphique à l'échelle mondiale : seuls 10 % des ventes sont 100 % électriques, et 69 % sont encore des moteurs thermiques sans aucune électrification. Autrement dit, l'électrification est surtout une réalité européenne. En Inde ou en Amérique latine, Renault vend encore majoritairement de l'essence, du diesel et du GPL.</a:t>
             </a:r>
           </a:p>
-          <a:p/>
+          <a:p>
+            <a:endParaRPr/>
+          </a:p>
           <a:p>
             <a:r>
               <a:t>Transition : Maxime va maintenant vous présenter les autres actions du groupe.</a:t>
@@ -2239,7 +2787,7 @@
             <a:spLocks noGrp="1"/>
           </p:cNvSpPr>
           <p:nvPr>
-            <p:ph type="sldNum" idx="5" sz="quarter"/>
+            <p:ph type="sldNum" sz="quarter" idx="5"/>
           </p:nvPr>
         </p:nvSpPr>
         <p:spPr/>
@@ -2253,7 +2801,7 @@
 </file>
 
 <file path=ppt/notesSlides/notesSlide9.xml><?xml version="1.0" encoding="utf-8"?>
-<p:notes xmlns:a="http://schemas.openxmlformats.org/drawingml/2006/main" xmlns:p="http://schemas.openxmlformats.org/presentationml/2006/main" xmlns:r="http://schemas.openxmlformats.org/officeDocument/2006/relationships">
+<p:notes xmlns:a="http://schemas.openxmlformats.org/drawingml/2006/main" xmlns:r="http://schemas.openxmlformats.org/officeDocument/2006/relationships" xmlns:p="http://schemas.openxmlformats.org/presentationml/2006/main">
   <p:cSld>
     <p:spTree>
       <p:nvGrpSpPr>
@@ -2273,7 +2821,7 @@
         <p:nvSpPr>
           <p:cNvPr id="2" name="Slide Image Placeholder 1"/>
           <p:cNvSpPr>
-            <a:spLocks noGrp="1"/>
+            <a:spLocks noGrp="1" noRot="1" noChangeAspect="1"/>
           </p:cNvSpPr>
           <p:nvPr>
             <p:ph type="sldImg" idx="2"/>
@@ -2288,7 +2836,7 @@
             <a:spLocks noGrp="1"/>
           </p:cNvSpPr>
           <p:nvPr>
-            <p:ph type="body" idx="3" sz="quarter"/>
+            <p:ph type="body" sz="quarter" idx="3"/>
           </p:nvPr>
         </p:nvSpPr>
         <p:spPr/>
@@ -2300,7 +2848,9 @@
               <a:t>[Maxime JAEN – 1:00]</a:t>
             </a:r>
           </a:p>
-          <a:p/>
+          <a:p>
+            <a:endParaRPr/>
+          </a:p>
           <a:p>
             <a:r>
               <a:t>Merci Danyil. Deuxième action phare : l'économie circulaire, avec la Refactory de Flins, présentée comme la première usine européenne dédiée à l'économie circulaire de la mobilité. On y reconditionne des voitures d'occasion, on y répare des batteries et on y remet des pièces à neuf. Résultat : les nouveaux modèles contiennent 17 à 20 % de plastique recyclé, deux fois la moyenne européenne. Côté achats, la politique fournisseurs de 2024 intègre des critères ESG et exige une note EcoVadis minimale. Il y a eu 107 audits en 2025. Mais la politique dit aussi que les fournisseurs de rang N, donc les mines, sont gérés par les fournisseurs de rang 1. Enfin, on note que la Refactory accompagne aussi l'arrêt de la production automobile à Flins en 2024, et que les syndicats restent sceptiques sur la reconversion des salariés.</a:t>
@@ -2315,7 +2865,7 @@
             <a:spLocks noGrp="1"/>
           </p:cNvSpPr>
           <p:nvPr>
-            <p:ph type="sldNum" idx="5" sz="quarter"/>
+            <p:ph type="sldNum" sz="quarter" idx="5"/>
           </p:nvPr>
         </p:nvSpPr>
         <p:spPr/>
@@ -2366,10 +2916,9 @@
           <a:lstStyle/>
           <a:p>
             <a:r>
-              <a:rPr lang="en-US" smtClean="0"/>
+              <a:rPr lang="en-US"/>
               <a:t>Click to edit Master title style</a:t>
             </a:r>
-            <a:endParaRPr lang="en-US"/>
           </a:p>
         </p:txBody>
       </p:sp>
@@ -2485,10 +3034,9 @@
           </a:lstStyle>
           <a:p>
             <a:r>
-              <a:rPr lang="en-US" smtClean="0"/>
+              <a:rPr lang="en-US"/>
               <a:t>Click to edit Master subtitle style</a:t>
             </a:r>
-            <a:endParaRPr lang="en-US"/>
           </a:p>
         </p:txBody>
       </p:sp>
@@ -2509,7 +3057,7 @@
           <a:p>
             <a:fld id="{5BCAD085-E8A6-8845-BD4E-CB4CCA059FC4}" type="datetimeFigureOut">
               <a:rPr lang="en-US" smtClean="0"/>
-              <a:t>1/27/13</a:t>
+              <a:t>9/28/2026</a:t>
             </a:fld>
             <a:endParaRPr lang="en-US"/>
           </a:p>
@@ -2603,10 +3151,9 @@
           <a:lstStyle/>
           <a:p>
             <a:r>
-              <a:rPr lang="en-US" smtClean="0"/>
+              <a:rPr lang="en-US"/>
               <a:t>Click to edit Master title style</a:t>
             </a:r>
-            <a:endParaRPr lang="en-US"/>
           </a:p>
         </p:txBody>
       </p:sp>
@@ -2627,38 +3174,37 @@
           <a:p>
             <a:pPr lvl="0"/>
             <a:r>
-              <a:rPr lang="en-US" smtClean="0"/>
+              <a:rPr lang="en-US"/>
               <a:t>Click to edit Master text styles</a:t>
             </a:r>
           </a:p>
           <a:p>
             <a:pPr lvl="1"/>
             <a:r>
-              <a:rPr lang="en-US" smtClean="0"/>
+              <a:rPr lang="en-US"/>
               <a:t>Second level</a:t>
             </a:r>
           </a:p>
           <a:p>
             <a:pPr lvl="2"/>
             <a:r>
-              <a:rPr lang="en-US" smtClean="0"/>
+              <a:rPr lang="en-US"/>
               <a:t>Third level</a:t>
             </a:r>
           </a:p>
           <a:p>
             <a:pPr lvl="3"/>
             <a:r>
-              <a:rPr lang="en-US" smtClean="0"/>
+              <a:rPr lang="en-US"/>
               <a:t>Fourth level</a:t>
             </a:r>
           </a:p>
           <a:p>
             <a:pPr lvl="4"/>
             <a:r>
-              <a:rPr lang="en-US" smtClean="0"/>
+              <a:rPr lang="en-US"/>
               <a:t>Fifth level</a:t>
             </a:r>
-            <a:endParaRPr lang="en-US"/>
           </a:p>
         </p:txBody>
       </p:sp>
@@ -2679,7 +3225,7 @@
           <a:p>
             <a:fld id="{5BCAD085-E8A6-8845-BD4E-CB4CCA059FC4}" type="datetimeFigureOut">
               <a:rPr lang="en-US" smtClean="0"/>
-              <a:t>1/27/13</a:t>
+              <a:t>9/28/2026</a:t>
             </a:fld>
             <a:endParaRPr lang="en-US"/>
           </a:p>
@@ -2778,10 +3324,9 @@
           <a:lstStyle/>
           <a:p>
             <a:r>
-              <a:rPr lang="en-US" smtClean="0"/>
+              <a:rPr lang="en-US"/>
               <a:t>Click to edit Master title style</a:t>
             </a:r>
-            <a:endParaRPr lang="en-US"/>
           </a:p>
         </p:txBody>
       </p:sp>
@@ -2807,38 +3352,37 @@
           <a:p>
             <a:pPr lvl="0"/>
             <a:r>
-              <a:rPr lang="en-US" smtClean="0"/>
+              <a:rPr lang="en-US"/>
               <a:t>Click to edit Master text styles</a:t>
             </a:r>
           </a:p>
           <a:p>
             <a:pPr lvl="1"/>
             <a:r>
-              <a:rPr lang="en-US" smtClean="0"/>
+              <a:rPr lang="en-US"/>
               <a:t>Second level</a:t>
             </a:r>
           </a:p>
           <a:p>
             <a:pPr lvl="2"/>
             <a:r>
-              <a:rPr lang="en-US" smtClean="0"/>
+              <a:rPr lang="en-US"/>
               <a:t>Third level</a:t>
             </a:r>
           </a:p>
           <a:p>
             <a:pPr lvl="3"/>
             <a:r>
-              <a:rPr lang="en-US" smtClean="0"/>
+              <a:rPr lang="en-US"/>
               <a:t>Fourth level</a:t>
             </a:r>
           </a:p>
           <a:p>
             <a:pPr lvl="4"/>
             <a:r>
-              <a:rPr lang="en-US" smtClean="0"/>
+              <a:rPr lang="en-US"/>
               <a:t>Fifth level</a:t>
             </a:r>
-            <a:endParaRPr lang="en-US"/>
           </a:p>
         </p:txBody>
       </p:sp>
@@ -2859,7 +3403,7 @@
           <a:p>
             <a:fld id="{5BCAD085-E8A6-8845-BD4E-CB4CCA059FC4}" type="datetimeFigureOut">
               <a:rPr lang="en-US" smtClean="0"/>
-              <a:t>1/27/13</a:t>
+              <a:t>9/28/2026</a:t>
             </a:fld>
             <a:endParaRPr lang="en-US"/>
           </a:p>
@@ -2953,10 +3497,9 @@
           <a:lstStyle/>
           <a:p>
             <a:r>
-              <a:rPr lang="en-US" smtClean="0"/>
+              <a:rPr lang="en-US"/>
               <a:t>Click to edit Master title style</a:t>
             </a:r>
-            <a:endParaRPr lang="en-US"/>
           </a:p>
         </p:txBody>
       </p:sp>
@@ -2977,38 +3520,37 @@
           <a:p>
             <a:pPr lvl="0"/>
             <a:r>
-              <a:rPr lang="en-US" smtClean="0"/>
+              <a:rPr lang="en-US"/>
               <a:t>Click to edit Master text styles</a:t>
             </a:r>
           </a:p>
           <a:p>
             <a:pPr lvl="1"/>
             <a:r>
-              <a:rPr lang="en-US" smtClean="0"/>
+              <a:rPr lang="en-US"/>
               <a:t>Second level</a:t>
             </a:r>
           </a:p>
           <a:p>
             <a:pPr lvl="2"/>
             <a:r>
-              <a:rPr lang="en-US" smtClean="0"/>
+              <a:rPr lang="en-US"/>
               <a:t>Third level</a:t>
             </a:r>
           </a:p>
           <a:p>
             <a:pPr lvl="3"/>
             <a:r>
-              <a:rPr lang="en-US" smtClean="0"/>
+              <a:rPr lang="en-US"/>
               <a:t>Fourth level</a:t>
             </a:r>
           </a:p>
           <a:p>
             <a:pPr lvl="4"/>
             <a:r>
-              <a:rPr lang="en-US" smtClean="0"/>
+              <a:rPr lang="en-US"/>
               <a:t>Fifth level</a:t>
             </a:r>
-            <a:endParaRPr lang="en-US"/>
           </a:p>
         </p:txBody>
       </p:sp>
@@ -3029,7 +3571,7 @@
           <a:p>
             <a:fld id="{5BCAD085-E8A6-8845-BD4E-CB4CCA059FC4}" type="datetimeFigureOut">
               <a:rPr lang="en-US" smtClean="0"/>
-              <a:t>1/27/13</a:t>
+              <a:t>9/28/2026</a:t>
             </a:fld>
             <a:endParaRPr lang="en-US"/>
           </a:p>
@@ -3132,10 +3674,9 @@
           </a:lstStyle>
           <a:p>
             <a:r>
-              <a:rPr lang="en-US" smtClean="0"/>
+              <a:rPr lang="en-US"/>
               <a:t>Click to edit Master title style</a:t>
             </a:r>
-            <a:endParaRPr lang="en-US"/>
           </a:p>
         </p:txBody>
       </p:sp>
@@ -3252,7 +3793,7 @@
           <a:p>
             <a:pPr lvl="0"/>
             <a:r>
-              <a:rPr lang="en-US" smtClean="0"/>
+              <a:rPr lang="en-US"/>
               <a:t>Click to edit Master text styles</a:t>
             </a:r>
           </a:p>
@@ -3275,7 +3816,7 @@
           <a:p>
             <a:fld id="{5BCAD085-E8A6-8845-BD4E-CB4CCA059FC4}" type="datetimeFigureOut">
               <a:rPr lang="en-US" smtClean="0"/>
-              <a:t>1/27/13</a:t>
+              <a:t>9/28/2026</a:t>
             </a:fld>
             <a:endParaRPr lang="en-US"/>
           </a:p>
@@ -3369,10 +3910,9 @@
           <a:lstStyle/>
           <a:p>
             <a:r>
-              <a:rPr lang="en-US" smtClean="0"/>
+              <a:rPr lang="en-US"/>
               <a:t>Click to edit Master title style</a:t>
             </a:r>
-            <a:endParaRPr lang="en-US"/>
           </a:p>
         </p:txBody>
       </p:sp>
@@ -3426,38 +3966,37 @@
           <a:p>
             <a:pPr lvl="0"/>
             <a:r>
-              <a:rPr lang="en-US" smtClean="0"/>
+              <a:rPr lang="en-US"/>
               <a:t>Click to edit Master text styles</a:t>
             </a:r>
           </a:p>
           <a:p>
             <a:pPr lvl="1"/>
             <a:r>
-              <a:rPr lang="en-US" smtClean="0"/>
+              <a:rPr lang="en-US"/>
               <a:t>Second level</a:t>
             </a:r>
           </a:p>
           <a:p>
             <a:pPr lvl="2"/>
             <a:r>
-              <a:rPr lang="en-US" smtClean="0"/>
+              <a:rPr lang="en-US"/>
               <a:t>Third level</a:t>
             </a:r>
           </a:p>
           <a:p>
             <a:pPr lvl="3"/>
             <a:r>
-              <a:rPr lang="en-US" smtClean="0"/>
+              <a:rPr lang="en-US"/>
               <a:t>Fourth level</a:t>
             </a:r>
           </a:p>
           <a:p>
             <a:pPr lvl="4"/>
             <a:r>
-              <a:rPr lang="en-US" smtClean="0"/>
+              <a:rPr lang="en-US"/>
               <a:t>Fifth level</a:t>
             </a:r>
-            <a:endParaRPr lang="en-US"/>
           </a:p>
         </p:txBody>
       </p:sp>
@@ -3511,38 +4050,37 @@
           <a:p>
             <a:pPr lvl="0"/>
             <a:r>
-              <a:rPr lang="en-US" smtClean="0"/>
+              <a:rPr lang="en-US"/>
               <a:t>Click to edit Master text styles</a:t>
             </a:r>
           </a:p>
           <a:p>
             <a:pPr lvl="1"/>
             <a:r>
-              <a:rPr lang="en-US" smtClean="0"/>
+              <a:rPr lang="en-US"/>
               <a:t>Second level</a:t>
             </a:r>
           </a:p>
           <a:p>
             <a:pPr lvl="2"/>
             <a:r>
-              <a:rPr lang="en-US" smtClean="0"/>
+              <a:rPr lang="en-US"/>
               <a:t>Third level</a:t>
             </a:r>
           </a:p>
           <a:p>
             <a:pPr lvl="3"/>
             <a:r>
-              <a:rPr lang="en-US" smtClean="0"/>
+              <a:rPr lang="en-US"/>
               <a:t>Fourth level</a:t>
             </a:r>
           </a:p>
           <a:p>
             <a:pPr lvl="4"/>
             <a:r>
-              <a:rPr lang="en-US" smtClean="0"/>
+              <a:rPr lang="en-US"/>
               <a:t>Fifth level</a:t>
             </a:r>
-            <a:endParaRPr lang="en-US"/>
           </a:p>
         </p:txBody>
       </p:sp>
@@ -3563,7 +4101,7 @@
           <a:p>
             <a:fld id="{5BCAD085-E8A6-8845-BD4E-CB4CCA059FC4}" type="datetimeFigureOut">
               <a:rPr lang="en-US" smtClean="0"/>
-              <a:t>1/27/13</a:t>
+              <a:t>9/28/2026</a:t>
             </a:fld>
             <a:endParaRPr lang="en-US"/>
           </a:p>
@@ -3661,10 +4199,9 @@
           </a:lstStyle>
           <a:p>
             <a:r>
-              <a:rPr lang="en-US" smtClean="0"/>
+              <a:rPr lang="en-US"/>
               <a:t>Click to edit Master title style</a:t>
             </a:r>
-            <a:endParaRPr lang="en-US"/>
           </a:p>
         </p:txBody>
       </p:sp>
@@ -3727,7 +4264,7 @@
           <a:p>
             <a:pPr lvl="0"/>
             <a:r>
-              <a:rPr lang="en-US" smtClean="0"/>
+              <a:rPr lang="en-US"/>
               <a:t>Click to edit Master text styles</a:t>
             </a:r>
           </a:p>
@@ -3783,38 +4320,37 @@
           <a:p>
             <a:pPr lvl="0"/>
             <a:r>
-              <a:rPr lang="en-US" smtClean="0"/>
+              <a:rPr lang="en-US"/>
               <a:t>Click to edit Master text styles</a:t>
             </a:r>
           </a:p>
           <a:p>
             <a:pPr lvl="1"/>
             <a:r>
-              <a:rPr lang="en-US" smtClean="0"/>
+              <a:rPr lang="en-US"/>
               <a:t>Second level</a:t>
             </a:r>
           </a:p>
           <a:p>
             <a:pPr lvl="2"/>
             <a:r>
-              <a:rPr lang="en-US" smtClean="0"/>
+              <a:rPr lang="en-US"/>
               <a:t>Third level</a:t>
             </a:r>
           </a:p>
           <a:p>
             <a:pPr lvl="3"/>
             <a:r>
-              <a:rPr lang="en-US" smtClean="0"/>
+              <a:rPr lang="en-US"/>
               <a:t>Fourth level</a:t>
             </a:r>
           </a:p>
           <a:p>
             <a:pPr lvl="4"/>
             <a:r>
-              <a:rPr lang="en-US" smtClean="0"/>
+              <a:rPr lang="en-US"/>
               <a:t>Fifth level</a:t>
             </a:r>
-            <a:endParaRPr lang="en-US"/>
           </a:p>
         </p:txBody>
       </p:sp>
@@ -3877,7 +4413,7 @@
           <a:p>
             <a:pPr lvl="0"/>
             <a:r>
-              <a:rPr lang="en-US" smtClean="0"/>
+              <a:rPr lang="en-US"/>
               <a:t>Click to edit Master text styles</a:t>
             </a:r>
           </a:p>
@@ -3933,38 +4469,37 @@
           <a:p>
             <a:pPr lvl="0"/>
             <a:r>
-              <a:rPr lang="en-US" smtClean="0"/>
+              <a:rPr lang="en-US"/>
               <a:t>Click to edit Master text styles</a:t>
             </a:r>
           </a:p>
           <a:p>
             <a:pPr lvl="1"/>
             <a:r>
-              <a:rPr lang="en-US" smtClean="0"/>
+              <a:rPr lang="en-US"/>
               <a:t>Second level</a:t>
             </a:r>
           </a:p>
           <a:p>
             <a:pPr lvl="2"/>
             <a:r>
-              <a:rPr lang="en-US" smtClean="0"/>
+              <a:rPr lang="en-US"/>
               <a:t>Third level</a:t>
             </a:r>
           </a:p>
           <a:p>
             <a:pPr lvl="3"/>
             <a:r>
-              <a:rPr lang="en-US" smtClean="0"/>
+              <a:rPr lang="en-US"/>
               <a:t>Fourth level</a:t>
             </a:r>
           </a:p>
           <a:p>
             <a:pPr lvl="4"/>
             <a:r>
-              <a:rPr lang="en-US" smtClean="0"/>
+              <a:rPr lang="en-US"/>
               <a:t>Fifth level</a:t>
             </a:r>
-            <a:endParaRPr lang="en-US"/>
           </a:p>
         </p:txBody>
       </p:sp>
@@ -3985,7 +4520,7 @@
           <a:p>
             <a:fld id="{5BCAD085-E8A6-8845-BD4E-CB4CCA059FC4}" type="datetimeFigureOut">
               <a:rPr lang="en-US" smtClean="0"/>
-              <a:t>1/27/13</a:t>
+              <a:t>9/28/2026</a:t>
             </a:fld>
             <a:endParaRPr lang="en-US"/>
           </a:p>
@@ -4079,10 +4614,9 @@
           <a:lstStyle/>
           <a:p>
             <a:r>
-              <a:rPr lang="en-US" smtClean="0"/>
+              <a:rPr lang="en-US"/>
               <a:t>Click to edit Master title style</a:t>
             </a:r>
-            <a:endParaRPr lang="en-US"/>
           </a:p>
         </p:txBody>
       </p:sp>
@@ -4103,7 +4637,7 @@
           <a:p>
             <a:fld id="{5BCAD085-E8A6-8845-BD4E-CB4CCA059FC4}" type="datetimeFigureOut">
               <a:rPr lang="en-US" smtClean="0"/>
-              <a:t>1/27/13</a:t>
+              <a:t>9/28/2026</a:t>
             </a:fld>
             <a:endParaRPr lang="en-US"/>
           </a:p>
@@ -4198,7 +4732,7 @@
           <a:p>
             <a:fld id="{5BCAD085-E8A6-8845-BD4E-CB4CCA059FC4}" type="datetimeFigureOut">
               <a:rPr lang="en-US" smtClean="0"/>
-              <a:t>1/27/13</a:t>
+              <a:t>9/28/2026</a:t>
             </a:fld>
             <a:endParaRPr lang="en-US"/>
           </a:p>
@@ -4301,10 +4835,9 @@
           </a:lstStyle>
           <a:p>
             <a:r>
-              <a:rPr lang="en-US" smtClean="0"/>
+              <a:rPr lang="en-US"/>
               <a:t>Click to edit Master title style</a:t>
             </a:r>
-            <a:endParaRPr lang="en-US"/>
           </a:p>
         </p:txBody>
       </p:sp>
@@ -4358,38 +4891,37 @@
           <a:p>
             <a:pPr lvl="0"/>
             <a:r>
-              <a:rPr lang="en-US" smtClean="0"/>
+              <a:rPr lang="en-US"/>
               <a:t>Click to edit Master text styles</a:t>
             </a:r>
           </a:p>
           <a:p>
             <a:pPr lvl="1"/>
             <a:r>
-              <a:rPr lang="en-US" smtClean="0"/>
+              <a:rPr lang="en-US"/>
               <a:t>Second level</a:t>
             </a:r>
           </a:p>
           <a:p>
             <a:pPr lvl="2"/>
             <a:r>
-              <a:rPr lang="en-US" smtClean="0"/>
+              <a:rPr lang="en-US"/>
               <a:t>Third level</a:t>
             </a:r>
           </a:p>
           <a:p>
             <a:pPr lvl="3"/>
             <a:r>
-              <a:rPr lang="en-US" smtClean="0"/>
+              <a:rPr lang="en-US"/>
               <a:t>Fourth level</a:t>
             </a:r>
           </a:p>
           <a:p>
             <a:pPr lvl="4"/>
             <a:r>
-              <a:rPr lang="en-US" smtClean="0"/>
+              <a:rPr lang="en-US"/>
               <a:t>Fifth level</a:t>
             </a:r>
-            <a:endParaRPr lang="en-US"/>
           </a:p>
         </p:txBody>
       </p:sp>
@@ -4452,7 +4984,7 @@
           <a:p>
             <a:pPr lvl="0"/>
             <a:r>
-              <a:rPr lang="en-US" smtClean="0"/>
+              <a:rPr lang="en-US"/>
               <a:t>Click to edit Master text styles</a:t>
             </a:r>
           </a:p>
@@ -4475,7 +5007,7 @@
           <a:p>
             <a:fld id="{5BCAD085-E8A6-8845-BD4E-CB4CCA059FC4}" type="datetimeFigureOut">
               <a:rPr lang="en-US" smtClean="0"/>
-              <a:t>1/27/13</a:t>
+              <a:t>9/28/2026</a:t>
             </a:fld>
             <a:endParaRPr lang="en-US"/>
           </a:p>
@@ -4578,10 +5110,9 @@
           </a:lstStyle>
           <a:p>
             <a:r>
-              <a:rPr lang="en-US" smtClean="0"/>
+              <a:rPr lang="en-US"/>
               <a:t>Click to edit Master title style</a:t>
             </a:r>
-            <a:endParaRPr lang="en-US"/>
           </a:p>
         </p:txBody>
       </p:sp>
@@ -4705,7 +5236,7 @@
           <a:p>
             <a:pPr lvl="0"/>
             <a:r>
-              <a:rPr lang="en-US" smtClean="0"/>
+              <a:rPr lang="en-US"/>
               <a:t>Click to edit Master text styles</a:t>
             </a:r>
           </a:p>
@@ -4728,7 +5259,7 @@
           <a:p>
             <a:fld id="{5BCAD085-E8A6-8845-BD4E-CB4CCA059FC4}" type="datetimeFigureOut">
               <a:rPr lang="en-US" smtClean="0"/>
-              <a:t>1/27/13</a:t>
+              <a:t>9/28/2026</a:t>
             </a:fld>
             <a:endParaRPr lang="en-US"/>
           </a:p>
@@ -4837,10 +5368,9 @@
           <a:lstStyle/>
           <a:p>
             <a:r>
-              <a:rPr lang="en-US" smtClean="0"/>
+              <a:rPr lang="en-US"/>
               <a:t>Click to edit Master title style</a:t>
             </a:r>
-            <a:endParaRPr lang="en-US"/>
           </a:p>
         </p:txBody>
       </p:sp>
@@ -4871,38 +5401,37 @@
           <a:p>
             <a:pPr lvl="0"/>
             <a:r>
-              <a:rPr lang="en-US" smtClean="0"/>
+              <a:rPr lang="en-US"/>
               <a:t>Click to edit Master text styles</a:t>
             </a:r>
           </a:p>
           <a:p>
             <a:pPr lvl="1"/>
             <a:r>
-              <a:rPr lang="en-US" smtClean="0"/>
+              <a:rPr lang="en-US"/>
               <a:t>Second level</a:t>
             </a:r>
           </a:p>
           <a:p>
             <a:pPr lvl="2"/>
             <a:r>
-              <a:rPr lang="en-US" smtClean="0"/>
+              <a:rPr lang="en-US"/>
               <a:t>Third level</a:t>
             </a:r>
           </a:p>
           <a:p>
             <a:pPr lvl="3"/>
             <a:r>
-              <a:rPr lang="en-US" smtClean="0"/>
+              <a:rPr lang="en-US"/>
               <a:t>Fourth level</a:t>
             </a:r>
           </a:p>
           <a:p>
             <a:pPr lvl="4"/>
             <a:r>
-              <a:rPr lang="en-US" smtClean="0"/>
+              <a:rPr lang="en-US"/>
               <a:t>Fifth level</a:t>
             </a:r>
-            <a:endParaRPr lang="en-US"/>
           </a:p>
         </p:txBody>
       </p:sp>
@@ -4941,7 +5470,7 @@
           <a:p>
             <a:fld id="{5BCAD085-E8A6-8845-BD4E-CB4CCA059FC4}" type="datetimeFigureOut">
               <a:rPr lang="en-US" smtClean="0"/>
-              <a:t>1/27/13</a:t>
+              <a:t>9/28/2026</a:t>
             </a:fld>
             <a:endParaRPr lang="en-US"/>
           </a:p>
@@ -5300,7 +5829,7 @@
 </file>
 
 <file path=ppt/slides/slide1.xml><?xml version="1.0" encoding="utf-8"?>
-<p:sld xmlns:a="http://schemas.openxmlformats.org/drawingml/2006/main" xmlns:p="http://schemas.openxmlformats.org/presentationml/2006/main" xmlns:r="http://schemas.openxmlformats.org/officeDocument/2006/relationships">
+<p:sld xmlns:a="http://schemas.openxmlformats.org/drawingml/2006/main" xmlns:r="http://schemas.openxmlformats.org/officeDocument/2006/relationships" xmlns:p="http://schemas.openxmlformats.org/presentationml/2006/main">
   <p:cSld>
     <p:bg>
       <p:bgPr>
@@ -5316,7 +5845,14 @@
         <p:cNvGrpSpPr/>
         <p:nvPr/>
       </p:nvGrpSpPr>
-      <p:grpSpPr/>
+      <p:grpSpPr>
+        <a:xfrm>
+          <a:off x="0" y="0"/>
+          <a:ext cx="0" cy="0"/>
+          <a:chOff x="0" y="0"/>
+          <a:chExt cx="0" cy="0"/>
+        </a:xfrm>
+      </p:grpSpPr>
       <p:sp>
         <p:nvSpPr>
           <p:cNvPr id="2" name="Rounded Rectangle 1"/>
@@ -5356,7 +5892,7 @@
           </a:fontRef>
         </p:style>
         <p:txBody>
-          <a:bodyPr rtlCol="0" anchor="ctr" wrap="square" lIns="45720" rIns="45720" tIns="27432" bIns="27432"/>
+          <a:bodyPr wrap="square" lIns="45720" tIns="27432" rIns="45720" bIns="27432" rtlCol="0" anchor="ctr"/>
           <a:lstStyle/>
           <a:p>
             <a:pPr algn="ctr"/>
@@ -5389,7 +5925,7 @@
           <a:noFill/>
         </p:spPr>
         <p:txBody>
-          <a:bodyPr wrap="square" lIns="45720" rIns="45720" tIns="27432" bIns="27432" anchor="t">
+          <a:bodyPr wrap="square" lIns="45720" tIns="27432" rIns="45720" bIns="27432" anchor="t">
             <a:spAutoFit/>
           </a:bodyPr>
           <a:lstStyle/>
@@ -5424,7 +5960,7 @@
           <a:noFill/>
         </p:spPr>
         <p:txBody>
-          <a:bodyPr wrap="square" lIns="45720" rIns="45720" tIns="27432" bIns="27432" anchor="t">
+          <a:bodyPr wrap="square" lIns="45720" tIns="27432" rIns="45720" bIns="27432" anchor="t">
             <a:spAutoFit/>
           </a:bodyPr>
           <a:lstStyle/>
@@ -5459,7 +5995,7 @@
           <a:noFill/>
         </p:spPr>
         <p:txBody>
-          <a:bodyPr wrap="square" lIns="45720" rIns="45720" tIns="27432" bIns="27432" anchor="t">
+          <a:bodyPr wrap="square" lIns="45720" tIns="27432" rIns="45720" bIns="27432" anchor="t">
             <a:spAutoFit/>
           </a:bodyPr>
           <a:lstStyle/>
@@ -5506,7 +6042,7 @@
           <a:noFill/>
         </p:spPr>
         <p:txBody>
-          <a:bodyPr wrap="square" lIns="45720" rIns="45720" tIns="27432" bIns="27432" anchor="t">
+          <a:bodyPr wrap="square" lIns="45720" tIns="27432" rIns="45720" bIns="27432" anchor="t">
             <a:spAutoFit/>
           </a:bodyPr>
           <a:lstStyle/>
@@ -5565,6 +6101,7 @@
           <a:lstStyle/>
           <a:p>
             <a:pPr algn="ctr"/>
+            <a:endParaRPr/>
           </a:p>
         </p:txBody>
       </p:sp>
@@ -5577,7 +6114,7 @@
         <p:spPr>
           <a:xfrm>
             <a:off x="548640" y="4754880"/>
-            <a:ext cx="10515600" cy="1280160"/>
+            <a:ext cx="10515600" cy="896656"/>
           </a:xfrm>
           <a:prstGeom prst="rect">
             <a:avLst/>
@@ -5585,7 +6122,7 @@
           <a:noFill/>
         </p:spPr>
         <p:txBody>
-          <a:bodyPr wrap="square" lIns="45720" rIns="45720" tIns="27432" bIns="27432" anchor="t">
+          <a:bodyPr wrap="square" lIns="45720" tIns="27432" rIns="45720" bIns="27432" anchor="t">
             <a:spAutoFit/>
           </a:bodyPr>
           <a:lstStyle/>
@@ -5596,7 +6133,7 @@
               </a:spcAft>
             </a:pPr>
             <a:r>
-              <a:rPr sz="1600" b="1" i="0">
+              <a:rPr sz="1600" b="1" i="0" dirty="0">
                 <a:solidFill>
                   <a:srgbClr val="FFFFFF"/>
                 </a:solidFill>
@@ -5604,6 +6141,93 @@
               </a:rPr>
               <a:t>Nicolas BINAND · Danyil BAZAIN · Maxime JAEN · Matheo PICARD</a:t>
             </a:r>
+          </a:p>
+          <a:p>
+            <a:pPr>
+              <a:spcAft>
+                <a:spcPts val="400"/>
+              </a:spcAft>
+            </a:pPr>
+            <a:r>
+              <a:rPr sz="1600" b="0" i="0" dirty="0">
+                <a:solidFill>
+                  <a:srgbClr val="D6C4A0"/>
+                </a:solidFill>
+                <a:latin typeface="Calibri"/>
+              </a:rPr>
+              <a:t>Cours : RSE (</a:t>
+            </a:r>
+            <a:r>
+              <a:rPr sz="1600" b="0" i="0" dirty="0" err="1">
+                <a:solidFill>
+                  <a:srgbClr val="D6C4A0"/>
+                </a:solidFill>
+                <a:latin typeface="Calibri"/>
+              </a:rPr>
+              <a:t>Responsabilité</a:t>
+            </a:r>
+            <a:r>
+              <a:rPr sz="1600" b="0" i="0" dirty="0">
+                <a:solidFill>
+                  <a:srgbClr val="D6C4A0"/>
+                </a:solidFill>
+                <a:latin typeface="Calibri"/>
+              </a:rPr>
+              <a:t> </a:t>
+            </a:r>
+            <a:r>
+              <a:rPr sz="1600" b="0" i="0" dirty="0" err="1">
+                <a:solidFill>
+                  <a:srgbClr val="D6C4A0"/>
+                </a:solidFill>
+                <a:latin typeface="Calibri"/>
+              </a:rPr>
+              <a:t>Sociétale</a:t>
+            </a:r>
+            <a:r>
+              <a:rPr sz="1600" b="0" i="0" dirty="0">
+                <a:solidFill>
+                  <a:srgbClr val="D6C4A0"/>
+                </a:solidFill>
+                <a:latin typeface="Calibri"/>
+              </a:rPr>
+              <a:t> des Entreprises) · </a:t>
+            </a:r>
+            <a:r>
+              <a:rPr sz="1600" b="0" i="0" dirty="0" err="1">
+                <a:solidFill>
+                  <a:srgbClr val="D6C4A0"/>
+                </a:solidFill>
+                <a:latin typeface="Calibri"/>
+              </a:rPr>
+              <a:t>Professeur</a:t>
+            </a:r>
+            <a:r>
+              <a:rPr sz="1600" b="0" i="0" dirty="0">
+                <a:solidFill>
+                  <a:srgbClr val="D6C4A0"/>
+                </a:solidFill>
+                <a:latin typeface="Calibri"/>
+              </a:rPr>
+              <a:t> : </a:t>
+            </a:r>
+            <a:r>
+              <a:rPr lang="en-US" sz="1600" dirty="0">
+                <a:solidFill>
+                  <a:srgbClr val="D6C4A0"/>
+                </a:solidFill>
+                <a:ea typeface="+mn-lt"/>
+                <a:cs typeface="+mn-lt"/>
+              </a:rPr>
+              <a:t>Laurence FRANCESCHI</a:t>
+            </a:r>
+            <a:endParaRPr sz="1600" b="0" i="0" dirty="0">
+              <a:solidFill>
+                <a:srgbClr val="D6C4A0"/>
+              </a:solidFill>
+              <a:ea typeface="+mn-lt"/>
+              <a:cs typeface="+mn-lt"/>
+            </a:endParaRPr>
           </a:p>
           <a:p>
             <a:pPr algn="l">
@@ -5612,30 +6236,58 @@
               </a:spcAft>
             </a:pPr>
             <a:r>
-              <a:rPr sz="1600" b="0" i="0">
+              <a:rPr sz="1600" b="0" i="0" dirty="0">
                 <a:solidFill>
                   <a:srgbClr val="D6C4A0"/>
                 </a:solidFill>
                 <a:latin typeface="Calibri"/>
               </a:rPr>
-              <a:t>Cours : RSE (Responsabilité Sociétale des Entreprises) · Professeur : [Nom du professeur]</a:t>
-            </a:r>
-          </a:p>
-          <a:p>
-            <a:pPr algn="l">
-              <a:spcAft>
-                <a:spcPts val="400"/>
-              </a:spcAft>
-            </a:pPr>
-            <a:r>
-              <a:rPr sz="1600" b="0" i="0">
+              <a:t>Oral du </a:t>
+            </a:r>
+            <a:r>
+              <a:rPr sz="1600" b="0" i="0" dirty="0" err="1">
                 <a:solidFill>
                   <a:srgbClr val="D6C4A0"/>
                 </a:solidFill>
                 <a:latin typeface="Calibri"/>
               </a:rPr>
-              <a:t>Oral du vendredi 2 octobre 2026</a:t>
-            </a:r>
+              <a:t>vendredi</a:t>
+            </a:r>
+            <a:r>
+              <a:rPr sz="1600" b="0" i="0" dirty="0">
+                <a:solidFill>
+                  <a:srgbClr val="D6C4A0"/>
+                </a:solidFill>
+                <a:latin typeface="Calibri"/>
+              </a:rPr>
+              <a:t> 2 </a:t>
+            </a:r>
+            <a:r>
+              <a:rPr sz="1600" b="0" i="0" dirty="0" err="1">
+                <a:solidFill>
+                  <a:srgbClr val="D6C4A0"/>
+                </a:solidFill>
+                <a:latin typeface="Calibri"/>
+              </a:rPr>
+              <a:t>octobre</a:t>
+            </a:r>
+            <a:r>
+              <a:rPr sz="1600" b="0" i="0" dirty="0">
+                <a:solidFill>
+                  <a:srgbClr val="D6C4A0"/>
+                </a:solidFill>
+                <a:latin typeface="Calibri"/>
+              </a:rPr>
+              <a:t> 2026</a:t>
+            </a:r>
+            <a:endParaRPr sz="1600" b="0" i="0" dirty="0">
+              <a:solidFill>
+                <a:srgbClr val="D6C4A0"/>
+              </a:solidFill>
+              <a:latin typeface="Calibri"/>
+              <a:ea typeface="Calibri"/>
+              <a:cs typeface="Calibri"/>
+            </a:endParaRPr>
           </a:p>
         </p:txBody>
       </p:sp>
@@ -5648,7 +6300,7 @@
 </file>
 
 <file path=ppt/slides/slide10.xml><?xml version="1.0" encoding="utf-8"?>
-<p:sld xmlns:a="http://schemas.openxmlformats.org/drawingml/2006/main" xmlns:p="http://schemas.openxmlformats.org/presentationml/2006/main" xmlns:r="http://schemas.openxmlformats.org/officeDocument/2006/relationships">
+<p:sld xmlns:a="http://schemas.openxmlformats.org/drawingml/2006/main" xmlns:r="http://schemas.openxmlformats.org/officeDocument/2006/relationships" xmlns:p="http://schemas.openxmlformats.org/presentationml/2006/main">
   <p:cSld>
     <p:bg>
       <p:bgPr>
@@ -5664,7 +6316,14 @@
         <p:cNvGrpSpPr/>
         <p:nvPr/>
       </p:nvGrpSpPr>
-      <p:grpSpPr/>
+      <p:grpSpPr>
+        <a:xfrm>
+          <a:off x="0" y="0"/>
+          <a:ext cx="0" cy="0"/>
+          <a:chOff x="0" y="0"/>
+          <a:chExt cx="0" cy="0"/>
+        </a:xfrm>
+      </p:grpSpPr>
       <p:sp>
         <p:nvSpPr>
           <p:cNvPr id="2" name="Rounded Rectangle 1"/>
@@ -5704,7 +6363,7 @@
           </a:fontRef>
         </p:style>
         <p:txBody>
-          <a:bodyPr rtlCol="0" anchor="ctr" wrap="square" lIns="45720" rIns="45720" tIns="27432" bIns="27432"/>
+          <a:bodyPr wrap="square" lIns="45720" tIns="27432" rIns="45720" bIns="27432" rtlCol="0" anchor="ctr"/>
           <a:lstStyle/>
           <a:p>
             <a:pPr algn="ctr"/>
@@ -5737,7 +6396,7 @@
           <a:noFill/>
         </p:spPr>
         <p:txBody>
-          <a:bodyPr wrap="square" lIns="45720" rIns="45720" tIns="27432" bIns="27432" anchor="t">
+          <a:bodyPr wrap="square" lIns="45720" tIns="27432" rIns="45720" bIns="27432" anchor="t">
             <a:spAutoFit/>
           </a:bodyPr>
           <a:lstStyle/>
@@ -5772,7 +6431,7 @@
           <a:noFill/>
         </p:spPr>
         <p:txBody>
-          <a:bodyPr wrap="square" lIns="45720" rIns="45720" tIns="27432" bIns="27432" anchor="t">
+          <a:bodyPr wrap="square" lIns="45720" tIns="27432" rIns="45720" bIns="27432" anchor="t">
             <a:spAutoFit/>
           </a:bodyPr>
           <a:lstStyle/>
@@ -5833,6 +6492,7 @@
           <a:lstStyle/>
           <a:p>
             <a:pPr algn="ctr"/>
+            <a:endParaRPr/>
           </a:p>
         </p:txBody>
       </p:sp>
@@ -5853,7 +6513,7 @@
           <a:noFill/>
         </p:spPr>
         <p:txBody>
-          <a:bodyPr wrap="square" lIns="45720" rIns="45720" tIns="27432" bIns="27432" anchor="t">
+          <a:bodyPr wrap="square" lIns="45720" tIns="27432" rIns="45720" bIns="27432" anchor="t">
             <a:spAutoFit/>
           </a:bodyPr>
           <a:lstStyle/>
@@ -5888,7 +6548,7 @@
           <a:noFill/>
         </p:spPr>
         <p:txBody>
-          <a:bodyPr wrap="square" lIns="45720" rIns="45720" tIns="27432" bIns="27432" anchor="t">
+          <a:bodyPr wrap="square" lIns="45720" tIns="27432" rIns="45720" bIns="27432" anchor="t">
             <a:spAutoFit/>
           </a:bodyPr>
           <a:lstStyle/>
@@ -5923,7 +6583,7 @@
           <a:noFill/>
         </p:spPr>
         <p:txBody>
-          <a:bodyPr wrap="square" lIns="45720" rIns="45720" tIns="27432" bIns="27432" anchor="t">
+          <a:bodyPr wrap="square" lIns="45720" tIns="27432" rIns="45720" bIns="27432" anchor="t">
             <a:spAutoFit/>
           </a:bodyPr>
           <a:lstStyle/>
@@ -5958,7 +6618,7 @@
           <a:noFill/>
         </p:spPr>
         <p:txBody>
-          <a:bodyPr wrap="square" lIns="45720" rIns="45720" tIns="27432" bIns="27432" anchor="t">
+          <a:bodyPr wrap="square" lIns="45720" tIns="27432" rIns="45720" bIns="27432" anchor="t">
             <a:spAutoFit/>
           </a:bodyPr>
           <a:lstStyle/>
@@ -6019,6 +6679,7 @@
           <a:lstStyle/>
           <a:p>
             <a:pPr algn="ctr"/>
+            <a:endParaRPr/>
           </a:p>
         </p:txBody>
       </p:sp>
@@ -6039,7 +6700,7 @@
           <a:noFill/>
         </p:spPr>
         <p:txBody>
-          <a:bodyPr wrap="square" lIns="45720" rIns="45720" tIns="27432" bIns="27432" anchor="t">
+          <a:bodyPr wrap="square" lIns="45720" tIns="27432" rIns="45720" bIns="27432" anchor="t">
             <a:spAutoFit/>
           </a:bodyPr>
           <a:lstStyle/>
@@ -6074,7 +6735,7 @@
           <a:noFill/>
         </p:spPr>
         <p:txBody>
-          <a:bodyPr wrap="square" lIns="45720" rIns="45720" tIns="27432" bIns="27432" anchor="t">
+          <a:bodyPr wrap="square" lIns="45720" tIns="27432" rIns="45720" bIns="27432" anchor="t">
             <a:spAutoFit/>
           </a:bodyPr>
           <a:lstStyle/>
@@ -6109,7 +6770,7 @@
           <a:noFill/>
         </p:spPr>
         <p:txBody>
-          <a:bodyPr wrap="square" lIns="45720" rIns="45720" tIns="27432" bIns="27432" anchor="t">
+          <a:bodyPr wrap="square" lIns="45720" tIns="27432" rIns="45720" bIns="27432" anchor="t">
             <a:spAutoFit/>
           </a:bodyPr>
           <a:lstStyle/>
@@ -6144,7 +6805,7 @@
           <a:noFill/>
         </p:spPr>
         <p:txBody>
-          <a:bodyPr wrap="square" lIns="45720" rIns="45720" tIns="27432" bIns="27432" anchor="t">
+          <a:bodyPr wrap="square" lIns="45720" tIns="27432" rIns="45720" bIns="27432" anchor="t">
             <a:spAutoFit/>
           </a:bodyPr>
           <a:lstStyle/>
@@ -6205,6 +6866,7 @@
           <a:lstStyle/>
           <a:p>
             <a:pPr algn="ctr"/>
+            <a:endParaRPr/>
           </a:p>
         </p:txBody>
       </p:sp>
@@ -6225,7 +6887,7 @@
           <a:noFill/>
         </p:spPr>
         <p:txBody>
-          <a:bodyPr wrap="square" lIns="45720" rIns="45720" tIns="27432" bIns="27432" anchor="t">
+          <a:bodyPr wrap="square" lIns="45720" tIns="27432" rIns="45720" bIns="27432" anchor="t">
             <a:spAutoFit/>
           </a:bodyPr>
           <a:lstStyle/>
@@ -6260,7 +6922,7 @@
           <a:noFill/>
         </p:spPr>
         <p:txBody>
-          <a:bodyPr wrap="square" lIns="45720" rIns="45720" tIns="27432" bIns="27432" anchor="t">
+          <a:bodyPr wrap="square" lIns="45720" tIns="27432" rIns="45720" bIns="27432" anchor="t">
             <a:spAutoFit/>
           </a:bodyPr>
           <a:lstStyle/>
@@ -6295,7 +6957,7 @@
           <a:noFill/>
         </p:spPr>
         <p:txBody>
-          <a:bodyPr wrap="square" lIns="45720" rIns="45720" tIns="27432" bIns="27432" anchor="t">
+          <a:bodyPr wrap="square" lIns="45720" tIns="27432" rIns="45720" bIns="27432" anchor="t">
             <a:spAutoFit/>
           </a:bodyPr>
           <a:lstStyle/>
@@ -6330,7 +6992,7 @@
           <a:noFill/>
         </p:spPr>
         <p:txBody>
-          <a:bodyPr wrap="square" lIns="45720" rIns="45720" tIns="27432" bIns="27432" anchor="t">
+          <a:bodyPr wrap="square" lIns="45720" tIns="27432" rIns="45720" bIns="27432" anchor="t">
             <a:spAutoFit/>
           </a:bodyPr>
           <a:lstStyle/>
@@ -6391,6 +7053,7 @@
           <a:lstStyle/>
           <a:p>
             <a:pPr algn="ctr"/>
+            <a:endParaRPr/>
           </a:p>
         </p:txBody>
       </p:sp>
@@ -6411,7 +7074,7 @@
           <a:noFill/>
         </p:spPr>
         <p:txBody>
-          <a:bodyPr wrap="square" lIns="45720" rIns="45720" tIns="27432" bIns="27432" anchor="t">
+          <a:bodyPr wrap="square" lIns="45720" tIns="27432" rIns="45720" bIns="27432" anchor="t">
             <a:spAutoFit/>
           </a:bodyPr>
           <a:lstStyle/>
@@ -6446,7 +7109,7 @@
           <a:noFill/>
         </p:spPr>
         <p:txBody>
-          <a:bodyPr wrap="square" lIns="45720" rIns="45720" tIns="27432" bIns="27432" anchor="t">
+          <a:bodyPr wrap="square" lIns="45720" tIns="27432" rIns="45720" bIns="27432" anchor="t">
             <a:spAutoFit/>
           </a:bodyPr>
           <a:lstStyle/>
@@ -6481,7 +7144,7 @@
           <a:noFill/>
         </p:spPr>
         <p:txBody>
-          <a:bodyPr wrap="square" lIns="45720" rIns="45720" tIns="27432" bIns="27432" anchor="t">
+          <a:bodyPr wrap="square" lIns="45720" tIns="27432" rIns="45720" bIns="27432" anchor="t">
             <a:spAutoFit/>
           </a:bodyPr>
           <a:lstStyle/>
@@ -6516,7 +7179,7 @@
           <a:noFill/>
         </p:spPr>
         <p:txBody>
-          <a:bodyPr wrap="square" lIns="45720" rIns="45720" tIns="27432" bIns="27432" anchor="t">
+          <a:bodyPr wrap="square" lIns="45720" tIns="27432" rIns="45720" bIns="27432" anchor="t">
             <a:spAutoFit/>
           </a:bodyPr>
           <a:lstStyle/>
@@ -6551,7 +7214,7 @@
           <a:noFill/>
         </p:spPr>
         <p:txBody>
-          <a:bodyPr wrap="square" lIns="45720" rIns="45720" tIns="27432" bIns="27432" anchor="t">
+          <a:bodyPr wrap="square" lIns="45720" tIns="27432" rIns="45720" bIns="27432" anchor="t">
             <a:spAutoFit/>
           </a:bodyPr>
           <a:lstStyle/>
@@ -6595,7 +7258,7 @@
           <a:noFill/>
         </p:spPr>
         <p:txBody>
-          <a:bodyPr wrap="square" lIns="45720" rIns="45720" tIns="27432" bIns="27432" anchor="t">
+          <a:bodyPr wrap="square" lIns="45720" tIns="27432" rIns="45720" bIns="27432" anchor="t">
             <a:spAutoFit/>
           </a:bodyPr>
           <a:lstStyle/>
@@ -6622,7 +7285,7 @@
 </file>
 
 <file path=ppt/slides/slide11.xml><?xml version="1.0" encoding="utf-8"?>
-<p:sld xmlns:a="http://schemas.openxmlformats.org/drawingml/2006/main" xmlns:p="http://schemas.openxmlformats.org/presentationml/2006/main" xmlns:r="http://schemas.openxmlformats.org/officeDocument/2006/relationships">
+<p:sld xmlns:a="http://schemas.openxmlformats.org/drawingml/2006/main" xmlns:r="http://schemas.openxmlformats.org/officeDocument/2006/relationships" xmlns:p="http://schemas.openxmlformats.org/presentationml/2006/main">
   <p:cSld>
     <p:bg>
       <p:bgPr>
@@ -6638,7 +7301,14 @@
         <p:cNvGrpSpPr/>
         <p:nvPr/>
       </p:nvGrpSpPr>
-      <p:grpSpPr/>
+      <p:grpSpPr>
+        <a:xfrm>
+          <a:off x="0" y="0"/>
+          <a:ext cx="0" cy="0"/>
+          <a:chOff x="0" y="0"/>
+          <a:chExt cx="0" cy="0"/>
+        </a:xfrm>
+      </p:grpSpPr>
       <p:sp>
         <p:nvSpPr>
           <p:cNvPr id="2" name="Rounded Rectangle 1"/>
@@ -6678,7 +7348,7 @@
           </a:fontRef>
         </p:style>
         <p:txBody>
-          <a:bodyPr rtlCol="0" anchor="ctr" wrap="square" lIns="45720" rIns="45720" tIns="27432" bIns="27432"/>
+          <a:bodyPr wrap="square" lIns="45720" tIns="27432" rIns="45720" bIns="27432" rtlCol="0" anchor="ctr"/>
           <a:lstStyle/>
           <a:p>
             <a:pPr algn="ctr"/>
@@ -6711,7 +7381,7 @@
           <a:noFill/>
         </p:spPr>
         <p:txBody>
-          <a:bodyPr wrap="square" lIns="45720" rIns="45720" tIns="27432" bIns="27432" anchor="t">
+          <a:bodyPr wrap="square" lIns="45720" tIns="27432" rIns="45720" bIns="27432" anchor="t">
             <a:spAutoFit/>
           </a:bodyPr>
           <a:lstStyle/>
@@ -6746,7 +7416,7 @@
           <a:noFill/>
         </p:spPr>
         <p:txBody>
-          <a:bodyPr wrap="square" lIns="45720" rIns="45720" tIns="27432" bIns="27432" anchor="t">
+          <a:bodyPr wrap="square" lIns="45720" tIns="27432" rIns="45720" bIns="27432" anchor="t">
             <a:spAutoFit/>
           </a:bodyPr>
           <a:lstStyle/>
@@ -6783,14 +7453,32 @@
                 <a:tableStyleId>{5C22544A-7EE6-4342-B048-85BDC9FD1C3A}</a:tableStyleId>
               </a:tblPr>
               <a:tblGrid>
-                <a:gridCol w="1554480"/>
-                <a:gridCol w="2286000"/>
-                <a:gridCol w="1737360"/>
+                <a:gridCol w="1554480">
+                  <a:extLst>
+                    <a:ext uri="{9D8B030D-6E8A-4147-A177-3AD203B41FA5}">
+                      <a16:colId xmlns:a16="http://schemas.microsoft.com/office/drawing/2014/main" val="20000"/>
+                    </a:ext>
+                  </a:extLst>
+                </a:gridCol>
+                <a:gridCol w="2286000">
+                  <a:extLst>
+                    <a:ext uri="{9D8B030D-6E8A-4147-A177-3AD203B41FA5}">
+                      <a16:colId xmlns:a16="http://schemas.microsoft.com/office/drawing/2014/main" val="20001"/>
+                    </a:ext>
+                  </a:extLst>
+                </a:gridCol>
+                <a:gridCol w="1737360">
+                  <a:extLst>
+                    <a:ext uri="{9D8B030D-6E8A-4147-A177-3AD203B41FA5}">
+                      <a16:colId xmlns:a16="http://schemas.microsoft.com/office/drawing/2014/main" val="20002"/>
+                    </a:ext>
+                  </a:extLst>
+                </a:gridCol>
               </a:tblGrid>
               <a:tr h="566928">
                 <a:tc>
                   <a:txBody>
-                    <a:bodyPr wrap="square"/>
+                    <a:bodyPr/>
                     <a:lstStyle/>
                     <a:p>
                       <a:r>
@@ -6812,7 +7500,7 @@
                 </a:tc>
                 <a:tc>
                   <a:txBody>
-                    <a:bodyPr wrap="square"/>
+                    <a:bodyPr/>
                     <a:lstStyle/>
                     <a:p>
                       <a:r>
@@ -6834,7 +7522,7 @@
                 </a:tc>
                 <a:tc>
                   <a:txBody>
-                    <a:bodyPr wrap="square"/>
+                    <a:bodyPr/>
                     <a:lstStyle/>
                     <a:p>
                       <a:r>
@@ -6854,11 +7542,16 @@
                     </a:solidFill>
                   </a:tcPr>
                 </a:tc>
+                <a:extLst>
+                  <a:ext uri="{0D108BD9-81ED-4DB2-BD59-A6C34878D82A}">
+                    <a16:rowId xmlns:a16="http://schemas.microsoft.com/office/drawing/2014/main" val="10000"/>
+                  </a:ext>
+                </a:extLst>
               </a:tr>
               <a:tr h="566928">
                 <a:tc>
                   <a:txBody>
-                    <a:bodyPr wrap="square"/>
+                    <a:bodyPr/>
                     <a:lstStyle/>
                     <a:p>
                       <a:r>
@@ -6880,7 +7573,7 @@
                 </a:tc>
                 <a:tc>
                   <a:txBody>
-                    <a:bodyPr wrap="square"/>
+                    <a:bodyPr/>
                     <a:lstStyle/>
                     <a:p>
                       <a:r>
@@ -6902,7 +7595,7 @@
                 </a:tc>
                 <a:tc>
                   <a:txBody>
-                    <a:bodyPr wrap="square"/>
+                    <a:bodyPr/>
                     <a:lstStyle/>
                     <a:p>
                       <a:r>
@@ -6922,11 +7615,16 @@
                     </a:solidFill>
                   </a:tcPr>
                 </a:tc>
+                <a:extLst>
+                  <a:ext uri="{0D108BD9-81ED-4DB2-BD59-A6C34878D82A}">
+                    <a16:rowId xmlns:a16="http://schemas.microsoft.com/office/drawing/2014/main" val="10001"/>
+                  </a:ext>
+                </a:extLst>
               </a:tr>
               <a:tr h="566928">
                 <a:tc>
                   <a:txBody>
-                    <a:bodyPr wrap="square"/>
+                    <a:bodyPr/>
                     <a:lstStyle/>
                     <a:p>
                       <a:r>
@@ -6948,7 +7646,7 @@
                 </a:tc>
                 <a:tc>
                   <a:txBody>
-                    <a:bodyPr wrap="square"/>
+                    <a:bodyPr/>
                     <a:lstStyle/>
                     <a:p>
                       <a:r>
@@ -6970,7 +7668,7 @@
                 </a:tc>
                 <a:tc>
                   <a:txBody>
-                    <a:bodyPr wrap="square"/>
+                    <a:bodyPr/>
                     <a:lstStyle/>
                     <a:p>
                       <a:r>
@@ -6990,11 +7688,16 @@
                     </a:solidFill>
                   </a:tcPr>
                 </a:tc>
+                <a:extLst>
+                  <a:ext uri="{0D108BD9-81ED-4DB2-BD59-A6C34878D82A}">
+                    <a16:rowId xmlns:a16="http://schemas.microsoft.com/office/drawing/2014/main" val="10002"/>
+                  </a:ext>
+                </a:extLst>
               </a:tr>
               <a:tr h="566928">
                 <a:tc>
                   <a:txBody>
-                    <a:bodyPr wrap="square"/>
+                    <a:bodyPr/>
                     <a:lstStyle/>
                     <a:p>
                       <a:r>
@@ -7016,7 +7719,7 @@
                 </a:tc>
                 <a:tc>
                   <a:txBody>
-                    <a:bodyPr wrap="square"/>
+                    <a:bodyPr/>
                     <a:lstStyle/>
                     <a:p>
                       <a:r>
@@ -7038,7 +7741,7 @@
                 </a:tc>
                 <a:tc>
                   <a:txBody>
-                    <a:bodyPr wrap="square"/>
+                    <a:bodyPr/>
                     <a:lstStyle/>
                     <a:p>
                       <a:r>
@@ -7058,11 +7761,16 @@
                     </a:solidFill>
                   </a:tcPr>
                 </a:tc>
+                <a:extLst>
+                  <a:ext uri="{0D108BD9-81ED-4DB2-BD59-A6C34878D82A}">
+                    <a16:rowId xmlns:a16="http://schemas.microsoft.com/office/drawing/2014/main" val="10003"/>
+                  </a:ext>
+                </a:extLst>
               </a:tr>
               <a:tr h="566928">
                 <a:tc>
                   <a:txBody>
-                    <a:bodyPr wrap="square"/>
+                    <a:bodyPr/>
                     <a:lstStyle/>
                     <a:p>
                       <a:r>
@@ -7084,7 +7792,7 @@
                 </a:tc>
                 <a:tc>
                   <a:txBody>
-                    <a:bodyPr wrap="square"/>
+                    <a:bodyPr/>
                     <a:lstStyle/>
                     <a:p>
                       <a:r>
@@ -7106,7 +7814,7 @@
                 </a:tc>
                 <a:tc>
                   <a:txBody>
-                    <a:bodyPr wrap="square"/>
+                    <a:bodyPr/>
                     <a:lstStyle/>
                     <a:p>
                       <a:r>
@@ -7126,11 +7834,16 @@
                     </a:solidFill>
                   </a:tcPr>
                 </a:tc>
+                <a:extLst>
+                  <a:ext uri="{0D108BD9-81ED-4DB2-BD59-A6C34878D82A}">
+                    <a16:rowId xmlns:a16="http://schemas.microsoft.com/office/drawing/2014/main" val="10004"/>
+                  </a:ext>
+                </a:extLst>
               </a:tr>
               <a:tr h="566928">
                 <a:tc>
                   <a:txBody>
-                    <a:bodyPr wrap="square"/>
+                    <a:bodyPr/>
                     <a:lstStyle/>
                     <a:p>
                       <a:r>
@@ -7152,7 +7865,7 @@
                 </a:tc>
                 <a:tc>
                   <a:txBody>
-                    <a:bodyPr wrap="square"/>
+                    <a:bodyPr/>
                     <a:lstStyle/>
                     <a:p>
                       <a:r>
@@ -7174,7 +7887,7 @@
                 </a:tc>
                 <a:tc>
                   <a:txBody>
-                    <a:bodyPr wrap="square"/>
+                    <a:bodyPr/>
                     <a:lstStyle/>
                     <a:p>
                       <a:r>
@@ -7194,6 +7907,11 @@
                     </a:solidFill>
                   </a:tcPr>
                 </a:tc>
+                <a:extLst>
+                  <a:ext uri="{0D108BD9-81ED-4DB2-BD59-A6C34878D82A}">
+                    <a16:rowId xmlns:a16="http://schemas.microsoft.com/office/drawing/2014/main" val="10005"/>
+                  </a:ext>
+                </a:extLst>
               </a:tr>
             </a:tbl>
           </a:graphicData>
@@ -7218,13 +7936,25 @@
                 <a:tableStyleId>{5C22544A-7EE6-4342-B048-85BDC9FD1C3A}</a:tableStyleId>
               </a:tblPr>
               <a:tblGrid>
-                <a:gridCol w="3246120"/>
-                <a:gridCol w="1920240"/>
+                <a:gridCol w="3246120">
+                  <a:extLst>
+                    <a:ext uri="{9D8B030D-6E8A-4147-A177-3AD203B41FA5}">
+                      <a16:colId xmlns:a16="http://schemas.microsoft.com/office/drawing/2014/main" val="20000"/>
+                    </a:ext>
+                  </a:extLst>
+                </a:gridCol>
+                <a:gridCol w="1920240">
+                  <a:extLst>
+                    <a:ext uri="{9D8B030D-6E8A-4147-A177-3AD203B41FA5}">
+                      <a16:colId xmlns:a16="http://schemas.microsoft.com/office/drawing/2014/main" val="20001"/>
+                    </a:ext>
+                  </a:extLst>
+                </a:gridCol>
               </a:tblGrid>
               <a:tr h="566928">
                 <a:tc>
                   <a:txBody>
-                    <a:bodyPr wrap="square"/>
+                    <a:bodyPr/>
                     <a:lstStyle/>
                     <a:p>
                       <a:r>
@@ -7246,7 +7976,7 @@
                 </a:tc>
                 <a:tc>
                   <a:txBody>
-                    <a:bodyPr wrap="square"/>
+                    <a:bodyPr/>
                     <a:lstStyle/>
                     <a:p>
                       <a:r>
@@ -7266,11 +7996,16 @@
                     </a:solidFill>
                   </a:tcPr>
                 </a:tc>
+                <a:extLst>
+                  <a:ext uri="{0D108BD9-81ED-4DB2-BD59-A6C34878D82A}">
+                    <a16:rowId xmlns:a16="http://schemas.microsoft.com/office/drawing/2014/main" val="10000"/>
+                  </a:ext>
+                </a:extLst>
               </a:tr>
               <a:tr h="566928">
                 <a:tc>
                   <a:txBody>
-                    <a:bodyPr wrap="square"/>
+                    <a:bodyPr/>
                     <a:lstStyle/>
                     <a:p>
                       <a:r>
@@ -7292,7 +8027,7 @@
                 </a:tc>
                 <a:tc>
                   <a:txBody>
-                    <a:bodyPr wrap="square"/>
+                    <a:bodyPr/>
                     <a:lstStyle/>
                     <a:p>
                       <a:r>
@@ -7312,11 +8047,16 @@
                     </a:solidFill>
                   </a:tcPr>
                 </a:tc>
+                <a:extLst>
+                  <a:ext uri="{0D108BD9-81ED-4DB2-BD59-A6C34878D82A}">
+                    <a16:rowId xmlns:a16="http://schemas.microsoft.com/office/drawing/2014/main" val="10001"/>
+                  </a:ext>
+                </a:extLst>
               </a:tr>
               <a:tr h="566928">
                 <a:tc>
                   <a:txBody>
-                    <a:bodyPr wrap="square"/>
+                    <a:bodyPr/>
                     <a:lstStyle/>
                     <a:p>
                       <a:r>
@@ -7338,7 +8078,7 @@
                 </a:tc>
                 <a:tc>
                   <a:txBody>
-                    <a:bodyPr wrap="square"/>
+                    <a:bodyPr/>
                     <a:lstStyle/>
                     <a:p>
                       <a:r>
@@ -7358,11 +8098,16 @@
                     </a:solidFill>
                   </a:tcPr>
                 </a:tc>
+                <a:extLst>
+                  <a:ext uri="{0D108BD9-81ED-4DB2-BD59-A6C34878D82A}">
+                    <a16:rowId xmlns:a16="http://schemas.microsoft.com/office/drawing/2014/main" val="10002"/>
+                  </a:ext>
+                </a:extLst>
               </a:tr>
               <a:tr h="566928">
                 <a:tc>
                   <a:txBody>
-                    <a:bodyPr wrap="square"/>
+                    <a:bodyPr/>
                     <a:lstStyle/>
                     <a:p>
                       <a:r>
@@ -7384,7 +8129,7 @@
                 </a:tc>
                 <a:tc>
                   <a:txBody>
-                    <a:bodyPr wrap="square"/>
+                    <a:bodyPr/>
                     <a:lstStyle/>
                     <a:p>
                       <a:r>
@@ -7404,6 +8149,11 @@
                     </a:solidFill>
                   </a:tcPr>
                 </a:tc>
+                <a:extLst>
+                  <a:ext uri="{0D108BD9-81ED-4DB2-BD59-A6C34878D82A}">
+                    <a16:rowId xmlns:a16="http://schemas.microsoft.com/office/drawing/2014/main" val="10003"/>
+                  </a:ext>
+                </a:extLst>
               </a:tr>
             </a:tbl>
           </a:graphicData>
@@ -7452,6 +8202,7 @@
           <a:lstStyle/>
           <a:p>
             <a:pPr algn="ctr"/>
+            <a:endParaRPr/>
           </a:p>
         </p:txBody>
       </p:sp>
@@ -7472,7 +8223,7 @@
           <a:noFill/>
         </p:spPr>
         <p:txBody>
-          <a:bodyPr wrap="square" lIns="45720" rIns="45720" tIns="27432" bIns="27432" anchor="ctr">
+          <a:bodyPr wrap="square" lIns="45720" tIns="27432" rIns="45720" bIns="27432" anchor="ctr">
             <a:spAutoFit/>
           </a:bodyPr>
           <a:lstStyle/>
@@ -7516,7 +8267,7 @@
           <a:noFill/>
         </p:spPr>
         <p:txBody>
-          <a:bodyPr wrap="square" lIns="45720" rIns="45720" tIns="27432" bIns="27432" anchor="t">
+          <a:bodyPr wrap="square" lIns="45720" tIns="27432" rIns="45720" bIns="27432" anchor="t">
             <a:spAutoFit/>
           </a:bodyPr>
           <a:lstStyle/>
@@ -7543,7 +8294,7 @@
 </file>
 
 <file path=ppt/slides/slide12.xml><?xml version="1.0" encoding="utf-8"?>
-<p:sld xmlns:a="http://schemas.openxmlformats.org/drawingml/2006/main" xmlns:p="http://schemas.openxmlformats.org/presentationml/2006/main" xmlns:r="http://schemas.openxmlformats.org/officeDocument/2006/relationships">
+<p:sld xmlns:a="http://schemas.openxmlformats.org/drawingml/2006/main" xmlns:r="http://schemas.openxmlformats.org/officeDocument/2006/relationships" xmlns:p="http://schemas.openxmlformats.org/presentationml/2006/main">
   <p:cSld>
     <p:bg>
       <p:bgPr>
@@ -7559,7 +8310,14 @@
         <p:cNvGrpSpPr/>
         <p:nvPr/>
       </p:nvGrpSpPr>
-      <p:grpSpPr/>
+      <p:grpSpPr>
+        <a:xfrm>
+          <a:off x="0" y="0"/>
+          <a:ext cx="0" cy="0"/>
+          <a:chOff x="0" y="0"/>
+          <a:chExt cx="0" cy="0"/>
+        </a:xfrm>
+      </p:grpSpPr>
       <p:sp>
         <p:nvSpPr>
           <p:cNvPr id="2" name="Rounded Rectangle 1"/>
@@ -7599,7 +8357,7 @@
           </a:fontRef>
         </p:style>
         <p:txBody>
-          <a:bodyPr rtlCol="0" anchor="ctr" wrap="square" lIns="45720" rIns="45720" tIns="27432" bIns="27432"/>
+          <a:bodyPr wrap="square" lIns="45720" tIns="27432" rIns="45720" bIns="27432" rtlCol="0" anchor="ctr"/>
           <a:lstStyle/>
           <a:p>
             <a:pPr algn="ctr"/>
@@ -7632,7 +8390,7 @@
           <a:noFill/>
         </p:spPr>
         <p:txBody>
-          <a:bodyPr wrap="square" lIns="45720" rIns="45720" tIns="27432" bIns="27432" anchor="t">
+          <a:bodyPr wrap="square" lIns="45720" tIns="27432" rIns="45720" bIns="27432" anchor="t">
             <a:spAutoFit/>
           </a:bodyPr>
           <a:lstStyle/>
@@ -7667,7 +8425,7 @@
           <a:noFill/>
         </p:spPr>
         <p:txBody>
-          <a:bodyPr wrap="square" lIns="45720" rIns="45720" tIns="27432" bIns="27432" anchor="t">
+          <a:bodyPr wrap="square" lIns="45720" tIns="27432" rIns="45720" bIns="27432" anchor="t">
             <a:spAutoFit/>
           </a:bodyPr>
           <a:lstStyle/>
@@ -7722,7 +8480,7 @@
           </a:fontRef>
         </p:style>
         <p:txBody>
-          <a:bodyPr rtlCol="0" anchor="ctr" wrap="square" lIns="45720" rIns="45720" tIns="27432" bIns="27432"/>
+          <a:bodyPr wrap="square" lIns="45720" tIns="27432" rIns="45720" bIns="27432" rtlCol="0" anchor="ctr"/>
           <a:lstStyle/>
           <a:p>
             <a:pPr algn="ctr"/>
@@ -7755,7 +8513,7 @@
           <a:noFill/>
         </p:spPr>
         <p:txBody>
-          <a:bodyPr wrap="square" lIns="45720" rIns="45720" tIns="27432" bIns="27432" anchor="t">
+          <a:bodyPr wrap="square" lIns="45720" tIns="27432" rIns="45720" bIns="27432" anchor="t">
             <a:spAutoFit/>
           </a:bodyPr>
           <a:lstStyle/>
@@ -7790,7 +8548,7 @@
           <a:noFill/>
         </p:spPr>
         <p:txBody>
-          <a:bodyPr wrap="square" lIns="45720" rIns="45720" tIns="27432" bIns="27432" anchor="t">
+          <a:bodyPr wrap="square" lIns="45720" tIns="27432" rIns="45720" bIns="27432" anchor="t">
             <a:spAutoFit/>
           </a:bodyPr>
           <a:lstStyle/>
@@ -7845,7 +8603,7 @@
           </a:fontRef>
         </p:style>
         <p:txBody>
-          <a:bodyPr rtlCol="0" anchor="ctr" wrap="square" lIns="45720" rIns="45720" tIns="27432" bIns="27432"/>
+          <a:bodyPr wrap="square" lIns="45720" tIns="27432" rIns="45720" bIns="27432" rtlCol="0" anchor="ctr"/>
           <a:lstStyle/>
           <a:p>
             <a:pPr algn="ctr"/>
@@ -7878,7 +8636,7 @@
           <a:noFill/>
         </p:spPr>
         <p:txBody>
-          <a:bodyPr wrap="square" lIns="45720" rIns="45720" tIns="27432" bIns="27432" anchor="t">
+          <a:bodyPr wrap="square" lIns="45720" tIns="27432" rIns="45720" bIns="27432" anchor="t">
             <a:spAutoFit/>
           </a:bodyPr>
           <a:lstStyle/>
@@ -7913,7 +8671,7 @@
           <a:noFill/>
         </p:spPr>
         <p:txBody>
-          <a:bodyPr wrap="square" lIns="45720" rIns="45720" tIns="27432" bIns="27432" anchor="t">
+          <a:bodyPr wrap="square" lIns="45720" tIns="27432" rIns="45720" bIns="27432" anchor="t">
             <a:spAutoFit/>
           </a:bodyPr>
           <a:lstStyle/>
@@ -7968,7 +8726,7 @@
           </a:fontRef>
         </p:style>
         <p:txBody>
-          <a:bodyPr rtlCol="0" anchor="ctr" wrap="square" lIns="45720" rIns="45720" tIns="27432" bIns="27432"/>
+          <a:bodyPr wrap="square" lIns="45720" tIns="27432" rIns="45720" bIns="27432" rtlCol="0" anchor="ctr"/>
           <a:lstStyle/>
           <a:p>
             <a:pPr algn="ctr"/>
@@ -8001,7 +8759,7 @@
           <a:noFill/>
         </p:spPr>
         <p:txBody>
-          <a:bodyPr wrap="square" lIns="45720" rIns="45720" tIns="27432" bIns="27432" anchor="t">
+          <a:bodyPr wrap="square" lIns="45720" tIns="27432" rIns="45720" bIns="27432" anchor="t">
             <a:spAutoFit/>
           </a:bodyPr>
           <a:lstStyle/>
@@ -8036,7 +8794,7 @@
           <a:noFill/>
         </p:spPr>
         <p:txBody>
-          <a:bodyPr wrap="square" lIns="45720" rIns="45720" tIns="27432" bIns="27432" anchor="t">
+          <a:bodyPr wrap="square" lIns="45720" tIns="27432" rIns="45720" bIns="27432" anchor="t">
             <a:spAutoFit/>
           </a:bodyPr>
           <a:lstStyle/>
@@ -8091,7 +8849,7 @@
           </a:fontRef>
         </p:style>
         <p:txBody>
-          <a:bodyPr rtlCol="0" anchor="ctr" wrap="square" lIns="45720" rIns="45720" tIns="27432" bIns="27432"/>
+          <a:bodyPr wrap="square" lIns="45720" tIns="27432" rIns="45720" bIns="27432" rtlCol="0" anchor="ctr"/>
           <a:lstStyle/>
           <a:p>
             <a:pPr algn="ctr"/>
@@ -8124,7 +8882,7 @@
           <a:noFill/>
         </p:spPr>
         <p:txBody>
-          <a:bodyPr wrap="square" lIns="45720" rIns="45720" tIns="27432" bIns="27432" anchor="t">
+          <a:bodyPr wrap="square" lIns="45720" tIns="27432" rIns="45720" bIns="27432" anchor="t">
             <a:spAutoFit/>
           </a:bodyPr>
           <a:lstStyle/>
@@ -8159,7 +8917,7 @@
           <a:noFill/>
         </p:spPr>
         <p:txBody>
-          <a:bodyPr wrap="square" lIns="45720" rIns="45720" tIns="27432" bIns="27432" anchor="t">
+          <a:bodyPr wrap="square" lIns="45720" tIns="27432" rIns="45720" bIns="27432" anchor="t">
             <a:spAutoFit/>
           </a:bodyPr>
           <a:lstStyle/>
@@ -8214,7 +8972,7 @@
           </a:fontRef>
         </p:style>
         <p:txBody>
-          <a:bodyPr rtlCol="0" anchor="ctr" wrap="square" lIns="45720" rIns="45720" tIns="27432" bIns="27432"/>
+          <a:bodyPr wrap="square" lIns="45720" tIns="27432" rIns="45720" bIns="27432" rtlCol="0" anchor="ctr"/>
           <a:lstStyle/>
           <a:p>
             <a:pPr algn="ctr"/>
@@ -8247,7 +9005,7 @@
           <a:noFill/>
         </p:spPr>
         <p:txBody>
-          <a:bodyPr wrap="square" lIns="45720" rIns="45720" tIns="27432" bIns="27432" anchor="t">
+          <a:bodyPr wrap="square" lIns="45720" tIns="27432" rIns="45720" bIns="27432" anchor="t">
             <a:spAutoFit/>
           </a:bodyPr>
           <a:lstStyle/>
@@ -8282,7 +9040,7 @@
           <a:noFill/>
         </p:spPr>
         <p:txBody>
-          <a:bodyPr wrap="square" lIns="45720" rIns="45720" tIns="27432" bIns="27432" anchor="t">
+          <a:bodyPr wrap="square" lIns="45720" tIns="27432" rIns="45720" bIns="27432" anchor="t">
             <a:spAutoFit/>
           </a:bodyPr>
           <a:lstStyle/>
@@ -8317,7 +9075,7 @@
           <a:noFill/>
         </p:spPr>
         <p:txBody>
-          <a:bodyPr wrap="square" lIns="45720" rIns="45720" tIns="27432" bIns="27432" anchor="t">
+          <a:bodyPr wrap="square" lIns="45720" tIns="27432" rIns="45720" bIns="27432" anchor="t">
             <a:spAutoFit/>
           </a:bodyPr>
           <a:lstStyle/>
@@ -8344,7 +9102,7 @@
 </file>
 
 <file path=ppt/slides/slide13.xml><?xml version="1.0" encoding="utf-8"?>
-<p:sld xmlns:a="http://schemas.openxmlformats.org/drawingml/2006/main" xmlns:p="http://schemas.openxmlformats.org/presentationml/2006/main" xmlns:r="http://schemas.openxmlformats.org/officeDocument/2006/relationships">
+<p:sld xmlns:a="http://schemas.openxmlformats.org/drawingml/2006/main" xmlns:r="http://schemas.openxmlformats.org/officeDocument/2006/relationships" xmlns:p="http://schemas.openxmlformats.org/presentationml/2006/main">
   <p:cSld>
     <p:bg>
       <p:bgPr>
@@ -8360,7 +9118,14 @@
         <p:cNvGrpSpPr/>
         <p:nvPr/>
       </p:nvGrpSpPr>
-      <p:grpSpPr/>
+      <p:grpSpPr>
+        <a:xfrm>
+          <a:off x="0" y="0"/>
+          <a:ext cx="0" cy="0"/>
+          <a:chOff x="0" y="0"/>
+          <a:chExt cx="0" cy="0"/>
+        </a:xfrm>
+      </p:grpSpPr>
       <p:sp>
         <p:nvSpPr>
           <p:cNvPr id="2" name="Rounded Rectangle 1"/>
@@ -8400,7 +9165,7 @@
           </a:fontRef>
         </p:style>
         <p:txBody>
-          <a:bodyPr rtlCol="0" anchor="ctr" wrap="square" lIns="45720" rIns="45720" tIns="27432" bIns="27432"/>
+          <a:bodyPr wrap="square" lIns="45720" tIns="27432" rIns="45720" bIns="27432" rtlCol="0" anchor="ctr"/>
           <a:lstStyle/>
           <a:p>
             <a:pPr algn="ctr"/>
@@ -8433,7 +9198,7 @@
           <a:noFill/>
         </p:spPr>
         <p:txBody>
-          <a:bodyPr wrap="square" lIns="45720" rIns="45720" tIns="27432" bIns="27432" anchor="t">
+          <a:bodyPr wrap="square" lIns="45720" tIns="27432" rIns="45720" bIns="27432" anchor="t">
             <a:spAutoFit/>
           </a:bodyPr>
           <a:lstStyle/>
@@ -8468,7 +9233,7 @@
           <a:noFill/>
         </p:spPr>
         <p:txBody>
-          <a:bodyPr wrap="square" lIns="45720" rIns="45720" tIns="27432" bIns="27432" anchor="t">
+          <a:bodyPr wrap="square" lIns="45720" tIns="27432" rIns="45720" bIns="27432" anchor="t">
             <a:spAutoFit/>
           </a:bodyPr>
           <a:lstStyle/>
@@ -8503,7 +9268,7 @@
           <a:noFill/>
         </p:spPr>
         <p:txBody>
-          <a:bodyPr wrap="square" lIns="45720" rIns="45720" tIns="27432" bIns="27432" anchor="t">
+          <a:bodyPr wrap="square" lIns="45720" tIns="27432" rIns="45720" bIns="27432" anchor="t">
             <a:spAutoFit/>
           </a:bodyPr>
           <a:lstStyle/>
@@ -8562,6 +9327,7 @@
           <a:lstStyle/>
           <a:p>
             <a:pPr algn="ctr"/>
+            <a:endParaRPr/>
           </a:p>
         </p:txBody>
       </p:sp>
@@ -8582,7 +9348,7 @@
           <a:noFill/>
         </p:spPr>
         <p:txBody>
-          <a:bodyPr wrap="square" lIns="45720" rIns="45720" tIns="27432" bIns="27432" anchor="t">
+          <a:bodyPr wrap="square" lIns="45720" tIns="27432" rIns="45720" bIns="27432" anchor="t">
             <a:spAutoFit/>
           </a:bodyPr>
           <a:lstStyle/>
@@ -8639,7 +9405,7 @@
           </a:fontRef>
         </p:style>
         <p:txBody>
-          <a:bodyPr rtlCol="0" anchor="ctr" wrap="square" lIns="45720" rIns="45720" tIns="27432" bIns="27432"/>
+          <a:bodyPr wrap="square" lIns="45720" tIns="27432" rIns="45720" bIns="27432" rtlCol="0" anchor="ctr"/>
           <a:lstStyle/>
           <a:p>
             <a:pPr algn="ctr"/>
@@ -8672,7 +9438,7 @@
           <a:noFill/>
         </p:spPr>
         <p:txBody>
-          <a:bodyPr wrap="square" lIns="45720" rIns="45720" tIns="27432" bIns="27432" anchor="t">
+          <a:bodyPr wrap="square" lIns="45720" tIns="27432" rIns="45720" bIns="27432" anchor="t">
             <a:spAutoFit/>
           </a:bodyPr>
           <a:lstStyle/>
@@ -8731,6 +9497,7 @@
           <a:lstStyle/>
           <a:p>
             <a:pPr algn="ctr"/>
+            <a:endParaRPr/>
           </a:p>
         </p:txBody>
       </p:sp>
@@ -8751,7 +9518,7 @@
           <a:noFill/>
         </p:spPr>
         <p:txBody>
-          <a:bodyPr wrap="square" lIns="45720" rIns="45720" tIns="27432" bIns="27432" anchor="t">
+          <a:bodyPr wrap="square" lIns="45720" tIns="27432" rIns="45720" bIns="27432" anchor="t">
             <a:spAutoFit/>
           </a:bodyPr>
           <a:lstStyle/>
@@ -8808,7 +9575,7 @@
           </a:fontRef>
         </p:style>
         <p:txBody>
-          <a:bodyPr rtlCol="0" anchor="ctr" wrap="square" lIns="45720" rIns="45720" tIns="27432" bIns="27432"/>
+          <a:bodyPr wrap="square" lIns="45720" tIns="27432" rIns="45720" bIns="27432" rtlCol="0" anchor="ctr"/>
           <a:lstStyle/>
           <a:p>
             <a:pPr algn="ctr"/>
@@ -8841,7 +9608,7 @@
           <a:noFill/>
         </p:spPr>
         <p:txBody>
-          <a:bodyPr wrap="square" lIns="45720" rIns="45720" tIns="27432" bIns="27432" anchor="t">
+          <a:bodyPr wrap="square" lIns="45720" tIns="27432" rIns="45720" bIns="27432" anchor="t">
             <a:spAutoFit/>
           </a:bodyPr>
           <a:lstStyle/>
@@ -8900,6 +9667,7 @@
           <a:lstStyle/>
           <a:p>
             <a:pPr algn="ctr"/>
+            <a:endParaRPr/>
           </a:p>
         </p:txBody>
       </p:sp>
@@ -8920,7 +9688,7 @@
           <a:noFill/>
         </p:spPr>
         <p:txBody>
-          <a:bodyPr wrap="square" lIns="45720" rIns="45720" tIns="27432" bIns="27432" anchor="t">
+          <a:bodyPr wrap="square" lIns="45720" tIns="27432" rIns="45720" bIns="27432" anchor="t">
             <a:spAutoFit/>
           </a:bodyPr>
           <a:lstStyle/>
@@ -8977,7 +9745,7 @@
           </a:fontRef>
         </p:style>
         <p:txBody>
-          <a:bodyPr rtlCol="0" anchor="ctr" wrap="square" lIns="45720" rIns="45720" tIns="27432" bIns="27432"/>
+          <a:bodyPr wrap="square" lIns="45720" tIns="27432" rIns="45720" bIns="27432" rtlCol="0" anchor="ctr"/>
           <a:lstStyle/>
           <a:p>
             <a:pPr algn="ctr"/>
@@ -9010,7 +9778,7 @@
           <a:noFill/>
         </p:spPr>
         <p:txBody>
-          <a:bodyPr wrap="square" lIns="45720" rIns="45720" tIns="27432" bIns="27432" anchor="t">
+          <a:bodyPr wrap="square" lIns="45720" tIns="27432" rIns="45720" bIns="27432" anchor="t">
             <a:spAutoFit/>
           </a:bodyPr>
           <a:lstStyle/>
@@ -9069,6 +9837,7 @@
           <a:lstStyle/>
           <a:p>
             <a:pPr algn="ctr"/>
+            <a:endParaRPr/>
           </a:p>
         </p:txBody>
       </p:sp>
@@ -9089,7 +9858,7 @@
           <a:noFill/>
         </p:spPr>
         <p:txBody>
-          <a:bodyPr wrap="square" lIns="45720" rIns="45720" tIns="27432" bIns="27432" anchor="t">
+          <a:bodyPr wrap="square" lIns="45720" tIns="27432" rIns="45720" bIns="27432" anchor="t">
             <a:spAutoFit/>
           </a:bodyPr>
           <a:lstStyle/>
@@ -9146,7 +9915,7 @@
           </a:fontRef>
         </p:style>
         <p:txBody>
-          <a:bodyPr rtlCol="0" anchor="ctr" wrap="square" lIns="45720" rIns="45720" tIns="27432" bIns="27432"/>
+          <a:bodyPr wrap="square" lIns="45720" tIns="27432" rIns="45720" bIns="27432" rtlCol="0" anchor="ctr"/>
           <a:lstStyle/>
           <a:p>
             <a:pPr algn="ctr"/>
@@ -9179,7 +9948,7 @@
           <a:noFill/>
         </p:spPr>
         <p:txBody>
-          <a:bodyPr wrap="square" lIns="45720" rIns="45720" tIns="27432" bIns="27432" anchor="t">
+          <a:bodyPr wrap="square" lIns="45720" tIns="27432" rIns="45720" bIns="27432" anchor="t">
             <a:spAutoFit/>
           </a:bodyPr>
           <a:lstStyle/>
@@ -9238,6 +10007,7 @@
           <a:lstStyle/>
           <a:p>
             <a:pPr algn="ctr"/>
+            <a:endParaRPr/>
           </a:p>
         </p:txBody>
       </p:sp>
@@ -9258,7 +10028,7 @@
           <a:noFill/>
         </p:spPr>
         <p:txBody>
-          <a:bodyPr wrap="square" lIns="45720" rIns="45720" tIns="27432" bIns="27432" anchor="t">
+          <a:bodyPr wrap="square" lIns="45720" tIns="27432" rIns="45720" bIns="27432" anchor="t">
             <a:spAutoFit/>
           </a:bodyPr>
           <a:lstStyle/>
@@ -9315,7 +10085,7 @@
           </a:fontRef>
         </p:style>
         <p:txBody>
-          <a:bodyPr rtlCol="0" anchor="ctr" wrap="square" lIns="45720" rIns="45720" tIns="27432" bIns="27432"/>
+          <a:bodyPr wrap="square" lIns="45720" tIns="27432" rIns="45720" bIns="27432" rtlCol="0" anchor="ctr"/>
           <a:lstStyle/>
           <a:p>
             <a:pPr algn="ctr"/>
@@ -9348,7 +10118,7 @@
           <a:noFill/>
         </p:spPr>
         <p:txBody>
-          <a:bodyPr wrap="square" lIns="45720" rIns="45720" tIns="27432" bIns="27432" anchor="t">
+          <a:bodyPr wrap="square" lIns="45720" tIns="27432" rIns="45720" bIns="27432" anchor="t">
             <a:spAutoFit/>
           </a:bodyPr>
           <a:lstStyle/>
@@ -9407,6 +10177,7 @@
           <a:lstStyle/>
           <a:p>
             <a:pPr algn="ctr"/>
+            <a:endParaRPr/>
           </a:p>
         </p:txBody>
       </p:sp>
@@ -9427,7 +10198,7 @@
           <a:noFill/>
         </p:spPr>
         <p:txBody>
-          <a:bodyPr wrap="square" lIns="45720" rIns="45720" tIns="27432" bIns="27432" anchor="t">
+          <a:bodyPr wrap="square" lIns="45720" tIns="27432" rIns="45720" bIns="27432" anchor="t">
             <a:spAutoFit/>
           </a:bodyPr>
           <a:lstStyle/>
@@ -9484,7 +10255,7 @@
           </a:fontRef>
         </p:style>
         <p:txBody>
-          <a:bodyPr rtlCol="0" anchor="ctr" wrap="square" lIns="45720" rIns="45720" tIns="27432" bIns="27432"/>
+          <a:bodyPr wrap="square" lIns="45720" tIns="27432" rIns="45720" bIns="27432" rtlCol="0" anchor="ctr"/>
           <a:lstStyle/>
           <a:p>
             <a:pPr algn="ctr"/>
@@ -9552,7 +10323,7 @@
           <a:noFill/>
         </p:spPr>
         <p:txBody>
-          <a:bodyPr wrap="square" lIns="45720" rIns="45720" tIns="27432" bIns="27432" anchor="t">
+          <a:bodyPr wrap="square" lIns="45720" tIns="27432" rIns="45720" bIns="27432" anchor="t">
             <a:spAutoFit/>
           </a:bodyPr>
           <a:lstStyle/>
@@ -9579,7 +10350,7 @@
 </file>
 
 <file path=ppt/slides/slide14.xml><?xml version="1.0" encoding="utf-8"?>
-<p:sld xmlns:a="http://schemas.openxmlformats.org/drawingml/2006/main" xmlns:p="http://schemas.openxmlformats.org/presentationml/2006/main" xmlns:r="http://schemas.openxmlformats.org/officeDocument/2006/relationships">
+<p:sld xmlns:a="http://schemas.openxmlformats.org/drawingml/2006/main" xmlns:r="http://schemas.openxmlformats.org/officeDocument/2006/relationships" xmlns:p="http://schemas.openxmlformats.org/presentationml/2006/main">
   <p:cSld>
     <p:bg>
       <p:bgPr>
@@ -9595,7 +10366,14 @@
         <p:cNvGrpSpPr/>
         <p:nvPr/>
       </p:nvGrpSpPr>
-      <p:grpSpPr/>
+      <p:grpSpPr>
+        <a:xfrm>
+          <a:off x="0" y="0"/>
+          <a:ext cx="0" cy="0"/>
+          <a:chOff x="0" y="0"/>
+          <a:chExt cx="0" cy="0"/>
+        </a:xfrm>
+      </p:grpSpPr>
       <p:sp>
         <p:nvSpPr>
           <p:cNvPr id="2" name="Rounded Rectangle 1"/>
@@ -9635,7 +10413,7 @@
           </a:fontRef>
         </p:style>
         <p:txBody>
-          <a:bodyPr rtlCol="0" anchor="ctr" wrap="square" lIns="45720" rIns="45720" tIns="27432" bIns="27432"/>
+          <a:bodyPr wrap="square" lIns="45720" tIns="27432" rIns="45720" bIns="27432" rtlCol="0" anchor="ctr"/>
           <a:lstStyle/>
           <a:p>
             <a:pPr algn="ctr"/>
@@ -9668,7 +10446,7 @@
           <a:noFill/>
         </p:spPr>
         <p:txBody>
-          <a:bodyPr wrap="square" lIns="45720" rIns="45720" tIns="27432" bIns="27432" anchor="t">
+          <a:bodyPr wrap="square" lIns="45720" tIns="27432" rIns="45720" bIns="27432" anchor="t">
             <a:spAutoFit/>
           </a:bodyPr>
           <a:lstStyle/>
@@ -9703,7 +10481,7 @@
           <a:noFill/>
         </p:spPr>
         <p:txBody>
-          <a:bodyPr wrap="square" lIns="45720" rIns="45720" tIns="27432" bIns="27432" anchor="t">
+          <a:bodyPr wrap="square" lIns="45720" tIns="27432" rIns="45720" bIns="27432" anchor="t">
             <a:spAutoFit/>
           </a:bodyPr>
           <a:lstStyle/>
@@ -9740,14 +10518,32 @@
                 <a:tableStyleId>{5C22544A-7EE6-4342-B048-85BDC9FD1C3A}</a:tableStyleId>
               </a:tblPr>
               <a:tblGrid>
-                <a:gridCol w="4572000"/>
-                <a:gridCol w="4754880"/>
-                <a:gridCol w="1737360"/>
+                <a:gridCol w="4572000">
+                  <a:extLst>
+                    <a:ext uri="{9D8B030D-6E8A-4147-A177-3AD203B41FA5}">
+                      <a16:colId xmlns:a16="http://schemas.microsoft.com/office/drawing/2014/main" val="20000"/>
+                    </a:ext>
+                  </a:extLst>
+                </a:gridCol>
+                <a:gridCol w="4754880">
+                  <a:extLst>
+                    <a:ext uri="{9D8B030D-6E8A-4147-A177-3AD203B41FA5}">
+                      <a16:colId xmlns:a16="http://schemas.microsoft.com/office/drawing/2014/main" val="20001"/>
+                    </a:ext>
+                  </a:extLst>
+                </a:gridCol>
+                <a:gridCol w="1737360">
+                  <a:extLst>
+                    <a:ext uri="{9D8B030D-6E8A-4147-A177-3AD203B41FA5}">
+                      <a16:colId xmlns:a16="http://schemas.microsoft.com/office/drawing/2014/main" val="20002"/>
+                    </a:ext>
+                  </a:extLst>
+                </a:gridCol>
               </a:tblGrid>
               <a:tr h="731520">
                 <a:tc>
                   <a:txBody>
-                    <a:bodyPr wrap="square"/>
+                    <a:bodyPr/>
                     <a:lstStyle/>
                     <a:p>
                       <a:r>
@@ -9769,7 +10565,7 @@
                 </a:tc>
                 <a:tc>
                   <a:txBody>
-                    <a:bodyPr wrap="square"/>
+                    <a:bodyPr/>
                     <a:lstStyle/>
                     <a:p>
                       <a:r>
@@ -9791,7 +10587,7 @@
                 </a:tc>
                 <a:tc>
                   <a:txBody>
-                    <a:bodyPr wrap="square"/>
+                    <a:bodyPr/>
                     <a:lstStyle/>
                     <a:p>
                       <a:r>
@@ -9811,11 +10607,16 @@
                     </a:solidFill>
                   </a:tcPr>
                 </a:tc>
+                <a:extLst>
+                  <a:ext uri="{0D108BD9-81ED-4DB2-BD59-A6C34878D82A}">
+                    <a16:rowId xmlns:a16="http://schemas.microsoft.com/office/drawing/2014/main" val="10000"/>
+                  </a:ext>
+                </a:extLst>
               </a:tr>
               <a:tr h="731520">
                 <a:tc>
                   <a:txBody>
-                    <a:bodyPr wrap="square"/>
+                    <a:bodyPr/>
                     <a:lstStyle/>
                     <a:p>
                       <a:r>
@@ -9837,7 +10638,7 @@
                 </a:tc>
                 <a:tc>
                   <a:txBody>
-                    <a:bodyPr wrap="square"/>
+                    <a:bodyPr/>
                     <a:lstStyle/>
                     <a:p>
                       <a:r>
@@ -9859,7 +10660,7 @@
                 </a:tc>
                 <a:tc>
                   <a:txBody>
-                    <a:bodyPr wrap="square"/>
+                    <a:bodyPr/>
                     <a:lstStyle/>
                     <a:p>
                       <a:r>
@@ -9879,11 +10680,16 @@
                     </a:solidFill>
                   </a:tcPr>
                 </a:tc>
+                <a:extLst>
+                  <a:ext uri="{0D108BD9-81ED-4DB2-BD59-A6C34878D82A}">
+                    <a16:rowId xmlns:a16="http://schemas.microsoft.com/office/drawing/2014/main" val="10001"/>
+                  </a:ext>
+                </a:extLst>
               </a:tr>
               <a:tr h="731520">
                 <a:tc>
                   <a:txBody>
-                    <a:bodyPr wrap="square"/>
+                    <a:bodyPr/>
                     <a:lstStyle/>
                     <a:p>
                       <a:r>
@@ -9905,7 +10711,7 @@
                 </a:tc>
                 <a:tc>
                   <a:txBody>
-                    <a:bodyPr wrap="square"/>
+                    <a:bodyPr/>
                     <a:lstStyle/>
                     <a:p>
                       <a:r>
@@ -9927,7 +10733,7 @@
                 </a:tc>
                 <a:tc>
                   <a:txBody>
-                    <a:bodyPr wrap="square"/>
+                    <a:bodyPr/>
                     <a:lstStyle/>
                     <a:p>
                       <a:r>
@@ -9947,11 +10753,16 @@
                     </a:solidFill>
                   </a:tcPr>
                 </a:tc>
+                <a:extLst>
+                  <a:ext uri="{0D108BD9-81ED-4DB2-BD59-A6C34878D82A}">
+                    <a16:rowId xmlns:a16="http://schemas.microsoft.com/office/drawing/2014/main" val="10002"/>
+                  </a:ext>
+                </a:extLst>
               </a:tr>
               <a:tr h="731520">
                 <a:tc>
                   <a:txBody>
-                    <a:bodyPr wrap="square"/>
+                    <a:bodyPr/>
                     <a:lstStyle/>
                     <a:p>
                       <a:r>
@@ -9973,7 +10784,7 @@
                 </a:tc>
                 <a:tc>
                   <a:txBody>
-                    <a:bodyPr wrap="square"/>
+                    <a:bodyPr/>
                     <a:lstStyle/>
                     <a:p>
                       <a:r>
@@ -9995,7 +10806,7 @@
                 </a:tc>
                 <a:tc>
                   <a:txBody>
-                    <a:bodyPr wrap="square"/>
+                    <a:bodyPr/>
                     <a:lstStyle/>
                     <a:p>
                       <a:r>
@@ -10015,11 +10826,16 @@
                     </a:solidFill>
                   </a:tcPr>
                 </a:tc>
+                <a:extLst>
+                  <a:ext uri="{0D108BD9-81ED-4DB2-BD59-A6C34878D82A}">
+                    <a16:rowId xmlns:a16="http://schemas.microsoft.com/office/drawing/2014/main" val="10003"/>
+                  </a:ext>
+                </a:extLst>
               </a:tr>
               <a:tr h="731520">
                 <a:tc>
                   <a:txBody>
-                    <a:bodyPr wrap="square"/>
+                    <a:bodyPr/>
                     <a:lstStyle/>
                     <a:p>
                       <a:r>
@@ -10041,7 +10857,7 @@
                 </a:tc>
                 <a:tc>
                   <a:txBody>
-                    <a:bodyPr wrap="square"/>
+                    <a:bodyPr/>
                     <a:lstStyle/>
                     <a:p>
                       <a:r>
@@ -10063,7 +10879,7 @@
                 </a:tc>
                 <a:tc>
                   <a:txBody>
-                    <a:bodyPr wrap="square"/>
+                    <a:bodyPr/>
                     <a:lstStyle/>
                     <a:p>
                       <a:r>
@@ -10083,11 +10899,16 @@
                     </a:solidFill>
                   </a:tcPr>
                 </a:tc>
+                <a:extLst>
+                  <a:ext uri="{0D108BD9-81ED-4DB2-BD59-A6C34878D82A}">
+                    <a16:rowId xmlns:a16="http://schemas.microsoft.com/office/drawing/2014/main" val="10004"/>
+                  </a:ext>
+                </a:extLst>
               </a:tr>
               <a:tr h="731520">
                 <a:tc>
                   <a:txBody>
-                    <a:bodyPr wrap="square"/>
+                    <a:bodyPr/>
                     <a:lstStyle/>
                     <a:p>
                       <a:r>
@@ -10109,7 +10930,7 @@
                 </a:tc>
                 <a:tc>
                   <a:txBody>
-                    <a:bodyPr wrap="square"/>
+                    <a:bodyPr/>
                     <a:lstStyle/>
                     <a:p>
                       <a:r>
@@ -10131,7 +10952,7 @@
                 </a:tc>
                 <a:tc>
                   <a:txBody>
-                    <a:bodyPr wrap="square"/>
+                    <a:bodyPr/>
                     <a:lstStyle/>
                     <a:p>
                       <a:r>
@@ -10151,6 +10972,11 @@
                     </a:solidFill>
                   </a:tcPr>
                 </a:tc>
+                <a:extLst>
+                  <a:ext uri="{0D108BD9-81ED-4DB2-BD59-A6C34878D82A}">
+                    <a16:rowId xmlns:a16="http://schemas.microsoft.com/office/drawing/2014/main" val="10005"/>
+                  </a:ext>
+                </a:extLst>
               </a:tr>
             </a:tbl>
           </a:graphicData>
@@ -10173,7 +10999,7 @@
           <a:noFill/>
         </p:spPr>
         <p:txBody>
-          <a:bodyPr wrap="square" lIns="45720" rIns="45720" tIns="27432" bIns="27432" anchor="t">
+          <a:bodyPr wrap="square" lIns="45720" tIns="27432" rIns="45720" bIns="27432" anchor="t">
             <a:spAutoFit/>
           </a:bodyPr>
           <a:lstStyle/>
@@ -10200,7 +11026,7 @@
 </file>
 
 <file path=ppt/slides/slide15.xml><?xml version="1.0" encoding="utf-8"?>
-<p:sld xmlns:a="http://schemas.openxmlformats.org/drawingml/2006/main" xmlns:p="http://schemas.openxmlformats.org/presentationml/2006/main" xmlns:r="http://schemas.openxmlformats.org/officeDocument/2006/relationships">
+<p:sld xmlns:a="http://schemas.openxmlformats.org/drawingml/2006/main" xmlns:r="http://schemas.openxmlformats.org/officeDocument/2006/relationships" xmlns:p="http://schemas.openxmlformats.org/presentationml/2006/main">
   <p:cSld>
     <p:bg>
       <p:bgPr>
@@ -10216,7 +11042,14 @@
         <p:cNvGrpSpPr/>
         <p:nvPr/>
       </p:nvGrpSpPr>
-      <p:grpSpPr/>
+      <p:grpSpPr>
+        <a:xfrm>
+          <a:off x="0" y="0"/>
+          <a:ext cx="0" cy="0"/>
+          <a:chOff x="0" y="0"/>
+          <a:chExt cx="0" cy="0"/>
+        </a:xfrm>
+      </p:grpSpPr>
       <p:sp>
         <p:nvSpPr>
           <p:cNvPr id="2" name="Rounded Rectangle 1"/>
@@ -10256,7 +11089,7 @@
           </a:fontRef>
         </p:style>
         <p:txBody>
-          <a:bodyPr rtlCol="0" anchor="ctr" wrap="square" lIns="45720" rIns="45720" tIns="27432" bIns="27432"/>
+          <a:bodyPr wrap="square" lIns="45720" tIns="27432" rIns="45720" bIns="27432" rtlCol="0" anchor="ctr"/>
           <a:lstStyle/>
           <a:p>
             <a:pPr algn="ctr"/>
@@ -10289,7 +11122,7 @@
           <a:noFill/>
         </p:spPr>
         <p:txBody>
-          <a:bodyPr wrap="square" lIns="45720" rIns="45720" tIns="27432" bIns="27432" anchor="t">
+          <a:bodyPr wrap="square" lIns="45720" tIns="27432" rIns="45720" bIns="27432" anchor="t">
             <a:spAutoFit/>
           </a:bodyPr>
           <a:lstStyle/>
@@ -10324,7 +11157,7 @@
           <a:noFill/>
         </p:spPr>
         <p:txBody>
-          <a:bodyPr wrap="square" lIns="45720" rIns="45720" tIns="27432" bIns="27432" anchor="t">
+          <a:bodyPr wrap="square" lIns="45720" tIns="27432" rIns="45720" bIns="27432" anchor="t">
             <a:spAutoFit/>
           </a:bodyPr>
           <a:lstStyle/>
@@ -10385,6 +11218,7 @@
           <a:lstStyle/>
           <a:p>
             <a:pPr algn="ctr"/>
+            <a:endParaRPr/>
           </a:p>
         </p:txBody>
       </p:sp>
@@ -10405,7 +11239,7 @@
           <a:noFill/>
         </p:spPr>
         <p:txBody>
-          <a:bodyPr wrap="square" lIns="45720" rIns="45720" tIns="27432" bIns="27432" anchor="t">
+          <a:bodyPr wrap="square" lIns="45720" tIns="27432" rIns="45720" bIns="27432" anchor="t">
             <a:spAutoFit/>
           </a:bodyPr>
           <a:lstStyle/>
@@ -10440,7 +11274,7 @@
           <a:noFill/>
         </p:spPr>
         <p:txBody>
-          <a:bodyPr wrap="square" lIns="45720" rIns="45720" tIns="27432" bIns="27432" anchor="t">
+          <a:bodyPr wrap="square" lIns="45720" tIns="27432" rIns="45720" bIns="27432" anchor="t">
             <a:spAutoFit/>
           </a:bodyPr>
           <a:lstStyle/>
@@ -10497,7 +11331,7 @@
           </a:fontRef>
         </p:style>
         <p:txBody>
-          <a:bodyPr rtlCol="0" anchor="ctr" wrap="square" lIns="45720" rIns="45720" tIns="27432" bIns="27432"/>
+          <a:bodyPr wrap="square" lIns="45720" tIns="27432" rIns="45720" bIns="27432" rtlCol="0" anchor="ctr"/>
           <a:lstStyle/>
           <a:p>
             <a:pPr algn="ctr"/>
@@ -10552,7 +11386,7 @@
           </a:fontRef>
         </p:style>
         <p:txBody>
-          <a:bodyPr rtlCol="0" anchor="ctr" wrap="square" lIns="45720" rIns="45720" tIns="27432" bIns="27432"/>
+          <a:bodyPr wrap="square" lIns="45720" tIns="27432" rIns="45720" bIns="27432" rtlCol="0" anchor="ctr"/>
           <a:lstStyle/>
           <a:p>
             <a:pPr algn="ctr"/>
@@ -10607,7 +11441,7 @@
           </a:fontRef>
         </p:style>
         <p:txBody>
-          <a:bodyPr rtlCol="0" anchor="ctr" wrap="square" lIns="45720" rIns="45720" tIns="27432" bIns="27432"/>
+          <a:bodyPr wrap="square" lIns="45720" tIns="27432" rIns="45720" bIns="27432" rtlCol="0" anchor="ctr"/>
           <a:lstStyle/>
           <a:p>
             <a:pPr algn="ctr"/>
@@ -10662,7 +11496,7 @@
           </a:fontRef>
         </p:style>
         <p:txBody>
-          <a:bodyPr rtlCol="0" anchor="ctr" wrap="square" lIns="45720" rIns="45720" tIns="27432" bIns="27432"/>
+          <a:bodyPr wrap="square" lIns="45720" tIns="27432" rIns="45720" bIns="27432" rtlCol="0" anchor="ctr"/>
           <a:lstStyle/>
           <a:p>
             <a:pPr algn="ctr"/>
@@ -10717,7 +11551,7 @@
           </a:fontRef>
         </p:style>
         <p:txBody>
-          <a:bodyPr rtlCol="0" anchor="ctr" wrap="square" lIns="45720" rIns="45720" tIns="27432" bIns="27432"/>
+          <a:bodyPr wrap="square" lIns="45720" tIns="27432" rIns="45720" bIns="27432" rtlCol="0" anchor="ctr"/>
           <a:lstStyle/>
           <a:p>
             <a:pPr algn="ctr"/>
@@ -10772,7 +11606,7 @@
           </a:fontRef>
         </p:style>
         <p:txBody>
-          <a:bodyPr rtlCol="0" anchor="ctr" wrap="square" lIns="45720" rIns="45720" tIns="27432" bIns="27432"/>
+          <a:bodyPr wrap="square" lIns="45720" tIns="27432" rIns="45720" bIns="27432" rtlCol="0" anchor="ctr"/>
           <a:lstStyle/>
           <a:p>
             <a:pPr algn="ctr"/>
@@ -10827,7 +11661,7 @@
           </a:fontRef>
         </p:style>
         <p:txBody>
-          <a:bodyPr rtlCol="0" anchor="ctr" wrap="square" lIns="45720" rIns="45720" tIns="27432" bIns="27432"/>
+          <a:bodyPr wrap="square" lIns="45720" tIns="27432" rIns="45720" bIns="27432" rtlCol="0" anchor="ctr"/>
           <a:lstStyle/>
           <a:p>
             <a:pPr algn="ctr"/>
@@ -10882,7 +11716,7 @@
           </a:fontRef>
         </p:style>
         <p:txBody>
-          <a:bodyPr rtlCol="0" anchor="ctr" wrap="square" lIns="45720" rIns="45720" tIns="27432" bIns="27432"/>
+          <a:bodyPr wrap="square" lIns="45720" tIns="27432" rIns="45720" bIns="27432" rtlCol="0" anchor="ctr"/>
           <a:lstStyle/>
           <a:p>
             <a:pPr algn="ctr"/>
@@ -10915,7 +11749,7 @@
           <a:noFill/>
         </p:spPr>
         <p:txBody>
-          <a:bodyPr wrap="square" lIns="45720" rIns="45720" tIns="27432" bIns="27432" anchor="t">
+          <a:bodyPr wrap="square" lIns="45720" tIns="27432" rIns="45720" bIns="27432" anchor="t">
             <a:spAutoFit/>
           </a:bodyPr>
           <a:lstStyle/>
@@ -10952,14 +11786,32 @@
                 <a:tableStyleId>{5C22544A-7EE6-4342-B048-85BDC9FD1C3A}</a:tableStyleId>
               </a:tblPr>
               <a:tblGrid>
-                <a:gridCol w="3063240"/>
-                <a:gridCol w="1920240"/>
-                <a:gridCol w="1920240"/>
+                <a:gridCol w="3063240">
+                  <a:extLst>
+                    <a:ext uri="{9D8B030D-6E8A-4147-A177-3AD203B41FA5}">
+                      <a16:colId xmlns:a16="http://schemas.microsoft.com/office/drawing/2014/main" val="20000"/>
+                    </a:ext>
+                  </a:extLst>
+                </a:gridCol>
+                <a:gridCol w="1920240">
+                  <a:extLst>
+                    <a:ext uri="{9D8B030D-6E8A-4147-A177-3AD203B41FA5}">
+                      <a16:colId xmlns:a16="http://schemas.microsoft.com/office/drawing/2014/main" val="20001"/>
+                    </a:ext>
+                  </a:extLst>
+                </a:gridCol>
+                <a:gridCol w="1920240">
+                  <a:extLst>
+                    <a:ext uri="{9D8B030D-6E8A-4147-A177-3AD203B41FA5}">
+                      <a16:colId xmlns:a16="http://schemas.microsoft.com/office/drawing/2014/main" val="20002"/>
+                    </a:ext>
+                  </a:extLst>
+                </a:gridCol>
               </a:tblGrid>
               <a:tr h="603504">
                 <a:tc>
                   <a:txBody>
-                    <a:bodyPr wrap="square"/>
+                    <a:bodyPr/>
                     <a:lstStyle/>
                     <a:p>
                       <a:r>
@@ -10981,7 +11833,7 @@
                 </a:tc>
                 <a:tc>
                   <a:txBody>
-                    <a:bodyPr wrap="square"/>
+                    <a:bodyPr/>
                     <a:lstStyle/>
                     <a:p>
                       <a:r>
@@ -11003,7 +11855,7 @@
                 </a:tc>
                 <a:tc>
                   <a:txBody>
-                    <a:bodyPr wrap="square"/>
+                    <a:bodyPr/>
                     <a:lstStyle/>
                     <a:p>
                       <a:r>
@@ -11023,11 +11875,16 @@
                     </a:solidFill>
                   </a:tcPr>
                 </a:tc>
+                <a:extLst>
+                  <a:ext uri="{0D108BD9-81ED-4DB2-BD59-A6C34878D82A}">
+                    <a16:rowId xmlns:a16="http://schemas.microsoft.com/office/drawing/2014/main" val="10000"/>
+                  </a:ext>
+                </a:extLst>
               </a:tr>
               <a:tr h="603504">
                 <a:tc>
                   <a:txBody>
-                    <a:bodyPr wrap="square"/>
+                    <a:bodyPr/>
                     <a:lstStyle/>
                     <a:p>
                       <a:r>
@@ -11049,7 +11906,7 @@
                 </a:tc>
                 <a:tc>
                   <a:txBody>
-                    <a:bodyPr wrap="square"/>
+                    <a:bodyPr/>
                     <a:lstStyle/>
                     <a:p>
                       <a:r>
@@ -11071,7 +11928,7 @@
                 </a:tc>
                 <a:tc>
                   <a:txBody>
-                    <a:bodyPr wrap="square"/>
+                    <a:bodyPr/>
                     <a:lstStyle/>
                     <a:p>
                       <a:r>
@@ -11091,11 +11948,16 @@
                     </a:solidFill>
                   </a:tcPr>
                 </a:tc>
+                <a:extLst>
+                  <a:ext uri="{0D108BD9-81ED-4DB2-BD59-A6C34878D82A}">
+                    <a16:rowId xmlns:a16="http://schemas.microsoft.com/office/drawing/2014/main" val="10001"/>
+                  </a:ext>
+                </a:extLst>
               </a:tr>
               <a:tr h="603504">
                 <a:tc>
                   <a:txBody>
-                    <a:bodyPr wrap="square"/>
+                    <a:bodyPr/>
                     <a:lstStyle/>
                     <a:p>
                       <a:r>
@@ -11117,7 +11979,7 @@
                 </a:tc>
                 <a:tc>
                   <a:txBody>
-                    <a:bodyPr wrap="square"/>
+                    <a:bodyPr/>
                     <a:lstStyle/>
                     <a:p>
                       <a:r>
@@ -11139,7 +12001,7 @@
                 </a:tc>
                 <a:tc>
                   <a:txBody>
-                    <a:bodyPr wrap="square"/>
+                    <a:bodyPr/>
                     <a:lstStyle/>
                     <a:p>
                       <a:r>
@@ -11159,11 +12021,16 @@
                     </a:solidFill>
                   </a:tcPr>
                 </a:tc>
+                <a:extLst>
+                  <a:ext uri="{0D108BD9-81ED-4DB2-BD59-A6C34878D82A}">
+                    <a16:rowId xmlns:a16="http://schemas.microsoft.com/office/drawing/2014/main" val="10002"/>
+                  </a:ext>
+                </a:extLst>
               </a:tr>
               <a:tr h="603504">
                 <a:tc>
                   <a:txBody>
-                    <a:bodyPr wrap="square"/>
+                    <a:bodyPr/>
                     <a:lstStyle/>
                     <a:p>
                       <a:r>
@@ -11185,7 +12052,7 @@
                 </a:tc>
                 <a:tc>
                   <a:txBody>
-                    <a:bodyPr wrap="square"/>
+                    <a:bodyPr/>
                     <a:lstStyle/>
                     <a:p>
                       <a:r>
@@ -11207,7 +12074,7 @@
                 </a:tc>
                 <a:tc>
                   <a:txBody>
-                    <a:bodyPr wrap="square"/>
+                    <a:bodyPr/>
                     <a:lstStyle/>
                     <a:p>
                       <a:r>
@@ -11227,11 +12094,16 @@
                     </a:solidFill>
                   </a:tcPr>
                 </a:tc>
+                <a:extLst>
+                  <a:ext uri="{0D108BD9-81ED-4DB2-BD59-A6C34878D82A}">
+                    <a16:rowId xmlns:a16="http://schemas.microsoft.com/office/drawing/2014/main" val="10003"/>
+                  </a:ext>
+                </a:extLst>
               </a:tr>
               <a:tr h="603504">
                 <a:tc>
                   <a:txBody>
-                    <a:bodyPr wrap="square"/>
+                    <a:bodyPr/>
                     <a:lstStyle/>
                     <a:p>
                       <a:r>
@@ -11253,7 +12125,7 @@
                 </a:tc>
                 <a:tc>
                   <a:txBody>
-                    <a:bodyPr wrap="square"/>
+                    <a:bodyPr/>
                     <a:lstStyle/>
                     <a:p>
                       <a:r>
@@ -11275,7 +12147,7 @@
                 </a:tc>
                 <a:tc>
                   <a:txBody>
-                    <a:bodyPr wrap="square"/>
+                    <a:bodyPr/>
                     <a:lstStyle/>
                     <a:p>
                       <a:r>
@@ -11295,11 +12167,16 @@
                     </a:solidFill>
                   </a:tcPr>
                 </a:tc>
+                <a:extLst>
+                  <a:ext uri="{0D108BD9-81ED-4DB2-BD59-A6C34878D82A}">
+                    <a16:rowId xmlns:a16="http://schemas.microsoft.com/office/drawing/2014/main" val="10004"/>
+                  </a:ext>
+                </a:extLst>
               </a:tr>
               <a:tr h="603504">
                 <a:tc>
                   <a:txBody>
-                    <a:bodyPr wrap="square"/>
+                    <a:bodyPr/>
                     <a:lstStyle/>
                     <a:p>
                       <a:r>
@@ -11321,7 +12198,7 @@
                 </a:tc>
                 <a:tc>
                   <a:txBody>
-                    <a:bodyPr wrap="square"/>
+                    <a:bodyPr/>
                     <a:lstStyle/>
                     <a:p>
                       <a:r>
@@ -11343,7 +12220,7 @@
                 </a:tc>
                 <a:tc>
                   <a:txBody>
-                    <a:bodyPr wrap="square"/>
+                    <a:bodyPr/>
                     <a:lstStyle/>
                     <a:p>
                       <a:r>
@@ -11363,11 +12240,16 @@
                     </a:solidFill>
                   </a:tcPr>
                 </a:tc>
+                <a:extLst>
+                  <a:ext uri="{0D108BD9-81ED-4DB2-BD59-A6C34878D82A}">
+                    <a16:rowId xmlns:a16="http://schemas.microsoft.com/office/drawing/2014/main" val="10005"/>
+                  </a:ext>
+                </a:extLst>
               </a:tr>
               <a:tr h="603504">
                 <a:tc>
                   <a:txBody>
-                    <a:bodyPr wrap="square"/>
+                    <a:bodyPr/>
                     <a:lstStyle/>
                     <a:p>
                       <a:r>
@@ -11389,7 +12271,7 @@
                 </a:tc>
                 <a:tc>
                   <a:txBody>
-                    <a:bodyPr wrap="square"/>
+                    <a:bodyPr/>
                     <a:lstStyle/>
                     <a:p>
                       <a:r>
@@ -11411,7 +12293,7 @@
                 </a:tc>
                 <a:tc>
                   <a:txBody>
-                    <a:bodyPr wrap="square"/>
+                    <a:bodyPr/>
                     <a:lstStyle/>
                     <a:p>
                       <a:r>
@@ -11431,6 +12313,11 @@
                     </a:solidFill>
                   </a:tcPr>
                 </a:tc>
+                <a:extLst>
+                  <a:ext uri="{0D108BD9-81ED-4DB2-BD59-A6C34878D82A}">
+                    <a16:rowId xmlns:a16="http://schemas.microsoft.com/office/drawing/2014/main" val="10006"/>
+                  </a:ext>
+                </a:extLst>
               </a:tr>
             </a:tbl>
           </a:graphicData>
@@ -11453,7 +12340,7 @@
           <a:noFill/>
         </p:spPr>
         <p:txBody>
-          <a:bodyPr wrap="square" lIns="45720" rIns="45720" tIns="27432" bIns="27432" anchor="t">
+          <a:bodyPr wrap="square" lIns="45720" tIns="27432" rIns="45720" bIns="27432" anchor="t">
             <a:spAutoFit/>
           </a:bodyPr>
           <a:lstStyle/>
@@ -11488,7 +12375,7 @@
           <a:noFill/>
         </p:spPr>
         <p:txBody>
-          <a:bodyPr wrap="square" lIns="45720" rIns="45720" tIns="27432" bIns="27432" anchor="t">
+          <a:bodyPr wrap="square" lIns="45720" tIns="27432" rIns="45720" bIns="27432" anchor="t">
             <a:spAutoFit/>
           </a:bodyPr>
           <a:lstStyle/>
@@ -11515,7 +12402,7 @@
 </file>
 
 <file path=ppt/slides/slide16.xml><?xml version="1.0" encoding="utf-8"?>
-<p:sld xmlns:a="http://schemas.openxmlformats.org/drawingml/2006/main" xmlns:p="http://schemas.openxmlformats.org/presentationml/2006/main" xmlns:r="http://schemas.openxmlformats.org/officeDocument/2006/relationships">
+<p:sld xmlns:a="http://schemas.openxmlformats.org/drawingml/2006/main" xmlns:r="http://schemas.openxmlformats.org/officeDocument/2006/relationships" xmlns:p="http://schemas.openxmlformats.org/presentationml/2006/main">
   <p:cSld>
     <p:bg>
       <p:bgPr>
@@ -11531,7 +12418,14 @@
         <p:cNvGrpSpPr/>
         <p:nvPr/>
       </p:nvGrpSpPr>
-      <p:grpSpPr/>
+      <p:grpSpPr>
+        <a:xfrm>
+          <a:off x="0" y="0"/>
+          <a:ext cx="0" cy="0"/>
+          <a:chOff x="0" y="0"/>
+          <a:chExt cx="0" cy="0"/>
+        </a:xfrm>
+      </p:grpSpPr>
       <p:sp>
         <p:nvSpPr>
           <p:cNvPr id="2" name="Rounded Rectangle 1"/>
@@ -11571,7 +12465,7 @@
           </a:fontRef>
         </p:style>
         <p:txBody>
-          <a:bodyPr rtlCol="0" anchor="ctr" wrap="square" lIns="45720" rIns="45720" tIns="27432" bIns="27432"/>
+          <a:bodyPr wrap="square" lIns="45720" tIns="27432" rIns="45720" bIns="27432" rtlCol="0" anchor="ctr"/>
           <a:lstStyle/>
           <a:p>
             <a:pPr algn="ctr"/>
@@ -11604,7 +12498,7 @@
           <a:noFill/>
         </p:spPr>
         <p:txBody>
-          <a:bodyPr wrap="square" lIns="45720" rIns="45720" tIns="27432" bIns="27432" anchor="t">
+          <a:bodyPr wrap="square" lIns="45720" tIns="27432" rIns="45720" bIns="27432" anchor="t">
             <a:spAutoFit/>
           </a:bodyPr>
           <a:lstStyle/>
@@ -11639,7 +12533,7 @@
           <a:noFill/>
         </p:spPr>
         <p:txBody>
-          <a:bodyPr wrap="square" lIns="45720" rIns="45720" tIns="27432" bIns="27432" anchor="t">
+          <a:bodyPr wrap="square" lIns="45720" tIns="27432" rIns="45720" bIns="27432" anchor="t">
             <a:spAutoFit/>
           </a:bodyPr>
           <a:lstStyle/>
@@ -11674,7 +12568,7 @@
           <a:noFill/>
         </p:spPr>
         <p:txBody>
-          <a:bodyPr wrap="square" lIns="45720" rIns="45720" tIns="27432" bIns="27432" anchor="t">
+          <a:bodyPr wrap="square" lIns="45720" tIns="27432" rIns="45720" bIns="27432" anchor="t">
             <a:spAutoFit/>
           </a:bodyPr>
           <a:lstStyle/>
@@ -11709,7 +12603,7 @@
           <a:noFill/>
         </p:spPr>
         <p:txBody>
-          <a:bodyPr wrap="square" lIns="45720" rIns="45720" tIns="27432" bIns="27432" anchor="t">
+          <a:bodyPr wrap="square" lIns="45720" tIns="27432" rIns="45720" bIns="27432" anchor="t">
             <a:spAutoFit/>
           </a:bodyPr>
           <a:lstStyle/>
@@ -11744,7 +12638,7 @@
           <a:noFill/>
         </p:spPr>
         <p:txBody>
-          <a:bodyPr wrap="square" lIns="45720" rIns="45720" tIns="27432" bIns="27432" anchor="t">
+          <a:bodyPr wrap="square" lIns="45720" tIns="27432" rIns="45720" bIns="27432" anchor="t">
             <a:spAutoFit/>
           </a:bodyPr>
           <a:lstStyle/>
@@ -11779,7 +12673,7 @@
           <a:noFill/>
         </p:spPr>
         <p:txBody>
-          <a:bodyPr wrap="square" lIns="45720" rIns="45720" tIns="27432" bIns="27432" anchor="t">
+          <a:bodyPr wrap="square" lIns="45720" tIns="27432" rIns="45720" bIns="27432" anchor="t">
             <a:spAutoFit/>
           </a:bodyPr>
           <a:lstStyle/>
@@ -11814,7 +12708,7 @@
           <a:noFill/>
         </p:spPr>
         <p:txBody>
-          <a:bodyPr wrap="square" lIns="45720" rIns="45720" tIns="27432" bIns="27432" anchor="t">
+          <a:bodyPr wrap="square" lIns="45720" tIns="27432" rIns="45720" bIns="27432" anchor="t">
             <a:spAutoFit/>
           </a:bodyPr>
           <a:lstStyle/>
@@ -11849,7 +12743,7 @@
           <a:noFill/>
         </p:spPr>
         <p:txBody>
-          <a:bodyPr wrap="square" lIns="45720" rIns="45720" tIns="27432" bIns="27432" anchor="t">
+          <a:bodyPr wrap="square" lIns="45720" tIns="27432" rIns="45720" bIns="27432" anchor="t">
             <a:spAutoFit/>
           </a:bodyPr>
           <a:lstStyle/>
@@ -11884,7 +12778,7 @@
           <a:noFill/>
         </p:spPr>
         <p:txBody>
-          <a:bodyPr wrap="square" lIns="45720" rIns="45720" tIns="27432" bIns="27432" anchor="t">
+          <a:bodyPr wrap="square" lIns="45720" tIns="27432" rIns="45720" bIns="27432" anchor="t">
             <a:spAutoFit/>
           </a:bodyPr>
           <a:lstStyle/>
@@ -11919,7 +12813,7 @@
           <a:noFill/>
         </p:spPr>
         <p:txBody>
-          <a:bodyPr wrap="square" lIns="45720" rIns="45720" tIns="27432" bIns="27432" anchor="t">
+          <a:bodyPr wrap="square" lIns="45720" tIns="27432" rIns="45720" bIns="27432" anchor="t">
             <a:spAutoFit/>
           </a:bodyPr>
           <a:lstStyle/>
@@ -11954,7 +12848,7 @@
           <a:noFill/>
         </p:spPr>
         <p:txBody>
-          <a:bodyPr wrap="square" lIns="45720" rIns="45720" tIns="27432" bIns="27432" anchor="t">
+          <a:bodyPr wrap="square" lIns="45720" tIns="27432" rIns="45720" bIns="27432" anchor="t">
             <a:spAutoFit/>
           </a:bodyPr>
           <a:lstStyle/>
@@ -11989,7 +12883,7 @@
           <a:noFill/>
         </p:spPr>
         <p:txBody>
-          <a:bodyPr wrap="square" lIns="45720" rIns="45720" tIns="27432" bIns="27432" anchor="t">
+          <a:bodyPr wrap="square" lIns="45720" tIns="27432" rIns="45720" bIns="27432" anchor="t">
             <a:spAutoFit/>
           </a:bodyPr>
           <a:lstStyle/>
@@ -12050,6 +12944,7 @@
           <a:lstStyle/>
           <a:p>
             <a:pPr algn="ctr"/>
+            <a:endParaRPr/>
           </a:p>
         </p:txBody>
       </p:sp>
@@ -12070,7 +12965,7 @@
           <a:noFill/>
         </p:spPr>
         <p:txBody>
-          <a:bodyPr wrap="square" lIns="45720" rIns="45720" tIns="27432" bIns="27432" anchor="ctr">
+          <a:bodyPr wrap="square" lIns="45720" tIns="27432" rIns="45720" bIns="27432" anchor="ctr">
             <a:spAutoFit/>
           </a:bodyPr>
           <a:lstStyle/>
@@ -12126,7 +13021,649 @@
 </file>
 
 <file path=ppt/slides/slide17.xml><?xml version="1.0" encoding="utf-8"?>
-<p:sld xmlns:a="http://schemas.openxmlformats.org/drawingml/2006/main" xmlns:p="http://schemas.openxmlformats.org/presentationml/2006/main" xmlns:r="http://schemas.openxmlformats.org/officeDocument/2006/relationships">
+<p:sld xmlns:a="http://schemas.openxmlformats.org/drawingml/2006/main" xmlns:r="http://schemas.openxmlformats.org/officeDocument/2006/relationships" xmlns:p="http://schemas.openxmlformats.org/presentationml/2006/main">
+  <p:cSld>
+    <p:bg>
+      <p:bgPr>
+        <a:solidFill>
+          <a:srgbClr val="111111"/>
+        </a:solidFill>
+        <a:effectLst/>
+      </p:bgPr>
+    </p:bg>
+    <p:spTree>
+      <p:nvGrpSpPr>
+        <p:cNvPr id="1" name="">
+          <a:extLst>
+            <a:ext uri="{FF2B5EF4-FFF2-40B4-BE49-F238E27FC236}">
+              <a16:creationId xmlns:a16="http://schemas.microsoft.com/office/drawing/2014/main" id="{1B683833-23FF-9A1C-EAA5-3269F05EBC2C}"/>
+            </a:ext>
+          </a:extLst>
+        </p:cNvPr>
+        <p:cNvGrpSpPr/>
+        <p:nvPr/>
+      </p:nvGrpSpPr>
+      <p:grpSpPr>
+        <a:xfrm>
+          <a:off x="0" y="0"/>
+          <a:ext cx="0" cy="0"/>
+          <a:chOff x="0" y="0"/>
+          <a:chExt cx="0" cy="0"/>
+        </a:xfrm>
+      </p:grpSpPr>
+      <p:sp>
+        <p:nvSpPr>
+          <p:cNvPr id="2" name="Rounded Rectangle 1">
+            <a:extLst>
+              <a:ext uri="{FF2B5EF4-FFF2-40B4-BE49-F238E27FC236}">
+                <a16:creationId xmlns:a16="http://schemas.microsoft.com/office/drawing/2014/main" id="{97290907-810A-A230-05BB-F2A43B35F2EF}"/>
+              </a:ext>
+            </a:extLst>
+          </p:cNvPr>
+          <p:cNvSpPr/>
+          <p:nvPr/>
+        </p:nvSpPr>
+        <p:spPr>
+          <a:xfrm>
+            <a:off x="548640" y="320040"/>
+            <a:ext cx="1179576" cy="329184"/>
+          </a:xfrm>
+          <a:prstGeom prst="roundRect">
+            <a:avLst>
+              <a:gd name="adj" fmla="val 50000"/>
+            </a:avLst>
+          </a:prstGeom>
+          <a:solidFill>
+            <a:srgbClr val="EFDF00"/>
+          </a:solidFill>
+          <a:ln>
+            <a:noFill/>
+          </a:ln>
+          <a:effectLst/>
+        </p:spPr>
+        <p:style>
+          <a:lnRef idx="1">
+            <a:schemeClr val="accent1"/>
+          </a:lnRef>
+          <a:fillRef idx="3">
+            <a:schemeClr val="accent1"/>
+          </a:fillRef>
+          <a:effectRef idx="2">
+            <a:schemeClr val="accent1"/>
+          </a:effectRef>
+          <a:fontRef idx="minor">
+            <a:schemeClr val="lt1"/>
+          </a:fontRef>
+        </p:style>
+        <p:txBody>
+          <a:bodyPr wrap="square" lIns="45720" tIns="27432" rIns="45720" bIns="27432" rtlCol="0" anchor="ctr"/>
+          <a:lstStyle/>
+          <a:p>
+            <a:pPr algn="ctr"/>
+            <a:r>
+              <a:rPr lang="en-US" sz="1100" b="1" dirty="0">
+                <a:solidFill>
+                  <a:srgbClr val="111111"/>
+                </a:solidFill>
+                <a:latin typeface="Calibri"/>
+              </a:rPr>
+              <a:t>Bonus</a:t>
+            </a:r>
+            <a:endParaRPr sz="1100" b="1" i="0" dirty="0">
+              <a:solidFill>
+                <a:srgbClr val="111111"/>
+              </a:solidFill>
+              <a:latin typeface="Calibri"/>
+            </a:endParaRPr>
+          </a:p>
+        </p:txBody>
+      </p:sp>
+      <p:sp>
+        <p:nvSpPr>
+          <p:cNvPr id="3" name="TextBox 2">
+            <a:extLst>
+              <a:ext uri="{FF2B5EF4-FFF2-40B4-BE49-F238E27FC236}">
+                <a16:creationId xmlns:a16="http://schemas.microsoft.com/office/drawing/2014/main" id="{BFA9B72A-CA2C-211C-25AC-2FCBD62F7281}"/>
+              </a:ext>
+            </a:extLst>
+          </p:cNvPr>
+          <p:cNvSpPr txBox="1"/>
+          <p:nvPr/>
+        </p:nvSpPr>
+        <p:spPr>
+          <a:xfrm>
+            <a:off x="11155680" y="6400800"/>
+            <a:ext cx="731520" cy="274320"/>
+          </a:xfrm>
+          <a:prstGeom prst="rect">
+            <a:avLst/>
+          </a:prstGeom>
+          <a:noFill/>
+        </p:spPr>
+        <p:txBody>
+          <a:bodyPr wrap="square" lIns="45720" tIns="27432" rIns="45720" bIns="27432" anchor="t">
+            <a:spAutoFit/>
+          </a:bodyPr>
+          <a:lstStyle/>
+          <a:p>
+            <a:pPr algn="r"/>
+            <a:r>
+              <a:rPr sz="1100" b="0" i="0">
+                <a:solidFill>
+                  <a:srgbClr val="D6C4A0"/>
+                </a:solidFill>
+                <a:latin typeface="Calibri"/>
+              </a:rPr>
+              <a:t>16</a:t>
+            </a:r>
+          </a:p>
+        </p:txBody>
+      </p:sp>
+      <p:sp>
+        <p:nvSpPr>
+          <p:cNvPr id="4" name="TextBox 3">
+            <a:extLst>
+              <a:ext uri="{FF2B5EF4-FFF2-40B4-BE49-F238E27FC236}">
+                <a16:creationId xmlns:a16="http://schemas.microsoft.com/office/drawing/2014/main" id="{D94522EF-E250-832E-FB62-CB81333A068C}"/>
+              </a:ext>
+            </a:extLst>
+          </p:cNvPr>
+          <p:cNvSpPr txBox="1"/>
+          <p:nvPr/>
+        </p:nvSpPr>
+        <p:spPr>
+          <a:xfrm>
+            <a:off x="548640" y="822960"/>
+            <a:ext cx="11064240" cy="578620"/>
+          </a:xfrm>
+          <a:prstGeom prst="rect">
+            <a:avLst/>
+          </a:prstGeom>
+          <a:noFill/>
+        </p:spPr>
+        <p:txBody>
+          <a:bodyPr wrap="square" lIns="45720" tIns="27432" rIns="45720" bIns="27432" anchor="t">
+            <a:spAutoFit/>
+          </a:bodyPr>
+          <a:lstStyle/>
+          <a:p>
+            <a:pPr algn="ctr"/>
+            <a:r>
+              <a:rPr lang="en-US" sz="3400" b="1" dirty="0" err="1">
+                <a:solidFill>
+                  <a:srgbClr val="FFFFFF"/>
+                </a:solidFill>
+                <a:latin typeface="Calibri"/>
+              </a:rPr>
+              <a:t>EcoIndex</a:t>
+            </a:r>
+            <a:r>
+              <a:rPr lang="en-US" sz="3400" b="1" dirty="0">
+                <a:solidFill>
+                  <a:srgbClr val="FFFFFF"/>
+                </a:solidFill>
+                <a:latin typeface="Calibri"/>
+              </a:rPr>
+              <a:t> - </a:t>
+            </a:r>
+            <a:r>
+              <a:rPr lang="en-US" sz="3400" b="1" dirty="0" err="1">
+                <a:solidFill>
+                  <a:srgbClr val="FFFFFF"/>
+                </a:solidFill>
+                <a:latin typeface="Calibri"/>
+              </a:rPr>
+              <a:t>RenaultGroup</a:t>
+            </a:r>
+            <a:endParaRPr lang="en-US" dirty="0" err="1"/>
+          </a:p>
+        </p:txBody>
+      </p:sp>
+      <p:pic>
+        <p:nvPicPr>
+          <p:cNvPr id="18" name="Picture 17" descr="A screenshot of a test&#10;&#10;AI-generated content may be incorrect.">
+            <a:extLst>
+              <a:ext uri="{FF2B5EF4-FFF2-40B4-BE49-F238E27FC236}">
+                <a16:creationId xmlns:a16="http://schemas.microsoft.com/office/drawing/2014/main" id="{1D42633F-29B9-EFC9-4689-9605CE452D64}"/>
+              </a:ext>
+            </a:extLst>
+          </p:cNvPr>
+          <p:cNvPicPr>
+            <a:picLocks noChangeAspect="1"/>
+          </p:cNvPicPr>
+          <p:nvPr/>
+        </p:nvPicPr>
+        <p:blipFill>
+          <a:blip r:embed="rId3"/>
+          <a:stretch>
+            <a:fillRect/>
+          </a:stretch>
+        </p:blipFill>
+        <p:spPr>
+          <a:xfrm>
+            <a:off x="297194" y="2001398"/>
+            <a:ext cx="5795394" cy="3433590"/>
+          </a:xfrm>
+          <a:prstGeom prst="rect">
+            <a:avLst/>
+          </a:prstGeom>
+        </p:spPr>
+      </p:pic>
+      <p:pic>
+        <p:nvPicPr>
+          <p:cNvPr id="19" name="Picture 18" descr="A screenshot of a web page&#10;&#10;AI-generated content may be incorrect.">
+            <a:extLst>
+              <a:ext uri="{FF2B5EF4-FFF2-40B4-BE49-F238E27FC236}">
+                <a16:creationId xmlns:a16="http://schemas.microsoft.com/office/drawing/2014/main" id="{6A11F543-C45F-73F0-6090-957A933B9E45}"/>
+              </a:ext>
+            </a:extLst>
+          </p:cNvPr>
+          <p:cNvPicPr>
+            <a:picLocks noChangeAspect="1"/>
+          </p:cNvPicPr>
+          <p:nvPr/>
+        </p:nvPicPr>
+        <p:blipFill>
+          <a:blip r:embed="rId4"/>
+          <a:stretch>
+            <a:fillRect/>
+          </a:stretch>
+        </p:blipFill>
+        <p:spPr>
+          <a:xfrm>
+            <a:off x="6577310" y="1560722"/>
+            <a:ext cx="5188466" cy="4158868"/>
+          </a:xfrm>
+          <a:prstGeom prst="rect">
+            <a:avLst/>
+          </a:prstGeom>
+        </p:spPr>
+      </p:pic>
+      <p:sp>
+        <p:nvSpPr>
+          <p:cNvPr id="22" name="TextBox 21">
+            <a:extLst>
+              <a:ext uri="{FF2B5EF4-FFF2-40B4-BE49-F238E27FC236}">
+                <a16:creationId xmlns:a16="http://schemas.microsoft.com/office/drawing/2014/main" id="{E7420321-80C5-C642-437D-5955B14EB45F}"/>
+              </a:ext>
+            </a:extLst>
+          </p:cNvPr>
+          <p:cNvSpPr txBox="1"/>
+          <p:nvPr/>
+        </p:nvSpPr>
+        <p:spPr>
+          <a:xfrm>
+            <a:off x="548640" y="6400800"/>
+            <a:ext cx="10424160" cy="209288"/>
+          </a:xfrm>
+          <a:prstGeom prst="rect">
+            <a:avLst/>
+          </a:prstGeom>
+          <a:noFill/>
+        </p:spPr>
+        <p:txBody>
+          <a:bodyPr wrap="square" lIns="45720" tIns="27432" rIns="45720" bIns="27432" anchor="t">
+            <a:spAutoFit/>
+          </a:bodyPr>
+          <a:lstStyle/>
+          <a:p>
+            <a:pPr algn="l"/>
+            <a:r>
+              <a:rPr sz="1000" b="0" i="1" dirty="0">
+                <a:solidFill>
+                  <a:schemeClr val="bg2">
+                    <a:lumMod val="90000"/>
+                  </a:schemeClr>
+                </a:solidFill>
+                <a:latin typeface="Calibri"/>
+              </a:rPr>
+              <a:t>Sources : </a:t>
+            </a:r>
+            <a:r>
+              <a:rPr lang="en-US" sz="1000" i="1" dirty="0">
+                <a:solidFill>
+                  <a:schemeClr val="bg2">
+                    <a:lumMod val="90000"/>
+                  </a:schemeClr>
+                </a:solidFill>
+                <a:latin typeface="Calibri"/>
+              </a:rPr>
+              <a:t>www.ecoindex.fr</a:t>
+            </a:r>
+            <a:endParaRPr lang="en-US" sz="1000" b="0" i="1" dirty="0">
+              <a:solidFill>
+                <a:schemeClr val="bg2">
+                  <a:lumMod val="90000"/>
+                </a:schemeClr>
+              </a:solidFill>
+              <a:latin typeface="Calibri"/>
+              <a:ea typeface="Calibri"/>
+              <a:cs typeface="Calibri"/>
+            </a:endParaRPr>
+          </a:p>
+        </p:txBody>
+      </p:sp>
+    </p:spTree>
+    <p:extLst>
+      <p:ext uri="{BB962C8B-B14F-4D97-AF65-F5344CB8AC3E}">
+        <p14:creationId xmlns:p14="http://schemas.microsoft.com/office/powerpoint/2010/main" val="3984663893"/>
+      </p:ext>
+    </p:extLst>
+  </p:cSld>
+  <p:clrMapOvr>
+    <a:masterClrMapping/>
+  </p:clrMapOvr>
+</p:sld>
+</file>
+
+<file path=ppt/slides/slide18.xml><?xml version="1.0" encoding="utf-8"?>
+<p:sld xmlns:a="http://schemas.openxmlformats.org/drawingml/2006/main" xmlns:r="http://schemas.openxmlformats.org/officeDocument/2006/relationships" xmlns:p="http://schemas.openxmlformats.org/presentationml/2006/main">
+  <p:cSld>
+    <p:bg>
+      <p:bgPr>
+        <a:solidFill>
+          <a:srgbClr val="111111"/>
+        </a:solidFill>
+        <a:effectLst/>
+      </p:bgPr>
+    </p:bg>
+    <p:spTree>
+      <p:nvGrpSpPr>
+        <p:cNvPr id="1" name="">
+          <a:extLst>
+            <a:ext uri="{FF2B5EF4-FFF2-40B4-BE49-F238E27FC236}">
+              <a16:creationId xmlns:a16="http://schemas.microsoft.com/office/drawing/2014/main" id="{C6A13A6C-CFA0-B3D6-D400-A4E8C443D33F}"/>
+            </a:ext>
+          </a:extLst>
+        </p:cNvPr>
+        <p:cNvGrpSpPr/>
+        <p:nvPr/>
+      </p:nvGrpSpPr>
+      <p:grpSpPr>
+        <a:xfrm>
+          <a:off x="0" y="0"/>
+          <a:ext cx="0" cy="0"/>
+          <a:chOff x="0" y="0"/>
+          <a:chExt cx="0" cy="0"/>
+        </a:xfrm>
+      </p:grpSpPr>
+      <p:sp>
+        <p:nvSpPr>
+          <p:cNvPr id="2" name="Rounded Rectangle 1">
+            <a:extLst>
+              <a:ext uri="{FF2B5EF4-FFF2-40B4-BE49-F238E27FC236}">
+                <a16:creationId xmlns:a16="http://schemas.microsoft.com/office/drawing/2014/main" id="{C9FA7574-C498-4E68-7BCD-6E5B631C6575}"/>
+              </a:ext>
+            </a:extLst>
+          </p:cNvPr>
+          <p:cNvSpPr/>
+          <p:nvPr/>
+        </p:nvSpPr>
+        <p:spPr>
+          <a:xfrm>
+            <a:off x="548640" y="320040"/>
+            <a:ext cx="1179576" cy="329184"/>
+          </a:xfrm>
+          <a:prstGeom prst="roundRect">
+            <a:avLst>
+              <a:gd name="adj" fmla="val 50000"/>
+            </a:avLst>
+          </a:prstGeom>
+          <a:solidFill>
+            <a:srgbClr val="EFDF00"/>
+          </a:solidFill>
+          <a:ln>
+            <a:noFill/>
+          </a:ln>
+          <a:effectLst/>
+        </p:spPr>
+        <p:style>
+          <a:lnRef idx="1">
+            <a:schemeClr val="accent1"/>
+          </a:lnRef>
+          <a:fillRef idx="3">
+            <a:schemeClr val="accent1"/>
+          </a:fillRef>
+          <a:effectRef idx="2">
+            <a:schemeClr val="accent1"/>
+          </a:effectRef>
+          <a:fontRef idx="minor">
+            <a:schemeClr val="lt1"/>
+          </a:fontRef>
+        </p:style>
+        <p:txBody>
+          <a:bodyPr wrap="square" lIns="45720" tIns="27432" rIns="45720" bIns="27432" rtlCol="0" anchor="ctr"/>
+          <a:lstStyle/>
+          <a:p>
+            <a:pPr algn="ctr"/>
+            <a:r>
+              <a:rPr lang="en-US" sz="1100" b="1" dirty="0">
+                <a:solidFill>
+                  <a:srgbClr val="111111"/>
+                </a:solidFill>
+                <a:latin typeface="Calibri"/>
+              </a:rPr>
+              <a:t>Bonus</a:t>
+            </a:r>
+            <a:endParaRPr sz="1100" b="1" i="0" dirty="0">
+              <a:solidFill>
+                <a:srgbClr val="111111"/>
+              </a:solidFill>
+              <a:latin typeface="Calibri"/>
+            </a:endParaRPr>
+          </a:p>
+        </p:txBody>
+      </p:sp>
+      <p:sp>
+        <p:nvSpPr>
+          <p:cNvPr id="3" name="TextBox 2">
+            <a:extLst>
+              <a:ext uri="{FF2B5EF4-FFF2-40B4-BE49-F238E27FC236}">
+                <a16:creationId xmlns:a16="http://schemas.microsoft.com/office/drawing/2014/main" id="{7663DE0F-100D-015F-9386-D06FD70F6B87}"/>
+              </a:ext>
+            </a:extLst>
+          </p:cNvPr>
+          <p:cNvSpPr txBox="1"/>
+          <p:nvPr/>
+        </p:nvSpPr>
+        <p:spPr>
+          <a:xfrm>
+            <a:off x="11155680" y="6400800"/>
+            <a:ext cx="731520" cy="274320"/>
+          </a:xfrm>
+          <a:prstGeom prst="rect">
+            <a:avLst/>
+          </a:prstGeom>
+          <a:noFill/>
+        </p:spPr>
+        <p:txBody>
+          <a:bodyPr wrap="square" lIns="45720" tIns="27432" rIns="45720" bIns="27432" anchor="t">
+            <a:spAutoFit/>
+          </a:bodyPr>
+          <a:lstStyle/>
+          <a:p>
+            <a:pPr algn="r"/>
+            <a:r>
+              <a:rPr sz="1100" b="0" i="0">
+                <a:solidFill>
+                  <a:srgbClr val="D6C4A0"/>
+                </a:solidFill>
+                <a:latin typeface="Calibri"/>
+              </a:rPr>
+              <a:t>16</a:t>
+            </a:r>
+          </a:p>
+        </p:txBody>
+      </p:sp>
+      <p:sp>
+        <p:nvSpPr>
+          <p:cNvPr id="4" name="TextBox 3">
+            <a:extLst>
+              <a:ext uri="{FF2B5EF4-FFF2-40B4-BE49-F238E27FC236}">
+                <a16:creationId xmlns:a16="http://schemas.microsoft.com/office/drawing/2014/main" id="{143AB746-993C-6166-4D92-D1F6E6E82051}"/>
+              </a:ext>
+            </a:extLst>
+          </p:cNvPr>
+          <p:cNvSpPr txBox="1"/>
+          <p:nvPr/>
+        </p:nvSpPr>
+        <p:spPr>
+          <a:xfrm>
+            <a:off x="548640" y="822960"/>
+            <a:ext cx="11064240" cy="578620"/>
+          </a:xfrm>
+          <a:prstGeom prst="rect">
+            <a:avLst/>
+          </a:prstGeom>
+          <a:noFill/>
+        </p:spPr>
+        <p:txBody>
+          <a:bodyPr wrap="square" lIns="45720" tIns="27432" rIns="45720" bIns="27432" anchor="t">
+            <a:spAutoFit/>
+          </a:bodyPr>
+          <a:lstStyle/>
+          <a:p>
+            <a:pPr algn="ctr"/>
+            <a:r>
+              <a:rPr lang="en-US" sz="3400" b="1" dirty="0" err="1">
+                <a:solidFill>
+                  <a:srgbClr val="FFFFFF"/>
+                </a:solidFill>
+                <a:latin typeface="Calibri"/>
+              </a:rPr>
+              <a:t>GtMetrix</a:t>
+            </a:r>
+            <a:r>
+              <a:rPr lang="en-US" sz="3400" b="1" dirty="0">
+                <a:solidFill>
+                  <a:srgbClr val="FFFFFF"/>
+                </a:solidFill>
+                <a:latin typeface="Calibri"/>
+              </a:rPr>
+              <a:t> - </a:t>
+            </a:r>
+            <a:r>
+              <a:rPr lang="en-US" sz="3400" b="1" dirty="0" err="1">
+                <a:solidFill>
+                  <a:srgbClr val="FFFFFF"/>
+                </a:solidFill>
+                <a:latin typeface="Calibri"/>
+              </a:rPr>
+              <a:t>RenaultGroup</a:t>
+            </a:r>
+            <a:endParaRPr lang="en-US" dirty="0" err="1"/>
+          </a:p>
+        </p:txBody>
+      </p:sp>
+      <p:sp>
+        <p:nvSpPr>
+          <p:cNvPr id="22" name="TextBox 21">
+            <a:extLst>
+              <a:ext uri="{FF2B5EF4-FFF2-40B4-BE49-F238E27FC236}">
+                <a16:creationId xmlns:a16="http://schemas.microsoft.com/office/drawing/2014/main" id="{03ECC3C2-2D7E-1BC0-CFDF-9BB8F012CA2F}"/>
+              </a:ext>
+            </a:extLst>
+          </p:cNvPr>
+          <p:cNvSpPr txBox="1"/>
+          <p:nvPr/>
+        </p:nvSpPr>
+        <p:spPr>
+          <a:xfrm>
+            <a:off x="548640" y="6400800"/>
+            <a:ext cx="10424160" cy="209288"/>
+          </a:xfrm>
+          <a:prstGeom prst="rect">
+            <a:avLst/>
+          </a:prstGeom>
+          <a:noFill/>
+        </p:spPr>
+        <p:txBody>
+          <a:bodyPr wrap="square" lIns="45720" tIns="27432" rIns="45720" bIns="27432" anchor="t">
+            <a:spAutoFit/>
+          </a:bodyPr>
+          <a:lstStyle/>
+          <a:p>
+            <a:pPr algn="l"/>
+            <a:r>
+              <a:rPr sz="1000" b="0" i="1" dirty="0">
+                <a:solidFill>
+                  <a:schemeClr val="bg2">
+                    <a:lumMod val="90000"/>
+                  </a:schemeClr>
+                </a:solidFill>
+                <a:latin typeface="Calibri"/>
+              </a:rPr>
+              <a:t>Sources : </a:t>
+            </a:r>
+            <a:r>
+              <a:rPr lang="en-US" sz="1000" dirty="0">
+                <a:solidFill>
+                  <a:schemeClr val="bg2">
+                    <a:lumMod val="90000"/>
+                  </a:schemeClr>
+                </a:solidFill>
+                <a:ea typeface="+mn-lt"/>
+                <a:cs typeface="+mn-lt"/>
+              </a:rPr>
+              <a:t>gtmetrix.com</a:t>
+            </a:r>
+            <a:endParaRPr lang="en-US" sz="1000" b="0" i="1" dirty="0">
+              <a:solidFill>
+                <a:schemeClr val="bg2">
+                  <a:lumMod val="90000"/>
+                </a:schemeClr>
+              </a:solidFill>
+              <a:ea typeface="+mn-lt"/>
+              <a:cs typeface="+mn-lt"/>
+            </a:endParaRPr>
+          </a:p>
+        </p:txBody>
+      </p:sp>
+      <p:pic>
+        <p:nvPicPr>
+          <p:cNvPr id="5" name="Picture 4" descr="A screenshot of a computer&#10;&#10;AI-generated content may be incorrect.">
+            <a:extLst>
+              <a:ext uri="{FF2B5EF4-FFF2-40B4-BE49-F238E27FC236}">
+                <a16:creationId xmlns:a16="http://schemas.microsoft.com/office/drawing/2014/main" id="{A8041086-25EA-1C7A-3D84-0733844EB98D}"/>
+              </a:ext>
+            </a:extLst>
+          </p:cNvPr>
+          <p:cNvPicPr>
+            <a:picLocks noChangeAspect="1"/>
+          </p:cNvPicPr>
+          <p:nvPr/>
+        </p:nvPicPr>
+        <p:blipFill>
+          <a:blip r:embed="rId3"/>
+          <a:stretch>
+            <a:fillRect/>
+          </a:stretch>
+        </p:blipFill>
+        <p:spPr>
+          <a:xfrm>
+            <a:off x="2146959" y="1712758"/>
+            <a:ext cx="7888791" cy="4259534"/>
+          </a:xfrm>
+          <a:prstGeom prst="rect">
+            <a:avLst/>
+          </a:prstGeom>
+        </p:spPr>
+      </p:pic>
+    </p:spTree>
+    <p:extLst>
+      <p:ext uri="{BB962C8B-B14F-4D97-AF65-F5344CB8AC3E}">
+        <p14:creationId xmlns:p14="http://schemas.microsoft.com/office/powerpoint/2010/main" val="3237487143"/>
+      </p:ext>
+    </p:extLst>
+  </p:cSld>
+  <p:clrMapOvr>
+    <a:masterClrMapping/>
+  </p:clrMapOvr>
+</p:sld>
+</file>
+
+<file path=ppt/slides/slide19.xml><?xml version="1.0" encoding="utf-8"?>
+<p:sld xmlns:a="http://schemas.openxmlformats.org/drawingml/2006/main" xmlns:r="http://schemas.openxmlformats.org/officeDocument/2006/relationships" xmlns:p="http://schemas.openxmlformats.org/presentationml/2006/main">
   <p:cSld>
     <p:bg>
       <p:bgPr>
@@ -12142,7 +13679,14 @@
         <p:cNvGrpSpPr/>
         <p:nvPr/>
       </p:nvGrpSpPr>
-      <p:grpSpPr/>
+      <p:grpSpPr>
+        <a:xfrm>
+          <a:off x="0" y="0"/>
+          <a:ext cx="0" cy="0"/>
+          <a:chOff x="0" y="0"/>
+          <a:chExt cx="0" cy="0"/>
+        </a:xfrm>
+      </p:grpSpPr>
       <p:sp>
         <p:nvSpPr>
           <p:cNvPr id="2" name="Rounded Rectangle 1"/>
@@ -12182,7 +13726,7 @@
           </a:fontRef>
         </p:style>
         <p:txBody>
-          <a:bodyPr rtlCol="0" anchor="ctr" wrap="square" lIns="45720" rIns="45720" tIns="27432" bIns="27432"/>
+          <a:bodyPr wrap="square" lIns="45720" tIns="27432" rIns="45720" bIns="27432" rtlCol="0" anchor="ctr"/>
           <a:lstStyle/>
           <a:p>
             <a:pPr algn="ctr"/>
@@ -12215,7 +13759,7 @@
           <a:noFill/>
         </p:spPr>
         <p:txBody>
-          <a:bodyPr wrap="square" lIns="45720" rIns="45720" tIns="27432" bIns="27432" anchor="t">
+          <a:bodyPr wrap="square" lIns="45720" tIns="27432" rIns="45720" bIns="27432" anchor="t">
             <a:spAutoFit/>
           </a:bodyPr>
           <a:lstStyle/>
@@ -12250,7 +13794,7 @@
           <a:noFill/>
         </p:spPr>
         <p:txBody>
-          <a:bodyPr wrap="square" lIns="45720" rIns="45720" tIns="27432" bIns="27432" anchor="t">
+          <a:bodyPr wrap="square" lIns="45720" tIns="27432" rIns="45720" bIns="27432" anchor="t">
             <a:spAutoFit/>
           </a:bodyPr>
           <a:lstStyle/>
@@ -12285,7 +13829,7 @@
           <a:noFill/>
         </p:spPr>
         <p:txBody>
-          <a:bodyPr wrap="square" lIns="45720" rIns="45720" tIns="27432" bIns="27432" anchor="t">
+          <a:bodyPr wrap="square" lIns="45720" tIns="27432" rIns="45720" bIns="27432" anchor="t">
             <a:spAutoFit/>
           </a:bodyPr>
           <a:lstStyle/>
@@ -12320,7 +13864,7 @@
           <a:noFill/>
         </p:spPr>
         <p:txBody>
-          <a:bodyPr wrap="square" lIns="45720" rIns="45720" tIns="27432" bIns="27432" anchor="t">
+          <a:bodyPr wrap="square" lIns="45720" tIns="27432" rIns="45720" bIns="27432" anchor="t">
             <a:spAutoFit/>
           </a:bodyPr>
           <a:lstStyle/>
@@ -12423,7 +13967,7 @@
           <a:noFill/>
         </p:spPr>
         <p:txBody>
-          <a:bodyPr wrap="square" lIns="45720" rIns="45720" tIns="27432" bIns="27432" anchor="t">
+          <a:bodyPr wrap="square" lIns="45720" tIns="27432" rIns="45720" bIns="27432" anchor="t">
             <a:spAutoFit/>
           </a:bodyPr>
           <a:lstStyle/>
@@ -12458,7 +14002,7 @@
           <a:noFill/>
         </p:spPr>
         <p:txBody>
-          <a:bodyPr wrap="square" lIns="45720" rIns="45720" tIns="27432" bIns="27432" anchor="t">
+          <a:bodyPr wrap="square" lIns="45720" tIns="27432" rIns="45720" bIns="27432" anchor="t">
             <a:spAutoFit/>
           </a:bodyPr>
           <a:lstStyle/>
@@ -12561,7 +14105,7 @@
           <a:noFill/>
         </p:spPr>
         <p:txBody>
-          <a:bodyPr wrap="square" lIns="45720" rIns="45720" tIns="27432" bIns="27432" anchor="t">
+          <a:bodyPr wrap="square" lIns="45720" tIns="27432" rIns="45720" bIns="27432" anchor="t">
             <a:spAutoFit/>
           </a:bodyPr>
           <a:lstStyle/>
@@ -12596,7 +14140,7 @@
           <a:noFill/>
         </p:spPr>
         <p:txBody>
-          <a:bodyPr wrap="square" lIns="45720" rIns="45720" tIns="27432" bIns="27432" anchor="t">
+          <a:bodyPr wrap="square" lIns="45720" tIns="27432" rIns="45720" bIns="27432" anchor="t">
             <a:spAutoFit/>
           </a:bodyPr>
           <a:lstStyle/>
@@ -12725,6 +14269,7 @@
           <a:lstStyle/>
           <a:p>
             <a:pPr algn="ctr"/>
+            <a:endParaRPr/>
           </a:p>
         </p:txBody>
       </p:sp>
@@ -12745,7 +14290,7 @@
           <a:noFill/>
         </p:spPr>
         <p:txBody>
-          <a:bodyPr wrap="square" lIns="45720" rIns="45720" tIns="27432" bIns="27432" anchor="ctr">
+          <a:bodyPr wrap="square" lIns="45720" tIns="27432" rIns="45720" bIns="27432" anchor="ctr">
             <a:spAutoFit/>
           </a:bodyPr>
           <a:lstStyle/>
@@ -12772,7 +14317,7 @@
 </file>
 
 <file path=ppt/slides/slide2.xml><?xml version="1.0" encoding="utf-8"?>
-<p:sld xmlns:a="http://schemas.openxmlformats.org/drawingml/2006/main" xmlns:p="http://schemas.openxmlformats.org/presentationml/2006/main" xmlns:r="http://schemas.openxmlformats.org/officeDocument/2006/relationships">
+<p:sld xmlns:a="http://schemas.openxmlformats.org/drawingml/2006/main" xmlns:r="http://schemas.openxmlformats.org/officeDocument/2006/relationships" xmlns:p="http://schemas.openxmlformats.org/presentationml/2006/main">
   <p:cSld>
     <p:bg>
       <p:bgPr>
@@ -12788,7 +14333,14 @@
         <p:cNvGrpSpPr/>
         <p:nvPr/>
       </p:nvGrpSpPr>
-      <p:grpSpPr/>
+      <p:grpSpPr>
+        <a:xfrm>
+          <a:off x="0" y="0"/>
+          <a:ext cx="0" cy="0"/>
+          <a:chOff x="0" y="0"/>
+          <a:chExt cx="0" cy="0"/>
+        </a:xfrm>
+      </p:grpSpPr>
       <p:sp>
         <p:nvSpPr>
           <p:cNvPr id="2" name="Rounded Rectangle 1"/>
@@ -12828,7 +14380,7 @@
           </a:fontRef>
         </p:style>
         <p:txBody>
-          <a:bodyPr rtlCol="0" anchor="ctr" wrap="square" lIns="45720" rIns="45720" tIns="27432" bIns="27432"/>
+          <a:bodyPr wrap="square" lIns="45720" tIns="27432" rIns="45720" bIns="27432" rtlCol="0" anchor="ctr"/>
           <a:lstStyle/>
           <a:p>
             <a:pPr algn="ctr"/>
@@ -12861,7 +14413,7 @@
           <a:noFill/>
         </p:spPr>
         <p:txBody>
-          <a:bodyPr wrap="square" lIns="45720" rIns="45720" tIns="27432" bIns="27432" anchor="t">
+          <a:bodyPr wrap="square" lIns="45720" tIns="27432" rIns="45720" bIns="27432" anchor="t">
             <a:spAutoFit/>
           </a:bodyPr>
           <a:lstStyle/>
@@ -12896,7 +14448,7 @@
           <a:noFill/>
         </p:spPr>
         <p:txBody>
-          <a:bodyPr wrap="square" lIns="45720" rIns="45720" tIns="27432" bIns="27432" anchor="t">
+          <a:bodyPr wrap="square" lIns="45720" tIns="27432" rIns="45720" bIns="27432" anchor="t">
             <a:spAutoFit/>
           </a:bodyPr>
           <a:lstStyle/>
@@ -12957,6 +14509,7 @@
           <a:lstStyle/>
           <a:p>
             <a:pPr algn="ctr"/>
+            <a:endParaRPr/>
           </a:p>
         </p:txBody>
       </p:sp>
@@ -12977,7 +14530,7 @@
           <a:noFill/>
         </p:spPr>
         <p:txBody>
-          <a:bodyPr wrap="square" lIns="45720" rIns="45720" tIns="27432" bIns="27432" anchor="t">
+          <a:bodyPr wrap="square" lIns="45720" tIns="27432" rIns="45720" bIns="27432" anchor="t">
             <a:spAutoFit/>
           </a:bodyPr>
           <a:lstStyle/>
@@ -13012,7 +14565,7 @@
           <a:noFill/>
         </p:spPr>
         <p:txBody>
-          <a:bodyPr wrap="square" lIns="45720" rIns="45720" tIns="27432" bIns="27432" anchor="t">
+          <a:bodyPr wrap="square" lIns="45720" tIns="27432" rIns="45720" bIns="27432" anchor="t">
             <a:spAutoFit/>
           </a:bodyPr>
           <a:lstStyle/>
@@ -13073,6 +14626,7 @@
           <a:lstStyle/>
           <a:p>
             <a:pPr algn="ctr"/>
+            <a:endParaRPr/>
           </a:p>
         </p:txBody>
       </p:sp>
@@ -13093,7 +14647,7 @@
           <a:noFill/>
         </p:spPr>
         <p:txBody>
-          <a:bodyPr wrap="square" lIns="45720" rIns="45720" tIns="27432" bIns="27432" anchor="t">
+          <a:bodyPr wrap="square" lIns="45720" tIns="27432" rIns="45720" bIns="27432" anchor="t">
             <a:spAutoFit/>
           </a:bodyPr>
           <a:lstStyle/>
@@ -13128,7 +14682,7 @@
           <a:noFill/>
         </p:spPr>
         <p:txBody>
-          <a:bodyPr wrap="square" lIns="45720" rIns="45720" tIns="27432" bIns="27432" anchor="t">
+          <a:bodyPr wrap="square" lIns="45720" tIns="27432" rIns="45720" bIns="27432" anchor="t">
             <a:spAutoFit/>
           </a:bodyPr>
           <a:lstStyle/>
@@ -13189,6 +14743,7 @@
           <a:lstStyle/>
           <a:p>
             <a:pPr algn="ctr"/>
+            <a:endParaRPr/>
           </a:p>
         </p:txBody>
       </p:sp>
@@ -13209,7 +14764,7 @@
           <a:noFill/>
         </p:spPr>
         <p:txBody>
-          <a:bodyPr wrap="square" lIns="45720" rIns="45720" tIns="27432" bIns="27432" anchor="t">
+          <a:bodyPr wrap="square" lIns="45720" tIns="27432" rIns="45720" bIns="27432" anchor="t">
             <a:spAutoFit/>
           </a:bodyPr>
           <a:lstStyle/>
@@ -13244,7 +14799,7 @@
           <a:noFill/>
         </p:spPr>
         <p:txBody>
-          <a:bodyPr wrap="square" lIns="45720" rIns="45720" tIns="27432" bIns="27432" anchor="t">
+          <a:bodyPr wrap="square" lIns="45720" tIns="27432" rIns="45720" bIns="27432" anchor="t">
             <a:spAutoFit/>
           </a:bodyPr>
           <a:lstStyle/>
@@ -13305,6 +14860,7 @@
           <a:lstStyle/>
           <a:p>
             <a:pPr algn="ctr"/>
+            <a:endParaRPr/>
           </a:p>
         </p:txBody>
       </p:sp>
@@ -13325,7 +14881,7 @@
           <a:noFill/>
         </p:spPr>
         <p:txBody>
-          <a:bodyPr wrap="square" lIns="45720" rIns="45720" tIns="27432" bIns="27432" anchor="t">
+          <a:bodyPr wrap="square" lIns="45720" tIns="27432" rIns="45720" bIns="27432" anchor="t">
             <a:spAutoFit/>
           </a:bodyPr>
           <a:lstStyle/>
@@ -13360,7 +14916,7 @@
           <a:noFill/>
         </p:spPr>
         <p:txBody>
-          <a:bodyPr wrap="square" lIns="45720" rIns="45720" tIns="27432" bIns="27432" anchor="t">
+          <a:bodyPr wrap="square" lIns="45720" tIns="27432" rIns="45720" bIns="27432" anchor="t">
             <a:spAutoFit/>
           </a:bodyPr>
           <a:lstStyle/>
@@ -13421,6 +14977,7 @@
           <a:lstStyle/>
           <a:p>
             <a:pPr algn="ctr"/>
+            <a:endParaRPr/>
           </a:p>
         </p:txBody>
       </p:sp>
@@ -13441,7 +14998,7 @@
           <a:noFill/>
         </p:spPr>
         <p:txBody>
-          <a:bodyPr wrap="square" lIns="45720" rIns="45720" tIns="27432" bIns="27432" anchor="t">
+          <a:bodyPr wrap="square" lIns="45720" tIns="27432" rIns="45720" bIns="27432" anchor="t">
             <a:spAutoFit/>
           </a:bodyPr>
           <a:lstStyle/>
@@ -13476,7 +15033,7 @@
           <a:noFill/>
         </p:spPr>
         <p:txBody>
-          <a:bodyPr wrap="square" lIns="45720" rIns="45720" tIns="27432" bIns="27432" anchor="t">
+          <a:bodyPr wrap="square" lIns="45720" tIns="27432" rIns="45720" bIns="27432" anchor="t">
             <a:spAutoFit/>
           </a:bodyPr>
           <a:lstStyle/>
@@ -13511,7 +15068,7 @@
           <a:noFill/>
         </p:spPr>
         <p:txBody>
-          <a:bodyPr wrap="square" lIns="45720" rIns="45720" tIns="27432" bIns="27432" anchor="t">
+          <a:bodyPr wrap="square" lIns="45720" tIns="27432" rIns="45720" bIns="27432" anchor="t">
             <a:spAutoFit/>
           </a:bodyPr>
           <a:lstStyle/>
@@ -13566,7 +15123,7 @@
           </a:fontRef>
         </p:style>
         <p:txBody>
-          <a:bodyPr rtlCol="0" anchor="ctr" wrap="square" lIns="45720" rIns="45720" tIns="27432" bIns="27432"/>
+          <a:bodyPr wrap="square" lIns="45720" tIns="27432" rIns="45720" bIns="27432" rtlCol="0" anchor="ctr"/>
           <a:lstStyle/>
           <a:p>
             <a:pPr algn="ctr"/>
@@ -13599,7 +15156,7 @@
           <a:noFill/>
         </p:spPr>
         <p:txBody>
-          <a:bodyPr wrap="square" lIns="45720" rIns="45720" tIns="27432" bIns="27432" anchor="t">
+          <a:bodyPr wrap="square" lIns="45720" tIns="27432" rIns="45720" bIns="27432" anchor="t">
             <a:spAutoFit/>
           </a:bodyPr>
           <a:lstStyle/>
@@ -13654,7 +15211,7 @@
           </a:fontRef>
         </p:style>
         <p:txBody>
-          <a:bodyPr rtlCol="0" anchor="ctr" wrap="square" lIns="45720" rIns="45720" tIns="27432" bIns="27432"/>
+          <a:bodyPr wrap="square" lIns="45720" tIns="27432" rIns="45720" bIns="27432" rtlCol="0" anchor="ctr"/>
           <a:lstStyle/>
           <a:p>
             <a:pPr algn="ctr"/>
@@ -13687,7 +15244,7 @@
           <a:noFill/>
         </p:spPr>
         <p:txBody>
-          <a:bodyPr wrap="square" lIns="45720" rIns="45720" tIns="27432" bIns="27432" anchor="t">
+          <a:bodyPr wrap="square" lIns="45720" tIns="27432" rIns="45720" bIns="27432" anchor="t">
             <a:spAutoFit/>
           </a:bodyPr>
           <a:lstStyle/>
@@ -13742,7 +15299,7 @@
           </a:fontRef>
         </p:style>
         <p:txBody>
-          <a:bodyPr rtlCol="0" anchor="ctr" wrap="square" lIns="45720" rIns="45720" tIns="27432" bIns="27432"/>
+          <a:bodyPr wrap="square" lIns="45720" tIns="27432" rIns="45720" bIns="27432" rtlCol="0" anchor="ctr"/>
           <a:lstStyle/>
           <a:p>
             <a:pPr algn="ctr"/>
@@ -13775,7 +15332,7 @@
           <a:noFill/>
         </p:spPr>
         <p:txBody>
-          <a:bodyPr wrap="square" lIns="45720" rIns="45720" tIns="27432" bIns="27432" anchor="t">
+          <a:bodyPr wrap="square" lIns="45720" tIns="27432" rIns="45720" bIns="27432" anchor="t">
             <a:spAutoFit/>
           </a:bodyPr>
           <a:lstStyle/>
@@ -13810,7 +15367,7 @@
           <a:noFill/>
         </p:spPr>
         <p:txBody>
-          <a:bodyPr wrap="square" lIns="45720" rIns="45720" tIns="27432" bIns="27432" anchor="t">
+          <a:bodyPr wrap="square" lIns="45720" tIns="27432" rIns="45720" bIns="27432" anchor="t">
             <a:spAutoFit/>
           </a:bodyPr>
           <a:lstStyle/>
@@ -13845,7 +15402,7 @@
           <a:noFill/>
         </p:spPr>
         <p:txBody>
-          <a:bodyPr wrap="square" lIns="45720" rIns="45720" tIns="27432" bIns="27432" anchor="t">
+          <a:bodyPr wrap="square" lIns="45720" tIns="27432" rIns="45720" bIns="27432" anchor="t">
             <a:spAutoFit/>
           </a:bodyPr>
           <a:lstStyle/>
@@ -13872,7 +15429,7 @@
 </file>
 
 <file path=ppt/slides/slide3.xml><?xml version="1.0" encoding="utf-8"?>
-<p:sld xmlns:a="http://schemas.openxmlformats.org/drawingml/2006/main" xmlns:p="http://schemas.openxmlformats.org/presentationml/2006/main" xmlns:r="http://schemas.openxmlformats.org/officeDocument/2006/relationships">
+<p:sld xmlns:a="http://schemas.openxmlformats.org/drawingml/2006/main" xmlns:r="http://schemas.openxmlformats.org/officeDocument/2006/relationships" xmlns:p="http://schemas.openxmlformats.org/presentationml/2006/main">
   <p:cSld>
     <p:bg>
       <p:bgPr>
@@ -13888,7 +15445,14 @@
         <p:cNvGrpSpPr/>
         <p:nvPr/>
       </p:nvGrpSpPr>
-      <p:grpSpPr/>
+      <p:grpSpPr>
+        <a:xfrm>
+          <a:off x="0" y="0"/>
+          <a:ext cx="0" cy="0"/>
+          <a:chOff x="0" y="0"/>
+          <a:chExt cx="0" cy="0"/>
+        </a:xfrm>
+      </p:grpSpPr>
       <p:sp>
         <p:nvSpPr>
           <p:cNvPr id="2" name="Rounded Rectangle 1"/>
@@ -13928,7 +15492,7 @@
           </a:fontRef>
         </p:style>
         <p:txBody>
-          <a:bodyPr rtlCol="0" anchor="ctr" wrap="square" lIns="45720" rIns="45720" tIns="27432" bIns="27432"/>
+          <a:bodyPr wrap="square" lIns="45720" tIns="27432" rIns="45720" bIns="27432" rtlCol="0" anchor="ctr"/>
           <a:lstStyle/>
           <a:p>
             <a:pPr algn="ctr"/>
@@ -13961,7 +15525,7 @@
           <a:noFill/>
         </p:spPr>
         <p:txBody>
-          <a:bodyPr wrap="square" lIns="45720" rIns="45720" tIns="27432" bIns="27432" anchor="t">
+          <a:bodyPr wrap="square" lIns="45720" tIns="27432" rIns="45720" bIns="27432" anchor="t">
             <a:spAutoFit/>
           </a:bodyPr>
           <a:lstStyle/>
@@ -13996,7 +15560,7 @@
           <a:noFill/>
         </p:spPr>
         <p:txBody>
-          <a:bodyPr wrap="square" lIns="45720" rIns="45720" tIns="27432" bIns="27432" anchor="t">
+          <a:bodyPr wrap="square" lIns="45720" tIns="27432" rIns="45720" bIns="27432" anchor="t">
             <a:spAutoFit/>
           </a:bodyPr>
           <a:lstStyle/>
@@ -14090,6 +15654,7 @@
           <a:lstStyle/>
           <a:p>
             <a:pPr algn="ctr"/>
+            <a:endParaRPr/>
           </a:p>
         </p:txBody>
       </p:sp>
@@ -14110,7 +15675,7 @@
           <a:noFill/>
         </p:spPr>
         <p:txBody>
-          <a:bodyPr wrap="square" lIns="45720" rIns="45720" tIns="27432" bIns="27432" anchor="t">
+          <a:bodyPr wrap="square" lIns="45720" tIns="27432" rIns="45720" bIns="27432" anchor="t">
             <a:spAutoFit/>
           </a:bodyPr>
           <a:lstStyle/>
@@ -14145,7 +15710,7 @@
           <a:noFill/>
         </p:spPr>
         <p:txBody>
-          <a:bodyPr wrap="square" lIns="45720" rIns="45720" tIns="27432" bIns="27432" anchor="t">
+          <a:bodyPr wrap="square" lIns="45720" tIns="27432" rIns="45720" bIns="27432" anchor="t">
             <a:spAutoFit/>
           </a:bodyPr>
           <a:lstStyle/>
@@ -14180,7 +15745,7 @@
           <a:noFill/>
         </p:spPr>
         <p:txBody>
-          <a:bodyPr wrap="square" lIns="45720" rIns="45720" tIns="27432" bIns="27432" anchor="t">
+          <a:bodyPr wrap="square" lIns="45720" tIns="27432" rIns="45720" bIns="27432" anchor="t">
             <a:spAutoFit/>
           </a:bodyPr>
           <a:lstStyle/>
@@ -14239,6 +15804,7 @@
           <a:lstStyle/>
           <a:p>
             <a:pPr algn="ctr"/>
+            <a:endParaRPr/>
           </a:p>
         </p:txBody>
       </p:sp>
@@ -14259,7 +15825,7 @@
           <a:noFill/>
         </p:spPr>
         <p:txBody>
-          <a:bodyPr wrap="square" lIns="45720" rIns="45720" tIns="27432" bIns="27432" anchor="t">
+          <a:bodyPr wrap="square" lIns="45720" tIns="27432" rIns="45720" bIns="27432" anchor="t">
             <a:spAutoFit/>
           </a:bodyPr>
           <a:lstStyle/>
@@ -14294,7 +15860,7 @@
           <a:noFill/>
         </p:spPr>
         <p:txBody>
-          <a:bodyPr wrap="square" lIns="45720" rIns="45720" tIns="27432" bIns="27432" anchor="t">
+          <a:bodyPr wrap="square" lIns="45720" tIns="27432" rIns="45720" bIns="27432" anchor="t">
             <a:spAutoFit/>
           </a:bodyPr>
           <a:lstStyle/>
@@ -14329,7 +15895,7 @@
           <a:noFill/>
         </p:spPr>
         <p:txBody>
-          <a:bodyPr wrap="square" lIns="45720" rIns="45720" tIns="27432" bIns="27432" anchor="t">
+          <a:bodyPr wrap="square" lIns="45720" tIns="27432" rIns="45720" bIns="27432" anchor="t">
             <a:spAutoFit/>
           </a:bodyPr>
           <a:lstStyle/>
@@ -14388,6 +15954,7 @@
           <a:lstStyle/>
           <a:p>
             <a:pPr algn="ctr"/>
+            <a:endParaRPr/>
           </a:p>
         </p:txBody>
       </p:sp>
@@ -14408,7 +15975,7 @@
           <a:noFill/>
         </p:spPr>
         <p:txBody>
-          <a:bodyPr wrap="square" lIns="45720" rIns="45720" tIns="27432" bIns="27432" anchor="t">
+          <a:bodyPr wrap="square" lIns="45720" tIns="27432" rIns="45720" bIns="27432" anchor="t">
             <a:spAutoFit/>
           </a:bodyPr>
           <a:lstStyle/>
@@ -14443,7 +16010,7 @@
           <a:noFill/>
         </p:spPr>
         <p:txBody>
-          <a:bodyPr wrap="square" lIns="45720" rIns="45720" tIns="27432" bIns="27432" anchor="t">
+          <a:bodyPr wrap="square" lIns="45720" tIns="27432" rIns="45720" bIns="27432" anchor="t">
             <a:spAutoFit/>
           </a:bodyPr>
           <a:lstStyle/>
@@ -14478,7 +16045,7 @@
           <a:noFill/>
         </p:spPr>
         <p:txBody>
-          <a:bodyPr wrap="square" lIns="45720" rIns="45720" tIns="27432" bIns="27432" anchor="t">
+          <a:bodyPr wrap="square" lIns="45720" tIns="27432" rIns="45720" bIns="27432" anchor="t">
             <a:spAutoFit/>
           </a:bodyPr>
           <a:lstStyle/>
@@ -14537,6 +16104,7 @@
           <a:lstStyle/>
           <a:p>
             <a:pPr algn="ctr"/>
+            <a:endParaRPr/>
           </a:p>
         </p:txBody>
       </p:sp>
@@ -14557,7 +16125,7 @@
           <a:noFill/>
         </p:spPr>
         <p:txBody>
-          <a:bodyPr wrap="square" lIns="45720" rIns="45720" tIns="27432" bIns="27432" anchor="t">
+          <a:bodyPr wrap="square" lIns="45720" tIns="27432" rIns="45720" bIns="27432" anchor="t">
             <a:spAutoFit/>
           </a:bodyPr>
           <a:lstStyle/>
@@ -14592,7 +16160,7 @@
           <a:noFill/>
         </p:spPr>
         <p:txBody>
-          <a:bodyPr wrap="square" lIns="45720" rIns="45720" tIns="27432" bIns="27432" anchor="t">
+          <a:bodyPr wrap="square" lIns="45720" tIns="27432" rIns="45720" bIns="27432" anchor="t">
             <a:spAutoFit/>
           </a:bodyPr>
           <a:lstStyle/>
@@ -14627,7 +16195,7 @@
           <a:noFill/>
         </p:spPr>
         <p:txBody>
-          <a:bodyPr wrap="square" lIns="45720" rIns="45720" tIns="27432" bIns="27432" anchor="t">
+          <a:bodyPr wrap="square" lIns="45720" tIns="27432" rIns="45720" bIns="27432" anchor="t">
             <a:spAutoFit/>
           </a:bodyPr>
           <a:lstStyle/>
@@ -14686,6 +16254,7 @@
           <a:lstStyle/>
           <a:p>
             <a:pPr algn="ctr"/>
+            <a:endParaRPr/>
           </a:p>
         </p:txBody>
       </p:sp>
@@ -14706,7 +16275,7 @@
           <a:noFill/>
         </p:spPr>
         <p:txBody>
-          <a:bodyPr wrap="square" lIns="45720" rIns="45720" tIns="27432" bIns="27432" anchor="t">
+          <a:bodyPr wrap="square" lIns="45720" tIns="27432" rIns="45720" bIns="27432" anchor="t">
             <a:spAutoFit/>
           </a:bodyPr>
           <a:lstStyle/>
@@ -14741,7 +16310,7 @@
           <a:noFill/>
         </p:spPr>
         <p:txBody>
-          <a:bodyPr wrap="square" lIns="45720" rIns="45720" tIns="27432" bIns="27432" anchor="t">
+          <a:bodyPr wrap="square" lIns="45720" tIns="27432" rIns="45720" bIns="27432" anchor="t">
             <a:spAutoFit/>
           </a:bodyPr>
           <a:lstStyle/>
@@ -14776,7 +16345,7 @@
           <a:noFill/>
         </p:spPr>
         <p:txBody>
-          <a:bodyPr wrap="square" lIns="45720" rIns="45720" tIns="27432" bIns="27432" anchor="t">
+          <a:bodyPr wrap="square" lIns="45720" tIns="27432" rIns="45720" bIns="27432" anchor="t">
             <a:spAutoFit/>
           </a:bodyPr>
           <a:lstStyle/>
@@ -14835,6 +16404,7 @@
           <a:lstStyle/>
           <a:p>
             <a:pPr algn="ctr"/>
+            <a:endParaRPr/>
           </a:p>
         </p:txBody>
       </p:sp>
@@ -14855,7 +16425,7 @@
           <a:noFill/>
         </p:spPr>
         <p:txBody>
-          <a:bodyPr wrap="square" lIns="45720" rIns="45720" tIns="27432" bIns="27432" anchor="t">
+          <a:bodyPr wrap="square" lIns="45720" tIns="27432" rIns="45720" bIns="27432" anchor="t">
             <a:spAutoFit/>
           </a:bodyPr>
           <a:lstStyle/>
@@ -14890,7 +16460,7 @@
           <a:noFill/>
         </p:spPr>
         <p:txBody>
-          <a:bodyPr wrap="square" lIns="45720" rIns="45720" tIns="27432" bIns="27432" anchor="t">
+          <a:bodyPr wrap="square" lIns="45720" tIns="27432" rIns="45720" bIns="27432" anchor="t">
             <a:spAutoFit/>
           </a:bodyPr>
           <a:lstStyle/>
@@ -14925,7 +16495,7 @@
           <a:noFill/>
         </p:spPr>
         <p:txBody>
-          <a:bodyPr wrap="square" lIns="45720" rIns="45720" tIns="27432" bIns="27432" anchor="t">
+          <a:bodyPr wrap="square" lIns="45720" tIns="27432" rIns="45720" bIns="27432" anchor="t">
             <a:spAutoFit/>
           </a:bodyPr>
           <a:lstStyle/>
@@ -14984,6 +16554,7 @@
           <a:lstStyle/>
           <a:p>
             <a:pPr algn="ctr"/>
+            <a:endParaRPr/>
           </a:p>
         </p:txBody>
       </p:sp>
@@ -15004,7 +16575,7 @@
           <a:noFill/>
         </p:spPr>
         <p:txBody>
-          <a:bodyPr wrap="square" lIns="45720" rIns="45720" tIns="27432" bIns="27432" anchor="t">
+          <a:bodyPr wrap="square" lIns="45720" tIns="27432" rIns="45720" bIns="27432" anchor="t">
             <a:spAutoFit/>
           </a:bodyPr>
           <a:lstStyle/>
@@ -15039,7 +16610,7 @@
           <a:noFill/>
         </p:spPr>
         <p:txBody>
-          <a:bodyPr wrap="square" lIns="45720" rIns="45720" tIns="27432" bIns="27432" anchor="t">
+          <a:bodyPr wrap="square" lIns="45720" tIns="27432" rIns="45720" bIns="27432" anchor="t">
             <a:spAutoFit/>
           </a:bodyPr>
           <a:lstStyle/>
@@ -15074,7 +16645,7 @@
           <a:noFill/>
         </p:spPr>
         <p:txBody>
-          <a:bodyPr wrap="square" lIns="45720" rIns="45720" tIns="27432" bIns="27432" anchor="t">
+          <a:bodyPr wrap="square" lIns="45720" tIns="27432" rIns="45720" bIns="27432" anchor="t">
             <a:spAutoFit/>
           </a:bodyPr>
           <a:lstStyle/>
@@ -15135,6 +16706,7 @@
           <a:lstStyle/>
           <a:p>
             <a:pPr algn="ctr"/>
+            <a:endParaRPr/>
           </a:p>
         </p:txBody>
       </p:sp>
@@ -15155,7 +16727,7 @@
           <a:noFill/>
         </p:spPr>
         <p:txBody>
-          <a:bodyPr wrap="square" lIns="45720" rIns="45720" tIns="27432" bIns="27432" anchor="ctr">
+          <a:bodyPr wrap="square" lIns="45720" tIns="27432" rIns="45720" bIns="27432" anchor="ctr">
             <a:spAutoFit/>
           </a:bodyPr>
           <a:lstStyle/>
@@ -15199,7 +16771,7 @@
           <a:noFill/>
         </p:spPr>
         <p:txBody>
-          <a:bodyPr wrap="square" lIns="45720" rIns="45720" tIns="27432" bIns="27432" anchor="t">
+          <a:bodyPr wrap="square" lIns="45720" tIns="27432" rIns="45720" bIns="27432" anchor="t">
             <a:spAutoFit/>
           </a:bodyPr>
           <a:lstStyle/>
@@ -15226,7 +16798,7 @@
 </file>
 
 <file path=ppt/slides/slide4.xml><?xml version="1.0" encoding="utf-8"?>
-<p:sld xmlns:a="http://schemas.openxmlformats.org/drawingml/2006/main" xmlns:p="http://schemas.openxmlformats.org/presentationml/2006/main" xmlns:r="http://schemas.openxmlformats.org/officeDocument/2006/relationships">
+<p:sld xmlns:a="http://schemas.openxmlformats.org/drawingml/2006/main" xmlns:r="http://schemas.openxmlformats.org/officeDocument/2006/relationships" xmlns:p="http://schemas.openxmlformats.org/presentationml/2006/main">
   <p:cSld>
     <p:bg>
       <p:bgPr>
@@ -15242,7 +16814,14 @@
         <p:cNvGrpSpPr/>
         <p:nvPr/>
       </p:nvGrpSpPr>
-      <p:grpSpPr/>
+      <p:grpSpPr>
+        <a:xfrm>
+          <a:off x="0" y="0"/>
+          <a:ext cx="0" cy="0"/>
+          <a:chOff x="0" y="0"/>
+          <a:chExt cx="0" cy="0"/>
+        </a:xfrm>
+      </p:grpSpPr>
       <p:sp>
         <p:nvSpPr>
           <p:cNvPr id="2" name="Rounded Rectangle 1"/>
@@ -15282,7 +16861,7 @@
           </a:fontRef>
         </p:style>
         <p:txBody>
-          <a:bodyPr rtlCol="0" anchor="ctr" wrap="square" lIns="45720" rIns="45720" tIns="27432" bIns="27432"/>
+          <a:bodyPr wrap="square" lIns="45720" tIns="27432" rIns="45720" bIns="27432" rtlCol="0" anchor="ctr"/>
           <a:lstStyle/>
           <a:p>
             <a:pPr algn="ctr"/>
@@ -15315,7 +16894,7 @@
           <a:noFill/>
         </p:spPr>
         <p:txBody>
-          <a:bodyPr wrap="square" lIns="45720" rIns="45720" tIns="27432" bIns="27432" anchor="t">
+          <a:bodyPr wrap="square" lIns="45720" tIns="27432" rIns="45720" bIns="27432" anchor="t">
             <a:spAutoFit/>
           </a:bodyPr>
           <a:lstStyle/>
@@ -15350,7 +16929,7 @@
           <a:noFill/>
         </p:spPr>
         <p:txBody>
-          <a:bodyPr wrap="square" lIns="45720" rIns="45720" tIns="27432" bIns="27432" anchor="t">
+          <a:bodyPr wrap="square" lIns="45720" tIns="27432" rIns="45720" bIns="27432" anchor="t">
             <a:spAutoFit/>
           </a:bodyPr>
           <a:lstStyle/>
@@ -15385,7 +16964,7 @@
           <a:noFill/>
         </p:spPr>
         <p:txBody>
-          <a:bodyPr wrap="square" lIns="45720" rIns="45720" tIns="27432" bIns="27432" anchor="t">
+          <a:bodyPr wrap="square" lIns="45720" tIns="27432" rIns="45720" bIns="27432" anchor="t">
             <a:spAutoFit/>
           </a:bodyPr>
           <a:lstStyle/>
@@ -15446,6 +17025,7 @@
           <a:lstStyle/>
           <a:p>
             <a:pPr algn="ctr"/>
+            <a:endParaRPr/>
           </a:p>
         </p:txBody>
       </p:sp>
@@ -15466,7 +17046,7 @@
           <a:noFill/>
         </p:spPr>
         <p:txBody>
-          <a:bodyPr wrap="square" lIns="45720" rIns="45720" tIns="27432" bIns="27432" anchor="t">
+          <a:bodyPr wrap="square" lIns="45720" tIns="27432" rIns="45720" bIns="27432" anchor="t">
             <a:spAutoFit/>
           </a:bodyPr>
           <a:lstStyle/>
@@ -15501,7 +17081,7 @@
           <a:noFill/>
         </p:spPr>
         <p:txBody>
-          <a:bodyPr wrap="square" lIns="45720" rIns="45720" tIns="27432" bIns="27432" anchor="t">
+          <a:bodyPr wrap="square" lIns="45720" tIns="27432" rIns="45720" bIns="27432" anchor="t">
             <a:spAutoFit/>
           </a:bodyPr>
           <a:lstStyle/>
@@ -15536,7 +17116,7 @@
           <a:noFill/>
         </p:spPr>
         <p:txBody>
-          <a:bodyPr wrap="square" lIns="45720" rIns="45720" tIns="27432" bIns="27432" anchor="t">
+          <a:bodyPr wrap="square" lIns="45720" tIns="27432" rIns="45720" bIns="27432" anchor="t">
             <a:spAutoFit/>
           </a:bodyPr>
           <a:lstStyle/>
@@ -15597,6 +17177,7 @@
           <a:lstStyle/>
           <a:p>
             <a:pPr algn="ctr"/>
+            <a:endParaRPr/>
           </a:p>
         </p:txBody>
       </p:sp>
@@ -15617,7 +17198,7 @@
           <a:noFill/>
         </p:spPr>
         <p:txBody>
-          <a:bodyPr wrap="square" lIns="45720" rIns="45720" tIns="27432" bIns="27432" anchor="t">
+          <a:bodyPr wrap="square" lIns="45720" tIns="27432" rIns="45720" bIns="27432" anchor="t">
             <a:spAutoFit/>
           </a:bodyPr>
           <a:lstStyle/>
@@ -15652,7 +17233,7 @@
           <a:noFill/>
         </p:spPr>
         <p:txBody>
-          <a:bodyPr wrap="square" lIns="45720" rIns="45720" tIns="27432" bIns="27432" anchor="t">
+          <a:bodyPr wrap="square" lIns="45720" tIns="27432" rIns="45720" bIns="27432" anchor="t">
             <a:spAutoFit/>
           </a:bodyPr>
           <a:lstStyle/>
@@ -15687,7 +17268,7 @@
           <a:noFill/>
         </p:spPr>
         <p:txBody>
-          <a:bodyPr wrap="square" lIns="45720" rIns="45720" tIns="27432" bIns="27432" anchor="t">
+          <a:bodyPr wrap="square" lIns="45720" tIns="27432" rIns="45720" bIns="27432" anchor="t">
             <a:spAutoFit/>
           </a:bodyPr>
           <a:lstStyle/>
@@ -15714,7 +17295,7 @@
 </file>
 
 <file path=ppt/slides/slide5.xml><?xml version="1.0" encoding="utf-8"?>
-<p:sld xmlns:a="http://schemas.openxmlformats.org/drawingml/2006/main" xmlns:p="http://schemas.openxmlformats.org/presentationml/2006/main" xmlns:r="http://schemas.openxmlformats.org/officeDocument/2006/relationships">
+<p:sld xmlns:a="http://schemas.openxmlformats.org/drawingml/2006/main" xmlns:r="http://schemas.openxmlformats.org/officeDocument/2006/relationships" xmlns:p="http://schemas.openxmlformats.org/presentationml/2006/main">
   <p:cSld>
     <p:bg>
       <p:bgPr>
@@ -15730,7 +17311,14 @@
         <p:cNvGrpSpPr/>
         <p:nvPr/>
       </p:nvGrpSpPr>
-      <p:grpSpPr/>
+      <p:grpSpPr>
+        <a:xfrm>
+          <a:off x="0" y="0"/>
+          <a:ext cx="0" cy="0"/>
+          <a:chOff x="0" y="0"/>
+          <a:chExt cx="0" cy="0"/>
+        </a:xfrm>
+      </p:grpSpPr>
       <p:sp>
         <p:nvSpPr>
           <p:cNvPr id="2" name="Rounded Rectangle 1"/>
@@ -15770,7 +17358,7 @@
           </a:fontRef>
         </p:style>
         <p:txBody>
-          <a:bodyPr rtlCol="0" anchor="ctr" wrap="square" lIns="45720" rIns="45720" tIns="27432" bIns="27432"/>
+          <a:bodyPr wrap="square" lIns="45720" tIns="27432" rIns="45720" bIns="27432" rtlCol="0" anchor="ctr"/>
           <a:lstStyle/>
           <a:p>
             <a:pPr algn="ctr"/>
@@ -15803,7 +17391,7 @@
           <a:noFill/>
         </p:spPr>
         <p:txBody>
-          <a:bodyPr wrap="square" lIns="45720" rIns="45720" tIns="27432" bIns="27432" anchor="t">
+          <a:bodyPr wrap="square" lIns="45720" tIns="27432" rIns="45720" bIns="27432" anchor="t">
             <a:spAutoFit/>
           </a:bodyPr>
           <a:lstStyle/>
@@ -15838,7 +17426,7 @@
           <a:noFill/>
         </p:spPr>
         <p:txBody>
-          <a:bodyPr wrap="square" lIns="45720" rIns="45720" tIns="27432" bIns="27432" anchor="t">
+          <a:bodyPr wrap="square" lIns="45720" tIns="27432" rIns="45720" bIns="27432" anchor="t">
             <a:spAutoFit/>
           </a:bodyPr>
           <a:lstStyle/>
@@ -15899,6 +17487,7 @@
           <a:lstStyle/>
           <a:p>
             <a:pPr algn="ctr"/>
+            <a:endParaRPr/>
           </a:p>
         </p:txBody>
       </p:sp>
@@ -15919,7 +17508,7 @@
           <a:noFill/>
         </p:spPr>
         <p:txBody>
-          <a:bodyPr wrap="square" lIns="45720" rIns="45720" tIns="27432" bIns="27432" anchor="ctr">
+          <a:bodyPr wrap="square" lIns="45720" tIns="27432" rIns="45720" bIns="27432" anchor="ctr">
             <a:spAutoFit/>
           </a:bodyPr>
           <a:lstStyle/>
@@ -15989,6 +17578,7 @@
           <a:lstStyle/>
           <a:p>
             <a:pPr algn="ctr"/>
+            <a:endParaRPr/>
           </a:p>
         </p:txBody>
       </p:sp>
@@ -16009,7 +17599,7 @@
           <a:noFill/>
         </p:spPr>
         <p:txBody>
-          <a:bodyPr wrap="square" lIns="45720" rIns="45720" tIns="27432" bIns="27432" anchor="ctr">
+          <a:bodyPr wrap="square" lIns="45720" tIns="27432" rIns="45720" bIns="27432" anchor="ctr">
             <a:spAutoFit/>
           </a:bodyPr>
           <a:lstStyle/>
@@ -16079,6 +17669,7 @@
           <a:lstStyle/>
           <a:p>
             <a:pPr algn="ctr"/>
+            <a:endParaRPr/>
           </a:p>
         </p:txBody>
       </p:sp>
@@ -16099,7 +17690,7 @@
           <a:noFill/>
         </p:spPr>
         <p:txBody>
-          <a:bodyPr wrap="square" lIns="45720" rIns="45720" tIns="27432" bIns="27432" anchor="ctr">
+          <a:bodyPr wrap="square" lIns="45720" tIns="27432" rIns="45720" bIns="27432" anchor="ctr">
             <a:spAutoFit/>
           </a:bodyPr>
           <a:lstStyle/>
@@ -16169,6 +17760,7 @@
           <a:lstStyle/>
           <a:p>
             <a:pPr algn="ctr"/>
+            <a:endParaRPr/>
           </a:p>
         </p:txBody>
       </p:sp>
@@ -16189,7 +17781,7 @@
           <a:noFill/>
         </p:spPr>
         <p:txBody>
-          <a:bodyPr wrap="square" lIns="45720" rIns="45720" tIns="27432" bIns="27432" anchor="ctr">
+          <a:bodyPr wrap="square" lIns="45720" tIns="27432" rIns="45720" bIns="27432" anchor="ctr">
             <a:spAutoFit/>
           </a:bodyPr>
           <a:lstStyle/>
@@ -16233,7 +17825,7 @@
           <a:noFill/>
         </p:spPr>
         <p:txBody>
-          <a:bodyPr wrap="square" lIns="45720" rIns="45720" tIns="27432" bIns="27432" anchor="t">
+          <a:bodyPr wrap="square" lIns="45720" tIns="27432" rIns="45720" bIns="27432" anchor="t">
             <a:spAutoFit/>
           </a:bodyPr>
           <a:lstStyle/>
@@ -16294,6 +17886,7 @@
           <a:lstStyle/>
           <a:p>
             <a:pPr algn="ctr"/>
+            <a:endParaRPr/>
           </a:p>
         </p:txBody>
       </p:sp>
@@ -16314,7 +17907,7 @@
           <a:noFill/>
         </p:spPr>
         <p:txBody>
-          <a:bodyPr wrap="square" lIns="45720" rIns="45720" tIns="27432" bIns="27432" anchor="ctr">
+          <a:bodyPr wrap="square" lIns="45720" tIns="27432" rIns="45720" bIns="27432" anchor="ctr">
             <a:spAutoFit/>
           </a:bodyPr>
           <a:lstStyle/>
@@ -16375,6 +17968,7 @@
           <a:lstStyle/>
           <a:p>
             <a:pPr algn="ctr"/>
+            <a:endParaRPr/>
           </a:p>
         </p:txBody>
       </p:sp>
@@ -16395,7 +17989,7 @@
           <a:noFill/>
         </p:spPr>
         <p:txBody>
-          <a:bodyPr wrap="square" lIns="45720" rIns="45720" tIns="27432" bIns="27432" anchor="ctr">
+          <a:bodyPr wrap="square" lIns="45720" tIns="27432" rIns="45720" bIns="27432" anchor="ctr">
             <a:spAutoFit/>
           </a:bodyPr>
           <a:lstStyle/>
@@ -16456,6 +18050,7 @@
           <a:lstStyle/>
           <a:p>
             <a:pPr algn="ctr"/>
+            <a:endParaRPr/>
           </a:p>
         </p:txBody>
       </p:sp>
@@ -16476,7 +18071,7 @@
           <a:noFill/>
         </p:spPr>
         <p:txBody>
-          <a:bodyPr wrap="square" lIns="45720" rIns="45720" tIns="27432" bIns="27432" anchor="ctr">
+          <a:bodyPr wrap="square" lIns="45720" tIns="27432" rIns="45720" bIns="27432" anchor="ctr">
             <a:spAutoFit/>
           </a:bodyPr>
           <a:lstStyle/>
@@ -16537,6 +18132,7 @@
           <a:lstStyle/>
           <a:p>
             <a:pPr algn="ctr"/>
+            <a:endParaRPr/>
           </a:p>
         </p:txBody>
       </p:sp>
@@ -16557,7 +18153,7 @@
           <a:noFill/>
         </p:spPr>
         <p:txBody>
-          <a:bodyPr wrap="square" lIns="45720" rIns="45720" tIns="27432" bIns="27432" anchor="ctr">
+          <a:bodyPr wrap="square" lIns="45720" tIns="27432" rIns="45720" bIns="27432" anchor="ctr">
             <a:spAutoFit/>
           </a:bodyPr>
           <a:lstStyle/>
@@ -16618,6 +18214,7 @@
           <a:lstStyle/>
           <a:p>
             <a:pPr algn="ctr"/>
+            <a:endParaRPr/>
           </a:p>
         </p:txBody>
       </p:sp>
@@ -16638,7 +18235,7 @@
           <a:noFill/>
         </p:spPr>
         <p:txBody>
-          <a:bodyPr wrap="square" lIns="45720" rIns="45720" tIns="27432" bIns="27432" anchor="ctr">
+          <a:bodyPr wrap="square" lIns="45720" tIns="27432" rIns="45720" bIns="27432" anchor="ctr">
             <a:spAutoFit/>
           </a:bodyPr>
           <a:lstStyle/>
@@ -16699,6 +18296,7 @@
           <a:lstStyle/>
           <a:p>
             <a:pPr algn="ctr"/>
+            <a:endParaRPr/>
           </a:p>
         </p:txBody>
       </p:sp>
@@ -16719,7 +18317,7 @@
           <a:noFill/>
         </p:spPr>
         <p:txBody>
-          <a:bodyPr wrap="square" lIns="45720" rIns="45720" tIns="27432" bIns="27432" anchor="ctr">
+          <a:bodyPr wrap="square" lIns="45720" tIns="27432" rIns="45720" bIns="27432" anchor="ctr">
             <a:spAutoFit/>
           </a:bodyPr>
           <a:lstStyle/>
@@ -16780,6 +18378,7 @@
           <a:lstStyle/>
           <a:p>
             <a:pPr algn="ctr"/>
+            <a:endParaRPr/>
           </a:p>
         </p:txBody>
       </p:sp>
@@ -16800,7 +18399,7 @@
           <a:noFill/>
         </p:spPr>
         <p:txBody>
-          <a:bodyPr wrap="square" lIns="45720" rIns="45720" tIns="27432" bIns="27432" anchor="ctr">
+          <a:bodyPr wrap="square" lIns="45720" tIns="27432" rIns="45720" bIns="27432" anchor="ctr">
             <a:spAutoFit/>
           </a:bodyPr>
           <a:lstStyle/>
@@ -16835,7 +18434,7 @@
           <a:noFill/>
         </p:spPr>
         <p:txBody>
-          <a:bodyPr wrap="square" lIns="45720" rIns="45720" tIns="27432" bIns="27432" anchor="t">
+          <a:bodyPr wrap="square" lIns="45720" tIns="27432" rIns="45720" bIns="27432" anchor="t">
             <a:spAutoFit/>
           </a:bodyPr>
           <a:lstStyle/>
@@ -16879,7 +18478,7 @@
           <a:noFill/>
         </p:spPr>
         <p:txBody>
-          <a:bodyPr wrap="square" lIns="45720" rIns="45720" tIns="27432" bIns="27432" anchor="t">
+          <a:bodyPr wrap="square" lIns="45720" tIns="27432" rIns="45720" bIns="27432" anchor="t">
             <a:spAutoFit/>
           </a:bodyPr>
           <a:lstStyle/>
@@ -16906,7 +18505,7 @@
 </file>
 
 <file path=ppt/slides/slide6.xml><?xml version="1.0" encoding="utf-8"?>
-<p:sld xmlns:a="http://schemas.openxmlformats.org/drawingml/2006/main" xmlns:p="http://schemas.openxmlformats.org/presentationml/2006/main" xmlns:r="http://schemas.openxmlformats.org/officeDocument/2006/relationships">
+<p:sld xmlns:a="http://schemas.openxmlformats.org/drawingml/2006/main" xmlns:r="http://schemas.openxmlformats.org/officeDocument/2006/relationships" xmlns:p="http://schemas.openxmlformats.org/presentationml/2006/main">
   <p:cSld>
     <p:bg>
       <p:bgPr>
@@ -16922,7 +18521,14 @@
         <p:cNvGrpSpPr/>
         <p:nvPr/>
       </p:nvGrpSpPr>
-      <p:grpSpPr/>
+      <p:grpSpPr>
+        <a:xfrm>
+          <a:off x="0" y="0"/>
+          <a:ext cx="0" cy="0"/>
+          <a:chOff x="0" y="0"/>
+          <a:chExt cx="0" cy="0"/>
+        </a:xfrm>
+      </p:grpSpPr>
       <p:sp>
         <p:nvSpPr>
           <p:cNvPr id="2" name="Rounded Rectangle 1"/>
@@ -16962,7 +18568,7 @@
           </a:fontRef>
         </p:style>
         <p:txBody>
-          <a:bodyPr rtlCol="0" anchor="ctr" wrap="square" lIns="45720" rIns="45720" tIns="27432" bIns="27432"/>
+          <a:bodyPr wrap="square" lIns="45720" tIns="27432" rIns="45720" bIns="27432" rtlCol="0" anchor="ctr"/>
           <a:lstStyle/>
           <a:p>
             <a:pPr algn="ctr"/>
@@ -16995,7 +18601,7 @@
           <a:noFill/>
         </p:spPr>
         <p:txBody>
-          <a:bodyPr wrap="square" lIns="45720" rIns="45720" tIns="27432" bIns="27432" anchor="t">
+          <a:bodyPr wrap="square" lIns="45720" tIns="27432" rIns="45720" bIns="27432" anchor="t">
             <a:spAutoFit/>
           </a:bodyPr>
           <a:lstStyle/>
@@ -17030,7 +18636,7 @@
           <a:noFill/>
         </p:spPr>
         <p:txBody>
-          <a:bodyPr wrap="square" lIns="45720" rIns="45720" tIns="27432" bIns="27432" anchor="t">
+          <a:bodyPr wrap="square" lIns="45720" tIns="27432" rIns="45720" bIns="27432" anchor="t">
             <a:spAutoFit/>
           </a:bodyPr>
           <a:lstStyle/>
@@ -17091,6 +18697,7 @@
           <a:lstStyle/>
           <a:p>
             <a:pPr algn="ctr"/>
+            <a:endParaRPr/>
           </a:p>
         </p:txBody>
       </p:sp>
@@ -17111,7 +18718,7 @@
           <a:noFill/>
         </p:spPr>
         <p:txBody>
-          <a:bodyPr wrap="square" lIns="45720" rIns="45720" tIns="27432" bIns="27432" anchor="t">
+          <a:bodyPr wrap="square" lIns="45720" tIns="27432" rIns="45720" bIns="27432" anchor="t">
             <a:spAutoFit/>
           </a:bodyPr>
           <a:lstStyle/>
@@ -17146,7 +18753,7 @@
           <a:noFill/>
         </p:spPr>
         <p:txBody>
-          <a:bodyPr wrap="square" lIns="45720" rIns="45720" tIns="27432" bIns="27432" anchor="t">
+          <a:bodyPr wrap="square" lIns="45720" tIns="27432" rIns="45720" bIns="27432" anchor="t">
             <a:spAutoFit/>
           </a:bodyPr>
           <a:lstStyle/>
@@ -17207,6 +18814,7 @@
           <a:lstStyle/>
           <a:p>
             <a:pPr algn="ctr"/>
+            <a:endParaRPr/>
           </a:p>
         </p:txBody>
       </p:sp>
@@ -17227,7 +18835,7 @@
           <a:noFill/>
         </p:spPr>
         <p:txBody>
-          <a:bodyPr wrap="square" lIns="45720" rIns="45720" tIns="27432" bIns="27432" anchor="t">
+          <a:bodyPr wrap="square" lIns="45720" tIns="27432" rIns="45720" bIns="27432" anchor="t">
             <a:spAutoFit/>
           </a:bodyPr>
           <a:lstStyle/>
@@ -17262,7 +18870,7 @@
           <a:noFill/>
         </p:spPr>
         <p:txBody>
-          <a:bodyPr wrap="square" lIns="45720" rIns="45720" tIns="27432" bIns="27432" anchor="t">
+          <a:bodyPr wrap="square" lIns="45720" tIns="27432" rIns="45720" bIns="27432" anchor="t">
             <a:spAutoFit/>
           </a:bodyPr>
           <a:lstStyle/>
@@ -17323,6 +18931,7 @@
           <a:lstStyle/>
           <a:p>
             <a:pPr algn="ctr"/>
+            <a:endParaRPr/>
           </a:p>
         </p:txBody>
       </p:sp>
@@ -17343,7 +18952,7 @@
           <a:noFill/>
         </p:spPr>
         <p:txBody>
-          <a:bodyPr wrap="square" lIns="45720" rIns="45720" tIns="27432" bIns="27432" anchor="t">
+          <a:bodyPr wrap="square" lIns="45720" tIns="27432" rIns="45720" bIns="27432" anchor="t">
             <a:spAutoFit/>
           </a:bodyPr>
           <a:lstStyle/>
@@ -17378,7 +18987,7 @@
           <a:noFill/>
         </p:spPr>
         <p:txBody>
-          <a:bodyPr wrap="square" lIns="45720" rIns="45720" tIns="27432" bIns="27432" anchor="t">
+          <a:bodyPr wrap="square" lIns="45720" tIns="27432" rIns="45720" bIns="27432" anchor="t">
             <a:spAutoFit/>
           </a:bodyPr>
           <a:lstStyle/>
@@ -17439,6 +19048,7 @@
           <a:lstStyle/>
           <a:p>
             <a:pPr algn="ctr"/>
+            <a:endParaRPr/>
           </a:p>
         </p:txBody>
       </p:sp>
@@ -17459,7 +19069,7 @@
           <a:noFill/>
         </p:spPr>
         <p:txBody>
-          <a:bodyPr wrap="square" lIns="45720" rIns="45720" tIns="27432" bIns="27432" anchor="t">
+          <a:bodyPr wrap="square" lIns="45720" tIns="27432" rIns="45720" bIns="27432" anchor="t">
             <a:spAutoFit/>
           </a:bodyPr>
           <a:lstStyle/>
@@ -17494,7 +19104,7 @@
           <a:noFill/>
         </p:spPr>
         <p:txBody>
-          <a:bodyPr wrap="square" lIns="45720" rIns="45720" tIns="27432" bIns="27432" anchor="t">
+          <a:bodyPr wrap="square" lIns="45720" tIns="27432" rIns="45720" bIns="27432" anchor="t">
             <a:spAutoFit/>
           </a:bodyPr>
           <a:lstStyle/>
@@ -17555,6 +19165,7 @@
           <a:lstStyle/>
           <a:p>
             <a:pPr algn="ctr"/>
+            <a:endParaRPr/>
           </a:p>
         </p:txBody>
       </p:sp>
@@ -17575,7 +19186,7 @@
           <a:noFill/>
         </p:spPr>
         <p:txBody>
-          <a:bodyPr wrap="square" lIns="45720" rIns="45720" tIns="27432" bIns="27432" anchor="t">
+          <a:bodyPr wrap="square" lIns="45720" tIns="27432" rIns="45720" bIns="27432" anchor="t">
             <a:spAutoFit/>
           </a:bodyPr>
           <a:lstStyle/>
@@ -17610,7 +19221,7 @@
           <a:noFill/>
         </p:spPr>
         <p:txBody>
-          <a:bodyPr wrap="square" lIns="45720" rIns="45720" tIns="27432" bIns="27432" anchor="t">
+          <a:bodyPr wrap="square" lIns="45720" tIns="27432" rIns="45720" bIns="27432" anchor="t">
             <a:spAutoFit/>
           </a:bodyPr>
           <a:lstStyle/>
@@ -17846,6 +19457,7 @@
           <a:lstStyle/>
           <a:p>
             <a:pPr algn="ctr"/>
+            <a:endParaRPr/>
           </a:p>
         </p:txBody>
       </p:sp>
@@ -17866,7 +19478,7 @@
           <a:noFill/>
         </p:spPr>
         <p:txBody>
-          <a:bodyPr wrap="square" lIns="45720" rIns="45720" tIns="27432" bIns="27432" anchor="t">
+          <a:bodyPr wrap="square" lIns="45720" tIns="27432" rIns="45720" bIns="27432" anchor="t">
             <a:spAutoFit/>
           </a:bodyPr>
           <a:lstStyle/>
@@ -17901,7 +19513,7 @@
           <a:noFill/>
         </p:spPr>
         <p:txBody>
-          <a:bodyPr wrap="square" lIns="45720" rIns="45720" tIns="27432" bIns="27432" anchor="t">
+          <a:bodyPr wrap="square" lIns="45720" tIns="27432" rIns="45720" bIns="27432" anchor="t">
             <a:spAutoFit/>
           </a:bodyPr>
           <a:lstStyle/>
@@ -17936,7 +19548,7 @@
           <a:noFill/>
         </p:spPr>
         <p:txBody>
-          <a:bodyPr wrap="square" lIns="45720" rIns="45720" tIns="27432" bIns="27432" anchor="t">
+          <a:bodyPr wrap="square" lIns="45720" tIns="27432" rIns="45720" bIns="27432" anchor="t">
             <a:spAutoFit/>
           </a:bodyPr>
           <a:lstStyle/>
@@ -17971,7 +19583,7 @@
           <a:noFill/>
         </p:spPr>
         <p:txBody>
-          <a:bodyPr wrap="square" lIns="45720" rIns="45720" tIns="27432" bIns="27432" anchor="t">
+          <a:bodyPr wrap="square" lIns="45720" tIns="27432" rIns="45720" bIns="27432" anchor="t">
             <a:spAutoFit/>
           </a:bodyPr>
           <a:lstStyle/>
@@ -18006,7 +19618,7 @@
           <a:noFill/>
         </p:spPr>
         <p:txBody>
-          <a:bodyPr wrap="square" lIns="45720" rIns="45720" tIns="27432" bIns="27432" anchor="t">
+          <a:bodyPr wrap="square" lIns="45720" tIns="27432" rIns="45720" bIns="27432" anchor="t">
             <a:spAutoFit/>
           </a:bodyPr>
           <a:lstStyle/>
@@ -18041,7 +19653,7 @@
           <a:noFill/>
         </p:spPr>
         <p:txBody>
-          <a:bodyPr wrap="square" lIns="45720" rIns="45720" tIns="27432" bIns="27432" anchor="t">
+          <a:bodyPr wrap="square" lIns="45720" tIns="27432" rIns="45720" bIns="27432" anchor="t">
             <a:spAutoFit/>
           </a:bodyPr>
           <a:lstStyle/>
@@ -18068,7 +19680,7 @@
 </file>
 
 <file path=ppt/slides/slide7.xml><?xml version="1.0" encoding="utf-8"?>
-<p:sld xmlns:a="http://schemas.openxmlformats.org/drawingml/2006/main" xmlns:p="http://schemas.openxmlformats.org/presentationml/2006/main" xmlns:r="http://schemas.openxmlformats.org/officeDocument/2006/relationships">
+<p:sld xmlns:a="http://schemas.openxmlformats.org/drawingml/2006/main" xmlns:r="http://schemas.openxmlformats.org/officeDocument/2006/relationships" xmlns:p="http://schemas.openxmlformats.org/presentationml/2006/main">
   <p:cSld>
     <p:bg>
       <p:bgPr>
@@ -18084,7 +19696,14 @@
         <p:cNvGrpSpPr/>
         <p:nvPr/>
       </p:nvGrpSpPr>
-      <p:grpSpPr/>
+      <p:grpSpPr>
+        <a:xfrm>
+          <a:off x="0" y="0"/>
+          <a:ext cx="0" cy="0"/>
+          <a:chOff x="0" y="0"/>
+          <a:chExt cx="0" cy="0"/>
+        </a:xfrm>
+      </p:grpSpPr>
       <p:sp>
         <p:nvSpPr>
           <p:cNvPr id="2" name="Rounded Rectangle 1"/>
@@ -18124,7 +19743,7 @@
           </a:fontRef>
         </p:style>
         <p:txBody>
-          <a:bodyPr rtlCol="0" anchor="ctr" wrap="square" lIns="45720" rIns="45720" tIns="27432" bIns="27432"/>
+          <a:bodyPr wrap="square" lIns="45720" tIns="27432" rIns="45720" bIns="27432" rtlCol="0" anchor="ctr"/>
           <a:lstStyle/>
           <a:p>
             <a:pPr algn="ctr"/>
@@ -18157,7 +19776,7 @@
           <a:noFill/>
         </p:spPr>
         <p:txBody>
-          <a:bodyPr wrap="square" lIns="45720" rIns="45720" tIns="27432" bIns="27432" anchor="t">
+          <a:bodyPr wrap="square" lIns="45720" tIns="27432" rIns="45720" bIns="27432" anchor="t">
             <a:spAutoFit/>
           </a:bodyPr>
           <a:lstStyle/>
@@ -18192,7 +19811,7 @@
           <a:noFill/>
         </p:spPr>
         <p:txBody>
-          <a:bodyPr wrap="square" lIns="45720" rIns="45720" tIns="27432" bIns="27432" anchor="t">
+          <a:bodyPr wrap="square" lIns="45720" tIns="27432" rIns="45720" bIns="27432" anchor="t">
             <a:spAutoFit/>
           </a:bodyPr>
           <a:lstStyle/>
@@ -18224,7 +19843,7 @@
         </p:xfrm>
         <a:graphic>
           <a:graphicData uri="http://schemas.openxmlformats.org/drawingml/2006/chart">
-            <c:chart xmlns:c="http://schemas.openxmlformats.org/drawingml/2006/chart" r:id="rId3"/>
+            <c:chart xmlns:c="http://schemas.openxmlformats.org/drawingml/2006/chart" xmlns:r="http://schemas.openxmlformats.org/officeDocument/2006/relationships" r:id="rId3"/>
           </a:graphicData>
         </a:graphic>
       </p:graphicFrame>
@@ -18245,7 +19864,7 @@
           <a:noFill/>
         </p:spPr>
         <p:txBody>
-          <a:bodyPr wrap="square" lIns="45720" rIns="45720" tIns="27432" bIns="27432" anchor="t">
+          <a:bodyPr wrap="square" lIns="45720" tIns="27432" rIns="45720" bIns="27432" anchor="t">
             <a:spAutoFit/>
           </a:bodyPr>
           <a:lstStyle/>
@@ -18280,7 +19899,7 @@
           <a:noFill/>
         </p:spPr>
         <p:txBody>
-          <a:bodyPr wrap="square" lIns="45720" rIns="45720" tIns="27432" bIns="27432" anchor="t">
+          <a:bodyPr wrap="square" lIns="45720" tIns="27432" rIns="45720" bIns="27432" anchor="t">
             <a:spAutoFit/>
           </a:bodyPr>
           <a:lstStyle/>
@@ -18341,6 +19960,7 @@
           <a:lstStyle/>
           <a:p>
             <a:pPr algn="ctr"/>
+            <a:endParaRPr/>
           </a:p>
         </p:txBody>
       </p:sp>
@@ -18361,7 +19981,7 @@
           <a:noFill/>
         </p:spPr>
         <p:txBody>
-          <a:bodyPr wrap="square" lIns="45720" rIns="45720" tIns="27432" bIns="27432" anchor="ctr">
+          <a:bodyPr wrap="square" lIns="45720" tIns="27432" rIns="45720" bIns="27432" anchor="ctr">
             <a:spAutoFit/>
           </a:bodyPr>
           <a:lstStyle/>
@@ -18408,7 +20028,7 @@
           <a:noFill/>
         </p:spPr>
         <p:txBody>
-          <a:bodyPr wrap="square" lIns="45720" rIns="45720" tIns="27432" bIns="27432" anchor="t">
+          <a:bodyPr wrap="square" lIns="45720" tIns="27432" rIns="45720" bIns="27432" anchor="t">
             <a:spAutoFit/>
           </a:bodyPr>
           <a:lstStyle/>
@@ -18481,7 +20101,7 @@
           <a:noFill/>
         </p:spPr>
         <p:txBody>
-          <a:bodyPr wrap="square" lIns="45720" rIns="45720" tIns="27432" bIns="27432" anchor="t">
+          <a:bodyPr wrap="square" lIns="45720" tIns="27432" rIns="45720" bIns="27432" anchor="t">
             <a:spAutoFit/>
           </a:bodyPr>
           <a:lstStyle/>
@@ -18508,7 +20128,7 @@
 </file>
 
 <file path=ppt/slides/slide8.xml><?xml version="1.0" encoding="utf-8"?>
-<p:sld xmlns:a="http://schemas.openxmlformats.org/drawingml/2006/main" xmlns:p="http://schemas.openxmlformats.org/presentationml/2006/main" xmlns:r="http://schemas.openxmlformats.org/officeDocument/2006/relationships">
+<p:sld xmlns:a="http://schemas.openxmlformats.org/drawingml/2006/main" xmlns:r="http://schemas.openxmlformats.org/officeDocument/2006/relationships" xmlns:p="http://schemas.openxmlformats.org/presentationml/2006/main">
   <p:cSld>
     <p:bg>
       <p:bgPr>
@@ -18524,7 +20144,14 @@
         <p:cNvGrpSpPr/>
         <p:nvPr/>
       </p:nvGrpSpPr>
-      <p:grpSpPr/>
+      <p:grpSpPr>
+        <a:xfrm>
+          <a:off x="0" y="0"/>
+          <a:ext cx="0" cy="0"/>
+          <a:chOff x="0" y="0"/>
+          <a:chExt cx="0" cy="0"/>
+        </a:xfrm>
+      </p:grpSpPr>
       <p:sp>
         <p:nvSpPr>
           <p:cNvPr id="2" name="Rounded Rectangle 1"/>
@@ -18564,7 +20191,7 @@
           </a:fontRef>
         </p:style>
         <p:txBody>
-          <a:bodyPr rtlCol="0" anchor="ctr" wrap="square" lIns="45720" rIns="45720" tIns="27432" bIns="27432"/>
+          <a:bodyPr wrap="square" lIns="45720" tIns="27432" rIns="45720" bIns="27432" rtlCol="0" anchor="ctr"/>
           <a:lstStyle/>
           <a:p>
             <a:pPr algn="ctr"/>
@@ -18597,7 +20224,7 @@
           <a:noFill/>
         </p:spPr>
         <p:txBody>
-          <a:bodyPr wrap="square" lIns="45720" rIns="45720" tIns="27432" bIns="27432" anchor="t">
+          <a:bodyPr wrap="square" lIns="45720" tIns="27432" rIns="45720" bIns="27432" anchor="t">
             <a:spAutoFit/>
           </a:bodyPr>
           <a:lstStyle/>
@@ -18632,7 +20259,7 @@
           <a:noFill/>
         </p:spPr>
         <p:txBody>
-          <a:bodyPr wrap="square" lIns="45720" rIns="45720" tIns="27432" bIns="27432" anchor="t">
+          <a:bodyPr wrap="square" lIns="45720" tIns="27432" rIns="45720" bIns="27432" anchor="t">
             <a:spAutoFit/>
           </a:bodyPr>
           <a:lstStyle/>
@@ -18667,7 +20294,7 @@
           <a:noFill/>
         </p:spPr>
         <p:txBody>
-          <a:bodyPr wrap="square" lIns="45720" rIns="45720" tIns="27432" bIns="27432" anchor="t">
+          <a:bodyPr wrap="square" lIns="45720" tIns="27432" rIns="45720" bIns="27432" anchor="t">
             <a:spAutoFit/>
           </a:bodyPr>
           <a:lstStyle/>
@@ -18702,7 +20329,7 @@
           <a:noFill/>
         </p:spPr>
         <p:txBody>
-          <a:bodyPr wrap="square" lIns="45720" rIns="45720" tIns="27432" bIns="27432" anchor="t">
+          <a:bodyPr wrap="square" lIns="45720" tIns="27432" rIns="45720" bIns="27432" anchor="t">
             <a:spAutoFit/>
           </a:bodyPr>
           <a:lstStyle/>
@@ -18737,7 +20364,7 @@
           <a:noFill/>
         </p:spPr>
         <p:txBody>
-          <a:bodyPr wrap="square" lIns="45720" rIns="45720" tIns="27432" bIns="27432" anchor="t">
+          <a:bodyPr wrap="square" lIns="45720" tIns="27432" rIns="45720" bIns="27432" anchor="t">
             <a:spAutoFit/>
           </a:bodyPr>
           <a:lstStyle/>
@@ -18772,7 +20399,7 @@
           <a:noFill/>
         </p:spPr>
         <p:txBody>
-          <a:bodyPr wrap="square" lIns="45720" rIns="45720" tIns="27432" bIns="27432" anchor="t">
+          <a:bodyPr wrap="square" lIns="45720" tIns="27432" rIns="45720" bIns="27432" anchor="t">
             <a:spAutoFit/>
           </a:bodyPr>
           <a:lstStyle/>
@@ -18807,7 +20434,7 @@
           <a:noFill/>
         </p:spPr>
         <p:txBody>
-          <a:bodyPr wrap="square" lIns="45720" rIns="45720" tIns="27432" bIns="27432" anchor="t">
+          <a:bodyPr wrap="square" lIns="45720" tIns="27432" rIns="45720" bIns="27432" anchor="t">
             <a:spAutoFit/>
           </a:bodyPr>
           <a:lstStyle/>
@@ -18842,7 +20469,7 @@
           <a:noFill/>
         </p:spPr>
         <p:txBody>
-          <a:bodyPr wrap="square" lIns="45720" rIns="45720" tIns="27432" bIns="27432" anchor="t">
+          <a:bodyPr wrap="square" lIns="45720" tIns="27432" rIns="45720" bIns="27432" anchor="t">
             <a:spAutoFit/>
           </a:bodyPr>
           <a:lstStyle/>
@@ -18874,7 +20501,7 @@
         </p:xfrm>
         <a:graphic>
           <a:graphicData uri="http://schemas.openxmlformats.org/drawingml/2006/chart">
-            <c:chart xmlns:c="http://schemas.openxmlformats.org/drawingml/2006/chart" r:id="rId3"/>
+            <c:chart xmlns:c="http://schemas.openxmlformats.org/drawingml/2006/chart" xmlns:r="http://schemas.openxmlformats.org/officeDocument/2006/relationships" r:id="rId3"/>
           </a:graphicData>
         </a:graphic>
       </p:graphicFrame>
@@ -18921,6 +20548,7 @@
           <a:lstStyle/>
           <a:p>
             <a:pPr algn="ctr"/>
+            <a:endParaRPr/>
           </a:p>
         </p:txBody>
       </p:sp>
@@ -18941,7 +20569,7 @@
           <a:noFill/>
         </p:spPr>
         <p:txBody>
-          <a:bodyPr wrap="square" lIns="45720" rIns="45720" tIns="27432" bIns="27432" anchor="ctr">
+          <a:bodyPr wrap="square" lIns="45720" tIns="27432" rIns="45720" bIns="27432" anchor="ctr">
             <a:spAutoFit/>
           </a:bodyPr>
           <a:lstStyle/>
@@ -18994,7 +20622,7 @@
           <a:noFill/>
         </p:spPr>
         <p:txBody>
-          <a:bodyPr wrap="square" lIns="45720" rIns="45720" tIns="27432" bIns="27432" anchor="t">
+          <a:bodyPr wrap="square" lIns="45720" tIns="27432" rIns="45720" bIns="27432" anchor="t">
             <a:spAutoFit/>
           </a:bodyPr>
           <a:lstStyle/>
@@ -19021,7 +20649,7 @@
 </file>
 
 <file path=ppt/slides/slide9.xml><?xml version="1.0" encoding="utf-8"?>
-<p:sld xmlns:a="http://schemas.openxmlformats.org/drawingml/2006/main" xmlns:p="http://schemas.openxmlformats.org/presentationml/2006/main" xmlns:r="http://schemas.openxmlformats.org/officeDocument/2006/relationships">
+<p:sld xmlns:a="http://schemas.openxmlformats.org/drawingml/2006/main" xmlns:r="http://schemas.openxmlformats.org/officeDocument/2006/relationships" xmlns:p="http://schemas.openxmlformats.org/presentationml/2006/main">
   <p:cSld>
     <p:bg>
       <p:bgPr>
@@ -19037,7 +20665,14 @@
         <p:cNvGrpSpPr/>
         <p:nvPr/>
       </p:nvGrpSpPr>
-      <p:grpSpPr/>
+      <p:grpSpPr>
+        <a:xfrm>
+          <a:off x="0" y="0"/>
+          <a:ext cx="0" cy="0"/>
+          <a:chOff x="0" y="0"/>
+          <a:chExt cx="0" cy="0"/>
+        </a:xfrm>
+      </p:grpSpPr>
       <p:sp>
         <p:nvSpPr>
           <p:cNvPr id="2" name="Rounded Rectangle 1"/>
@@ -19077,7 +20712,7 @@
           </a:fontRef>
         </p:style>
         <p:txBody>
-          <a:bodyPr rtlCol="0" anchor="ctr" wrap="square" lIns="45720" rIns="45720" tIns="27432" bIns="27432"/>
+          <a:bodyPr wrap="square" lIns="45720" tIns="27432" rIns="45720" bIns="27432" rtlCol="0" anchor="ctr"/>
           <a:lstStyle/>
           <a:p>
             <a:pPr algn="ctr"/>
@@ -19110,7 +20745,7 @@
           <a:noFill/>
         </p:spPr>
         <p:txBody>
-          <a:bodyPr wrap="square" lIns="45720" rIns="45720" tIns="27432" bIns="27432" anchor="t">
+          <a:bodyPr wrap="square" lIns="45720" tIns="27432" rIns="45720" bIns="27432" anchor="t">
             <a:spAutoFit/>
           </a:bodyPr>
           <a:lstStyle/>
@@ -19145,7 +20780,7 @@
           <a:noFill/>
         </p:spPr>
         <p:txBody>
-          <a:bodyPr wrap="square" lIns="45720" rIns="45720" tIns="27432" bIns="27432" anchor="t">
+          <a:bodyPr wrap="square" lIns="45720" tIns="27432" rIns="45720" bIns="27432" anchor="t">
             <a:spAutoFit/>
           </a:bodyPr>
           <a:lstStyle/>
@@ -19206,6 +20841,7 @@
           <a:lstStyle/>
           <a:p>
             <a:pPr algn="ctr"/>
+            <a:endParaRPr/>
           </a:p>
         </p:txBody>
       </p:sp>
@@ -19226,7 +20862,7 @@
           <a:noFill/>
         </p:spPr>
         <p:txBody>
-          <a:bodyPr wrap="square" lIns="45720" rIns="45720" tIns="27432" bIns="27432" anchor="t">
+          <a:bodyPr wrap="square" lIns="45720" tIns="27432" rIns="45720" bIns="27432" anchor="t">
             <a:spAutoFit/>
           </a:bodyPr>
           <a:lstStyle/>
@@ -19261,7 +20897,7 @@
           <a:noFill/>
         </p:spPr>
         <p:txBody>
-          <a:bodyPr wrap="square" lIns="45720" rIns="45720" tIns="27432" bIns="27432" anchor="t">
+          <a:bodyPr wrap="square" lIns="45720" tIns="27432" rIns="45720" bIns="27432" anchor="t">
             <a:spAutoFit/>
           </a:bodyPr>
           <a:lstStyle/>
@@ -19296,7 +20932,7 @@
           <a:noFill/>
         </p:spPr>
         <p:txBody>
-          <a:bodyPr wrap="square" lIns="45720" rIns="45720" tIns="27432" bIns="27432" anchor="t">
+          <a:bodyPr wrap="square" lIns="45720" tIns="27432" rIns="45720" bIns="27432" anchor="t">
             <a:spAutoFit/>
           </a:bodyPr>
           <a:lstStyle/>
@@ -19331,7 +20967,7 @@
           <a:noFill/>
         </p:spPr>
         <p:txBody>
-          <a:bodyPr wrap="square" lIns="45720" rIns="45720" tIns="27432" bIns="27432" anchor="t">
+          <a:bodyPr wrap="square" lIns="45720" tIns="27432" rIns="45720" bIns="27432" anchor="t">
             <a:spAutoFit/>
           </a:bodyPr>
           <a:lstStyle/>
@@ -19366,7 +21002,7 @@
           <a:noFill/>
         </p:spPr>
         <p:txBody>
-          <a:bodyPr wrap="square" lIns="45720" rIns="45720" tIns="27432" bIns="27432" anchor="t">
+          <a:bodyPr wrap="square" lIns="45720" tIns="27432" rIns="45720" bIns="27432" anchor="t">
             <a:spAutoFit/>
           </a:bodyPr>
           <a:lstStyle/>
@@ -19427,6 +21063,7 @@
           <a:lstStyle/>
           <a:p>
             <a:pPr algn="ctr"/>
+            <a:endParaRPr/>
           </a:p>
         </p:txBody>
       </p:sp>
@@ -19447,7 +21084,7 @@
           <a:noFill/>
         </p:spPr>
         <p:txBody>
-          <a:bodyPr wrap="square" lIns="45720" rIns="45720" tIns="27432" bIns="27432" anchor="ctr">
+          <a:bodyPr wrap="square" lIns="45720" tIns="27432" rIns="45720" bIns="27432" anchor="ctr">
             <a:spAutoFit/>
           </a:bodyPr>
           <a:lstStyle/>
@@ -19508,6 +21145,7 @@
           <a:lstStyle/>
           <a:p>
             <a:pPr algn="ctr"/>
+            <a:endParaRPr/>
           </a:p>
         </p:txBody>
       </p:sp>
@@ -19528,7 +21166,7 @@
           <a:noFill/>
         </p:spPr>
         <p:txBody>
-          <a:bodyPr wrap="square" lIns="45720" rIns="45720" tIns="27432" bIns="27432" anchor="t">
+          <a:bodyPr wrap="square" lIns="45720" tIns="27432" rIns="45720" bIns="27432" anchor="t">
             <a:spAutoFit/>
           </a:bodyPr>
           <a:lstStyle/>
@@ -19563,7 +21201,7 @@
           <a:noFill/>
         </p:spPr>
         <p:txBody>
-          <a:bodyPr wrap="square" lIns="45720" rIns="45720" tIns="27432" bIns="27432" anchor="t">
+          <a:bodyPr wrap="square" lIns="45720" tIns="27432" rIns="45720" bIns="27432" anchor="t">
             <a:spAutoFit/>
           </a:bodyPr>
           <a:lstStyle/>
@@ -19598,7 +21236,7 @@
           <a:noFill/>
         </p:spPr>
         <p:txBody>
-          <a:bodyPr wrap="square" lIns="45720" rIns="45720" tIns="27432" bIns="27432" anchor="t">
+          <a:bodyPr wrap="square" lIns="45720" tIns="27432" rIns="45720" bIns="27432" anchor="t">
             <a:spAutoFit/>
           </a:bodyPr>
           <a:lstStyle/>
@@ -19633,7 +21271,7 @@
           <a:noFill/>
         </p:spPr>
         <p:txBody>
-          <a:bodyPr wrap="square" lIns="45720" rIns="45720" tIns="27432" bIns="27432" anchor="t">
+          <a:bodyPr wrap="square" lIns="45720" tIns="27432" rIns="45720" bIns="27432" anchor="t">
             <a:spAutoFit/>
           </a:bodyPr>
           <a:lstStyle/>
@@ -19668,7 +21306,7 @@
           <a:noFill/>
         </p:spPr>
         <p:txBody>
-          <a:bodyPr wrap="square" lIns="45720" rIns="45720" tIns="27432" bIns="27432" anchor="t">
+          <a:bodyPr wrap="square" lIns="45720" tIns="27432" rIns="45720" bIns="27432" anchor="t">
             <a:spAutoFit/>
           </a:bodyPr>
           <a:lstStyle/>
@@ -19729,6 +21367,7 @@
           <a:lstStyle/>
           <a:p>
             <a:pPr algn="ctr"/>
+            <a:endParaRPr/>
           </a:p>
         </p:txBody>
       </p:sp>
@@ -19749,7 +21388,7 @@
           <a:noFill/>
         </p:spPr>
         <p:txBody>
-          <a:bodyPr wrap="square" lIns="45720" rIns="45720" tIns="27432" bIns="27432" anchor="ctr">
+          <a:bodyPr wrap="square" lIns="45720" tIns="27432" rIns="45720" bIns="27432" anchor="ctr">
             <a:spAutoFit/>
           </a:bodyPr>
           <a:lstStyle/>
@@ -19784,7 +21423,7 @@
           <a:noFill/>
         </p:spPr>
         <p:txBody>
-          <a:bodyPr wrap="square" lIns="45720" rIns="45720" tIns="27432" bIns="27432" anchor="t">
+          <a:bodyPr wrap="square" lIns="45720" tIns="27432" rIns="45720" bIns="27432" anchor="t">
             <a:spAutoFit/>
           </a:bodyPr>
           <a:lstStyle/>
@@ -20141,44 +21780,44 @@
         <a:sysClr val="window" lastClr="FFFFFF"/>
       </a:lt1>
       <a:dk2>
-        <a:srgbClr val="1F497D"/>
+        <a:srgbClr val="44546A"/>
       </a:dk2>
       <a:lt2>
-        <a:srgbClr val="EEECE1"/>
+        <a:srgbClr val="E7E6E6"/>
       </a:lt2>
       <a:accent1>
-        <a:srgbClr val="4F81BD"/>
+        <a:srgbClr val="4472C4"/>
       </a:accent1>
       <a:accent2>
-        <a:srgbClr val="C0504D"/>
+        <a:srgbClr val="ED7D31"/>
       </a:accent2>
       <a:accent3>
-        <a:srgbClr val="9BBB59"/>
+        <a:srgbClr val="A5A5A5"/>
       </a:accent3>
       <a:accent4>
-        <a:srgbClr val="8064A2"/>
+        <a:srgbClr val="FFC000"/>
       </a:accent4>
       <a:accent5>
-        <a:srgbClr val="4BACC6"/>
+        <a:srgbClr val="5B9BD5"/>
       </a:accent5>
       <a:accent6>
-        <a:srgbClr val="F79646"/>
+        <a:srgbClr val="70AD47"/>
       </a:accent6>
       <a:hlink>
-        <a:srgbClr val="0000FF"/>
+        <a:srgbClr val="0563C1"/>
       </a:hlink>
       <a:folHlink>
-        <a:srgbClr val="800080"/>
+        <a:srgbClr val="954F72"/>
       </a:folHlink>
     </a:clrScheme>
     <a:fontScheme name="Office">
       <a:majorFont>
-        <a:latin typeface="Calibri"/>
+        <a:latin typeface="Calibri Light" panose="020F0302020204030204"/>
         <a:ea typeface=""/>
         <a:cs typeface=""/>
-        <a:font script="Jpan" typeface="ＭＳ Ｐゴシック"/>
+        <a:font script="Jpan" typeface="游ゴシック Light"/>
         <a:font script="Hang" typeface="맑은 고딕"/>
-        <a:font script="Hans" typeface="宋体"/>
+        <a:font script="Hans" typeface="等线 Light"/>
         <a:font script="Hant" typeface="新細明體"/>
         <a:font script="Arab" typeface="Times New Roman"/>
         <a:font script="Hebr" typeface="Times New Roman"/>
@@ -20206,14 +21845,31 @@
         <a:font script="Viet" typeface="Times New Roman"/>
         <a:font script="Uigh" typeface="Microsoft Uighur"/>
         <a:font script="Geor" typeface="Sylfaen"/>
+        <a:font script="Armn" typeface="Arial"/>
+        <a:font script="Bugi" typeface="Leelawadee UI"/>
+        <a:font script="Bopo" typeface="Microsoft JhengHei"/>
+        <a:font script="Java" typeface="Javanese Text"/>
+        <a:font script="Lisu" typeface="Segoe UI"/>
+        <a:font script="Mymr" typeface="Myanmar Text"/>
+        <a:font script="Nkoo" typeface="Ebrima"/>
+        <a:font script="Olck" typeface="Nirmala UI"/>
+        <a:font script="Osma" typeface="Ebrima"/>
+        <a:font script="Phag" typeface="Phagspa"/>
+        <a:font script="Syrn" typeface="Estrangelo Edessa"/>
+        <a:font script="Syrj" typeface="Estrangelo Edessa"/>
+        <a:font script="Syre" typeface="Estrangelo Edessa"/>
+        <a:font script="Sora" typeface="Nirmala UI"/>
+        <a:font script="Tale" typeface="Microsoft Tai Le"/>
+        <a:font script="Talu" typeface="Microsoft New Tai Lue"/>
+        <a:font script="Tfng" typeface="Ebrima"/>
       </a:majorFont>
       <a:minorFont>
-        <a:latin typeface="Calibri"/>
+        <a:latin typeface="Calibri" panose="020F0502020204030204"/>
         <a:ea typeface=""/>
         <a:cs typeface=""/>
-        <a:font script="Jpan" typeface="ＭＳ Ｐゴシック"/>
+        <a:font script="Jpan" typeface="游ゴシック"/>
         <a:font script="Hang" typeface="맑은 고딕"/>
-        <a:font script="Hans" typeface="宋体"/>
+        <a:font script="Hans" typeface="等线"/>
         <a:font script="Hant" typeface="新細明體"/>
         <a:font script="Arab" typeface="Arial"/>
         <a:font script="Hebr" typeface="Arial"/>
@@ -20241,6 +21897,23 @@
         <a:font script="Viet" typeface="Arial"/>
         <a:font script="Uigh" typeface="Microsoft Uighur"/>
         <a:font script="Geor" typeface="Sylfaen"/>
+        <a:font script="Armn" typeface="Arial"/>
+        <a:font script="Bugi" typeface="Leelawadee UI"/>
+        <a:font script="Bopo" typeface="Microsoft JhengHei"/>
+        <a:font script="Java" typeface="Javanese Text"/>
+        <a:font script="Lisu" typeface="Segoe UI"/>
+        <a:font script="Mymr" typeface="Myanmar Text"/>
+        <a:font script="Nkoo" typeface="Ebrima"/>
+        <a:font script="Olck" typeface="Nirmala UI"/>
+        <a:font script="Osma" typeface="Ebrima"/>
+        <a:font script="Phag" typeface="Phagspa"/>
+        <a:font script="Syrn" typeface="Estrangelo Edessa"/>
+        <a:font script="Syrj" typeface="Estrangelo Edessa"/>
+        <a:font script="Syre" typeface="Estrangelo Edessa"/>
+        <a:font script="Sora" typeface="Nirmala UI"/>
+        <a:font script="Tale" typeface="Microsoft Tai Le"/>
+        <a:font script="Talu" typeface="Microsoft New Tai Lue"/>
+        <a:font script="Tfng" typeface="Ebrima"/>
       </a:minorFont>
     </a:fontScheme>
     <a:fmtScheme name="Office">
@@ -20252,200 +21925,141 @@
           <a:gsLst>
             <a:gs pos="0">
               <a:schemeClr val="phClr">
-                <a:tint val="50000"/>
-                <a:satMod val="300000"/>
+                <a:lumMod val="110000"/>
+                <a:satMod val="105000"/>
+                <a:tint val="67000"/>
               </a:schemeClr>
             </a:gs>
-            <a:gs pos="35000">
+            <a:gs pos="50000">
               <a:schemeClr val="phClr">
-                <a:tint val="37000"/>
-                <a:satMod val="300000"/>
+                <a:lumMod val="105000"/>
+                <a:satMod val="103000"/>
+                <a:tint val="73000"/>
               </a:schemeClr>
             </a:gs>
             <a:gs pos="100000">
               <a:schemeClr val="phClr">
-                <a:tint val="15000"/>
-                <a:satMod val="350000"/>
+                <a:lumMod val="105000"/>
+                <a:satMod val="109000"/>
+                <a:tint val="81000"/>
               </a:schemeClr>
             </a:gs>
           </a:gsLst>
-          <a:lin ang="16200000" scaled="1"/>
+          <a:lin ang="5400000" scaled="0"/>
         </a:gradFill>
         <a:gradFill rotWithShape="1">
           <a:gsLst>
             <a:gs pos="0">
               <a:schemeClr val="phClr">
-                <a:tint val="100000"/>
+                <a:satMod val="103000"/>
+                <a:lumMod val="102000"/>
+                <a:tint val="94000"/>
+              </a:schemeClr>
+            </a:gs>
+            <a:gs pos="50000">
+              <a:schemeClr val="phClr">
+                <a:satMod val="110000"/>
+                <a:lumMod val="100000"/>
                 <a:shade val="100000"/>
-                <a:satMod val="130000"/>
               </a:schemeClr>
             </a:gs>
             <a:gs pos="100000">
               <a:schemeClr val="phClr">
-                <a:tint val="50000"/>
-                <a:shade val="100000"/>
-                <a:satMod val="350000"/>
+                <a:lumMod val="99000"/>
+                <a:satMod val="120000"/>
+                <a:shade val="78000"/>
               </a:schemeClr>
             </a:gs>
           </a:gsLst>
-          <a:lin ang="16200000" scaled="0"/>
+          <a:lin ang="5400000" scaled="0"/>
         </a:gradFill>
       </a:fillStyleLst>
       <a:lnStyleLst>
-        <a:ln w="9525" cap="flat" cmpd="sng" algn="ctr">
-          <a:solidFill>
-            <a:schemeClr val="phClr">
-              <a:shade val="95000"/>
-              <a:satMod val="105000"/>
-            </a:schemeClr>
-          </a:solidFill>
-          <a:prstDash val="solid"/>
-        </a:ln>
-        <a:ln w="25400" cap="flat" cmpd="sng" algn="ctr">
+        <a:ln w="6350" cap="flat" cmpd="sng" algn="ctr">
           <a:solidFill>
             <a:schemeClr val="phClr"/>
           </a:solidFill>
           <a:prstDash val="solid"/>
+          <a:miter lim="800000"/>
         </a:ln>
-        <a:ln w="38100" cap="flat" cmpd="sng" algn="ctr">
+        <a:ln w="12700" cap="flat" cmpd="sng" algn="ctr">
           <a:solidFill>
             <a:schemeClr val="phClr"/>
           </a:solidFill>
           <a:prstDash val="solid"/>
+          <a:miter lim="800000"/>
+        </a:ln>
+        <a:ln w="19050" cap="flat" cmpd="sng" algn="ctr">
+          <a:solidFill>
+            <a:schemeClr val="phClr"/>
+          </a:solidFill>
+          <a:prstDash val="solid"/>
+          <a:miter lim="800000"/>
         </a:ln>
       </a:lnStyleLst>
       <a:effectStyleLst>
         <a:effectStyle>
+          <a:effectLst/>
+        </a:effectStyle>
+        <a:effectStyle>
+          <a:effectLst/>
+        </a:effectStyle>
+        <a:effectStyle>
           <a:effectLst>
-            <a:outerShdw blurRad="40000" dist="20000" dir="5400000" rotWithShape="0">
+            <a:outerShdw blurRad="57150" dist="19050" dir="5400000" algn="ctr" rotWithShape="0">
               <a:srgbClr val="000000">
-                <a:alpha val="38000"/>
+                <a:alpha val="63000"/>
               </a:srgbClr>
             </a:outerShdw>
           </a:effectLst>
-        </a:effectStyle>
-        <a:effectStyle>
-          <a:effectLst>
-            <a:outerShdw blurRad="40000" dist="23000" dir="5400000" rotWithShape="0">
-              <a:srgbClr val="000000">
-                <a:alpha val="35000"/>
-              </a:srgbClr>
-            </a:outerShdw>
-          </a:effectLst>
-        </a:effectStyle>
-        <a:effectStyle>
-          <a:effectLst>
-            <a:outerShdw blurRad="40000" dist="23000" dir="5400000" rotWithShape="0">
-              <a:srgbClr val="000000">
-                <a:alpha val="35000"/>
-              </a:srgbClr>
-            </a:outerShdw>
-          </a:effectLst>
-          <a:scene3d>
-            <a:camera prst="orthographicFront">
-              <a:rot lat="0" lon="0" rev="0"/>
-            </a:camera>
-            <a:lightRig rig="threePt" dir="t">
-              <a:rot lat="0" lon="0" rev="1200000"/>
-            </a:lightRig>
-          </a:scene3d>
-          <a:sp3d>
-            <a:bevelT w="63500" h="25400"/>
-          </a:sp3d>
         </a:effectStyle>
       </a:effectStyleLst>
       <a:bgFillStyleLst>
         <a:solidFill>
           <a:schemeClr val="phClr"/>
         </a:solidFill>
+        <a:solidFill>
+          <a:schemeClr val="phClr">
+            <a:tint val="95000"/>
+            <a:satMod val="170000"/>
+          </a:schemeClr>
+        </a:solidFill>
         <a:gradFill rotWithShape="1">
           <a:gsLst>
             <a:gs pos="0">
               <a:schemeClr val="phClr">
-                <a:tint val="40000"/>
-                <a:satMod val="350000"/>
+                <a:tint val="93000"/>
+                <a:satMod val="150000"/>
+                <a:shade val="98000"/>
+                <a:lumMod val="102000"/>
               </a:schemeClr>
             </a:gs>
-            <a:gs pos="40000">
+            <a:gs pos="50000">
               <a:schemeClr val="phClr">
-                <a:tint val="45000"/>
-                <a:shade val="99000"/>
-                <a:satMod val="350000"/>
+                <a:tint val="98000"/>
+                <a:satMod val="130000"/>
+                <a:shade val="90000"/>
+                <a:lumMod val="103000"/>
               </a:schemeClr>
             </a:gs>
             <a:gs pos="100000">
               <a:schemeClr val="phClr">
-                <a:shade val="20000"/>
-                <a:satMod val="255000"/>
+                <a:shade val="63000"/>
+                <a:satMod val="120000"/>
               </a:schemeClr>
             </a:gs>
           </a:gsLst>
-          <a:path path="circle">
-            <a:fillToRect l="50000" t="-80000" r="50000" b="180000"/>
-          </a:path>
-        </a:gradFill>
-        <a:gradFill rotWithShape="1">
-          <a:gsLst>
-            <a:gs pos="0">
-              <a:schemeClr val="phClr">
-                <a:tint val="80000"/>
-                <a:satMod val="300000"/>
-              </a:schemeClr>
-            </a:gs>
-            <a:gs pos="100000">
-              <a:schemeClr val="phClr">
-                <a:shade val="30000"/>
-                <a:satMod val="200000"/>
-              </a:schemeClr>
-            </a:gs>
-          </a:gsLst>
-          <a:path path="circle">
-            <a:fillToRect l="50000" t="50000" r="50000" b="50000"/>
-          </a:path>
+          <a:lin ang="5400000" scaled="0"/>
         </a:gradFill>
       </a:bgFillStyleLst>
     </a:fmtScheme>
   </a:themeElements>
-  <a:objectDefaults>
-    <a:spDef>
-      <a:spPr/>
-      <a:bodyPr/>
-      <a:lstStyle/>
-      <a:style>
-        <a:lnRef idx="1">
-          <a:schemeClr val="accent1"/>
-        </a:lnRef>
-        <a:fillRef idx="3">
-          <a:schemeClr val="accent1"/>
-        </a:fillRef>
-        <a:effectRef idx="2">
-          <a:schemeClr val="accent1"/>
-        </a:effectRef>
-        <a:fontRef idx="minor">
-          <a:schemeClr val="lt1"/>
-        </a:fontRef>
-      </a:style>
-    </a:spDef>
-    <a:lnDef>
-      <a:spPr/>
-      <a:bodyPr/>
-      <a:lstStyle/>
-      <a:style>
-        <a:lnRef idx="2">
-          <a:schemeClr val="accent1"/>
-        </a:lnRef>
-        <a:fillRef idx="0">
-          <a:schemeClr val="accent1"/>
-        </a:fillRef>
-        <a:effectRef idx="1">
-          <a:schemeClr val="accent1"/>
-        </a:effectRef>
-        <a:fontRef idx="minor">
-          <a:schemeClr val="tx1"/>
-        </a:fontRef>
-      </a:style>
-    </a:lnDef>
-  </a:objectDefaults>
+  <a:objectDefaults/>
   <a:extraClrSchemeLst/>
+  <a:extLst>
+    <a:ext uri="{05A4C25C-085E-4340-85A3-A5531E510DB2}">
+      <thm15:themeFamily xmlns:thm15="http://schemas.microsoft.com/office/thememl/2012/main" name="Office Theme" id="{62F939B6-93AF-4DB8-9C6B-D6C7DFDC589F}" vid="{4A3C46E8-61CC-4603-A589-7422A47A8E4A}"/>
+    </a:ext>
+  </a:extLst>
 </a:theme>
 </file>